--- a/demo/varfoot-lexhack-pitch.pptx
+++ b/demo/varfoot-lexhack-pitch.pptx
@@ -2,21 +2,23 @@
 <file path=ppt/presentation.xml><?xml version="1.0" encoding="utf-8"?>
 <p:presentation xmlns:p="http://schemas.openxmlformats.org/presentationml/2006/main">
   <p:sldMasterIdLst>
-    <p:sldMasterId xmlns:r="http://schemas.openxmlformats.org/officeDocument/2006/relationships" id="2147483648" r:id="Rd844803cc8644639"/>
+    <p:sldMasterId xmlns:r="http://schemas.openxmlformats.org/officeDocument/2006/relationships" id="2147483648" r:id="R53889fda43454c66"/>
   </p:sldMasterIdLst>
   <p:notesMasterIdLst>
-    <p:notesMasterId xmlns:r="http://schemas.openxmlformats.org/officeDocument/2006/relationships" r:id="R68bdf83afda6437d"/>
+    <p:notesMasterId xmlns:r="http://schemas.openxmlformats.org/officeDocument/2006/relationships" r:id="Rde789bfe04a84b65"/>
   </p:notesMasterIdLst>
   <p:sldIdLst>
-    <p:sldId xmlns:r="http://schemas.openxmlformats.org/officeDocument/2006/relationships" id="256" r:id="R24befd54f59642da"/>
-    <p:sldId xmlns:r="http://schemas.openxmlformats.org/officeDocument/2006/relationships" id="257" r:id="Re2370cac0d034042"/>
-    <p:sldId xmlns:r="http://schemas.openxmlformats.org/officeDocument/2006/relationships" id="258" r:id="R4fba232686514e0d"/>
-    <p:sldId xmlns:r="http://schemas.openxmlformats.org/officeDocument/2006/relationships" id="259" r:id="R5590fdc0e84048ba"/>
-    <p:sldId xmlns:r="http://schemas.openxmlformats.org/officeDocument/2006/relationships" id="260" r:id="Rf28147dc9c7a4a41"/>
-    <p:sldId xmlns:r="http://schemas.openxmlformats.org/officeDocument/2006/relationships" id="261" r:id="Rae34ad831791401f"/>
-    <p:sldId xmlns:r="http://schemas.openxmlformats.org/officeDocument/2006/relationships" id="262" r:id="R269e5eca29a24ae2"/>
-    <p:sldId xmlns:r="http://schemas.openxmlformats.org/officeDocument/2006/relationships" id="263" r:id="R1e968bc3cd494cba"/>
-    <p:sldId xmlns:r="http://schemas.openxmlformats.org/officeDocument/2006/relationships" id="264" r:id="R50a6a8f536284c35"/>
+    <p:sldId xmlns:r="http://schemas.openxmlformats.org/officeDocument/2006/relationships" id="256" r:id="Re5ad4b23cfdf4c94"/>
+    <p:sldId xmlns:r="http://schemas.openxmlformats.org/officeDocument/2006/relationships" id="257" r:id="R4fabd310cc2d4d43"/>
+    <p:sldId xmlns:r="http://schemas.openxmlformats.org/officeDocument/2006/relationships" id="258" r:id="R9662171c04004385"/>
+    <p:sldId xmlns:r="http://schemas.openxmlformats.org/officeDocument/2006/relationships" id="259" r:id="R94ef667ddcec4154"/>
+    <p:sldId xmlns:r="http://schemas.openxmlformats.org/officeDocument/2006/relationships" id="260" r:id="R9a12ae13bfc141b5"/>
+    <p:sldId xmlns:r="http://schemas.openxmlformats.org/officeDocument/2006/relationships" id="261" r:id="R481df1c5e8cb424e"/>
+    <p:sldId xmlns:r="http://schemas.openxmlformats.org/officeDocument/2006/relationships" id="262" r:id="R4538b98c155f4067"/>
+    <p:sldId xmlns:r="http://schemas.openxmlformats.org/officeDocument/2006/relationships" id="263" r:id="R259a32eea4d14cbb"/>
+    <p:sldId xmlns:r="http://schemas.openxmlformats.org/officeDocument/2006/relationships" id="264" r:id="Recefd40f64cb42f3"/>
+    <p:sldId xmlns:r="http://schemas.openxmlformats.org/officeDocument/2006/relationships" id="265" r:id="Rdb4bdba489574c52"/>
+    <p:sldId xmlns:r="http://schemas.openxmlformats.org/officeDocument/2006/relationships" id="266" r:id="R471353d4ae554ac9"/>
   </p:sldIdLst>
   <p:sldSz cx="15240000" cy="8572500"/>
   <p:notesSz cx="6858000" cy="9144000"/>
@@ -499,7 +501,147 @@
           <a:lstStyle xmlns:a="http://schemas.openxmlformats.org/drawingml/2006/main"/>
           <a:p xmlns:a="http://schemas.openxmlformats.org/drawingml/2006/main">
             <a:r>
-              <a:t>Open with Jordan, not the tech stack.</a:t>
+              <a:t>Lead with the line: I built this for myself. A personalized AI soccer roadmap for athletes trying to make varsity.</a:t>
+            </a:r>
+          </a:p>
+        </p:txBody>
+      </p:sp>
+      <p:sp>
+        <p:nvSpPr>
+          <p:cNvPr id="4" name="Slide Number Placeholder 3"/>
+          <p:cNvSpPr>
+            <a:spLocks xmlns:a="http://schemas.openxmlformats.org/drawingml/2006/main" noGrp="1"/>
+          </p:cNvSpPr>
+          <p:nvPr>
+            <p:ph type="sldNum" idx="5"/>
+          </p:nvPr>
+        </p:nvSpPr>
+        <p:spPr/>
+        <p:txBody>
+          <a:bodyPr xmlns:a="http://schemas.openxmlformats.org/drawingml/2006/main"/>
+          <a:lstStyle xmlns:a="http://schemas.openxmlformats.org/drawingml/2006/main"/>
+          <a:p xmlns:a="http://schemas.openxmlformats.org/drawingml/2006/main"/>
+        </p:txBody>
+      </p:sp>
+    </p:spTree>
+  </p:cSld>
+  <p:clrMapOvr>
+    <a:masterClrMapping xmlns:a="http://schemas.openxmlformats.org/drawingml/2006/main"/>
+  </p:clrMapOvr>
+</p:notes>
+</file>
+
+<file path=ppt/notesSlides/notesSlide10.xml><?xml version="1.0" encoding="utf-8"?>
+<p:notes xmlns:p="http://schemas.openxmlformats.org/presentationml/2006/main">
+  <p:cSld>
+    <p:spTree>
+      <p:nvGrpSpPr>
+        <p:cNvPr id="1" name=""/>
+        <p:cNvGrpSpPr/>
+        <p:nvPr/>
+      </p:nvGrpSpPr>
+      <p:grpSpPr>
+        <a:xfrm xmlns:a="http://schemas.openxmlformats.org/drawingml/2006/main"/>
+      </p:grpSpPr>
+      <p:sp>
+        <p:nvSpPr>
+          <p:cNvPr id="2" name="Slide Image Placeholder 1"/>
+          <p:cNvSpPr>
+            <a:spLocks xmlns:a="http://schemas.openxmlformats.org/drawingml/2006/main" noGrp="1"/>
+          </p:cNvSpPr>
+          <p:nvPr>
+            <p:ph type="sldImg" idx="0"/>
+          </p:nvPr>
+        </p:nvSpPr>
+        <p:spPr/>
+      </p:sp>
+      <p:sp>
+        <p:nvSpPr>
+          <p:cNvPr id="3" name="Notes Placeholder 2"/>
+          <p:cNvSpPr>
+            <a:spLocks xmlns:a="http://schemas.openxmlformats.org/drawingml/2006/main" noGrp="1"/>
+          </p:cNvSpPr>
+          <p:nvPr>
+            <p:ph type="body" idx="1"/>
+          </p:nvPr>
+        </p:nvSpPr>
+        <p:spPr/>
+        <p:txBody>
+          <a:bodyPr xmlns:a="http://schemas.openxmlformats.org/drawingml/2006/main"/>
+          <a:lstStyle xmlns:a="http://schemas.openxmlformats.org/drawingml/2006/main"/>
+          <a:p xmlns:a="http://schemas.openxmlformats.org/drawingml/2006/main">
+            <a:r>
+              <a:t>We are two 8th-grade athletes from Andover. Sansar is the soccer player VarFoot was built for; we built it together.</a:t>
+            </a:r>
+          </a:p>
+        </p:txBody>
+      </p:sp>
+      <p:sp>
+        <p:nvSpPr>
+          <p:cNvPr id="4" name="Slide Number Placeholder 3"/>
+          <p:cNvSpPr>
+            <a:spLocks xmlns:a="http://schemas.openxmlformats.org/drawingml/2006/main" noGrp="1"/>
+          </p:cNvSpPr>
+          <p:nvPr>
+            <p:ph type="sldNum" idx="5"/>
+          </p:nvPr>
+        </p:nvSpPr>
+        <p:spPr/>
+        <p:txBody>
+          <a:bodyPr xmlns:a="http://schemas.openxmlformats.org/drawingml/2006/main"/>
+          <a:lstStyle xmlns:a="http://schemas.openxmlformats.org/drawingml/2006/main"/>
+          <a:p xmlns:a="http://schemas.openxmlformats.org/drawingml/2006/main"/>
+        </p:txBody>
+      </p:sp>
+    </p:spTree>
+  </p:cSld>
+  <p:clrMapOvr>
+    <a:masterClrMapping xmlns:a="http://schemas.openxmlformats.org/drawingml/2006/main"/>
+  </p:clrMapOvr>
+</p:notes>
+</file>
+
+<file path=ppt/notesSlides/notesSlide11.xml><?xml version="1.0" encoding="utf-8"?>
+<p:notes xmlns:p="http://schemas.openxmlformats.org/presentationml/2006/main">
+  <p:cSld>
+    <p:spTree>
+      <p:nvGrpSpPr>
+        <p:cNvPr id="1" name=""/>
+        <p:cNvGrpSpPr/>
+        <p:nvPr/>
+      </p:nvGrpSpPr>
+      <p:grpSpPr>
+        <a:xfrm xmlns:a="http://schemas.openxmlformats.org/drawingml/2006/main"/>
+      </p:grpSpPr>
+      <p:sp>
+        <p:nvSpPr>
+          <p:cNvPr id="2" name="Slide Image Placeholder 1"/>
+          <p:cNvSpPr>
+            <a:spLocks xmlns:a="http://schemas.openxmlformats.org/drawingml/2006/main" noGrp="1"/>
+          </p:cNvSpPr>
+          <p:nvPr>
+            <p:ph type="sldImg" idx="0"/>
+          </p:nvPr>
+        </p:nvSpPr>
+        <p:spPr/>
+      </p:sp>
+      <p:sp>
+        <p:nvSpPr>
+          <p:cNvPr id="3" name="Notes Placeholder 2"/>
+          <p:cNvSpPr>
+            <a:spLocks xmlns:a="http://schemas.openxmlformats.org/drawingml/2006/main" noGrp="1"/>
+          </p:cNvSpPr>
+          <p:nvPr>
+            <p:ph type="body" idx="1"/>
+          </p:nvPr>
+        </p:nvSpPr>
+        <p:spPr/>
+        <p:txBody>
+          <a:bodyPr xmlns:a="http://schemas.openxmlformats.org/drawingml/2006/main"/>
+          <a:lstStyle xmlns:a="http://schemas.openxmlformats.org/drawingml/2006/main"/>
+          <a:p xmlns:a="http://schemas.openxmlformats.org/drawingml/2006/main">
+            <a:r>
+              <a:t>Close on the thesis: a real tool built by an athlete for himself, based on a real public varsity journey.</a:t>
             </a:r>
           </a:p>
         </p:txBody>
@@ -567,7 +709,11 @@
         <p:txBody>
           <a:bodyPr xmlns:a="http://schemas.openxmlformats.org/drawingml/2006/main"/>
           <a:lstStyle xmlns:a="http://schemas.openxmlformats.org/drawingml/2006/main"/>
-          <a:p xmlns:a="http://schemas.openxmlformats.org/drawingml/2006/main"/>
+          <a:p xmlns:a="http://schemas.openxmlformats.org/drawingml/2006/main">
+            <a:r>
+              <a:t>Proof this is real: public Instagram journey at @sansar.mp4, 1,100+ followers. Add the profile screenshot before presenting.</a:t>
+            </a:r>
+          </a:p>
         </p:txBody>
       </p:sp>
       <p:sp>
@@ -633,7 +779,11 @@
         <p:txBody>
           <a:bodyPr xmlns:a="http://schemas.openxmlformats.org/drawingml/2006/main"/>
           <a:lstStyle xmlns:a="http://schemas.openxmlformats.org/drawingml/2006/main"/>
-          <a:p xmlns:a="http://schemas.openxmlformats.org/drawingml/2006/main"/>
+          <a:p xmlns:a="http://schemas.openxmlformats.org/drawingml/2006/main">
+            <a:r>
+              <a:t>Frame it as my own problem: effort was there, a system was not.</a:t>
+            </a:r>
+          </a:p>
         </p:txBody>
       </p:sp>
       <p:sp>
@@ -699,7 +849,11 @@
         <p:txBody>
           <a:bodyPr xmlns:a="http://schemas.openxmlformats.org/drawingml/2006/main"/>
           <a:lstStyle xmlns:a="http://schemas.openxmlformats.org/drawingml/2006/main"/>
-          <a:p xmlns:a="http://schemas.openxmlformats.org/drawingml/2006/main"/>
+          <a:p xmlns:a="http://schemas.openxmlformats.org/drawingml/2006/main">
+            <a:r>
+              <a:t>Each existing option is generic where I needed specific.</a:t>
+            </a:r>
+          </a:p>
         </p:txBody>
       </p:sp>
       <p:sp>
@@ -765,7 +919,11 @@
         <p:txBody>
           <a:bodyPr xmlns:a="http://schemas.openxmlformats.org/drawingml/2006/main"/>
           <a:lstStyle xmlns:a="http://schemas.openxmlformats.org/drawingml/2006/main"/>
-          <a:p xmlns:a="http://schemas.openxmlformats.org/drawingml/2006/main"/>
+          <a:p xmlns:a="http://schemas.openxmlformats.org/drawingml/2006/main">
+            <a:r>
+              <a:t>Assessment -&gt; weakness diagnosis -&gt; roadmap -&gt; daily sessions -&gt; fuel -&gt; AI coach.</a:t>
+            </a:r>
+          </a:p>
         </p:txBody>
       </p:sp>
       <p:sp>
@@ -831,7 +989,11 @@
         <p:txBody>
           <a:bodyPr xmlns:a="http://schemas.openxmlformats.org/drawingml/2006/main"/>
           <a:lstStyle xmlns:a="http://schemas.openxmlformats.org/drawingml/2006/main"/>
-          <a:p xmlns:a="http://schemas.openxmlformats.org/drawingml/2006/main"/>
+          <a:p xmlns:a="http://schemas.openxmlformats.org/drawingml/2006/main">
+            <a:r>
+              <a:t>Live order: assessment, plan, session, drill, fuel, coach. Use the demo athlete; mention the full assessment exists.</a:t>
+            </a:r>
+          </a:p>
         </p:txBody>
       </p:sp>
       <p:sp>
@@ -897,7 +1059,11 @@
         <p:txBody>
           <a:bodyPr xmlns:a="http://schemas.openxmlformats.org/drawingml/2006/main"/>
           <a:lstStyle xmlns:a="http://schemas.openxmlformats.org/drawingml/2006/main"/>
-          <a:p xmlns:a="http://schemas.openxmlformats.org/drawingml/2006/main"/>
+          <a:p xmlns:a="http://schemas.openxmlformats.org/drawingml/2006/main">
+            <a:r>
+              <a:t>Stack: Next.js/PWA, Supabase, Gemini, USDA, deterministic engine, 50-drill catalog, safe AI guardrails, Vercel.</a:t>
+            </a:r>
+          </a:p>
         </p:txBody>
       </p:sp>
       <p:sp>
@@ -963,7 +1129,11 @@
         <p:txBody>
           <a:bodyPr xmlns:a="http://schemas.openxmlformats.org/drawingml/2006/main"/>
           <a:lstStyle xmlns:a="http://schemas.openxmlformats.org/drawingml/2006/main"/>
-          <a:p xmlns:a="http://schemas.openxmlformats.org/drawingml/2006/main"/>
+          <a:p xmlns:a="http://schemas.openxmlformats.org/drawingml/2006/main">
+            <a:r>
+              <a:t>Impact: the goal finally becomes actionable, and it generalizes beyond me.</a:t>
+            </a:r>
+          </a:p>
         </p:txBody>
       </p:sp>
       <p:sp>
@@ -1029,7 +1199,11 @@
         <p:txBody>
           <a:bodyPr xmlns:a="http://schemas.openxmlformats.org/drawingml/2006/main"/>
           <a:lstStyle xmlns:a="http://schemas.openxmlformats.org/drawingml/2006/main"/>
-          <a:p xmlns:a="http://schemas.openxmlformats.org/drawingml/2006/main"/>
+          <a:p xmlns:a="http://schemas.openxmlformats.org/drawingml/2006/main">
+            <a:r>
+              <a:t>Contrast the before/after so judges feel the change.</a:t>
+            </a:r>
+          </a:p>
         </p:txBody>
       </p:sp>
       <p:sp>
@@ -1095,7 +1269,7 @@
   </p:cSld>
   <p:clrMap bg1="lt1" tx1="dk1" bg2="lt2" tx2="dk2" accent1="accent1" accent2="accent2" accent3="accent3" accent4="accent4" accent5="accent5" accent6="accent6" hlink="hlink" folHlink="folHlink"/>
   <p:sldLayoutIdLst>
-    <p:sldLayoutId xmlns:r="http://schemas.openxmlformats.org/officeDocument/2006/relationships" id="2147483649" r:id="R6d958e23c6214bc6"/>
+    <p:sldLayoutId xmlns:r="http://schemas.openxmlformats.org/officeDocument/2006/relationships" id="2147483649" r:id="R23b3197ed23d441d"/>
   </p:sldLayoutIdLst>
   <p:txStyles>
     <p:titleStyle>
@@ -1600,18 +1774,18 @@
           <p:cNvPr id="1" name="">
             <a:extLst xmlns:a="http://schemas.openxmlformats.org/drawingml/2006/main">
               <a:ext uri="{FF2B5EF4-FFF2-40B4-BE49-F238E27FC236}">
-                <a16:creationId xmlns:a16="http://schemas.microsoft.com/office/drawing/2014/main" id="{FFB13410-DD71-4025-BFE2-8CB7D17852D6}"/>
-              </a:ext>
-            </a:extLst>
-          </p:cNvPr>
-          <p:cNvSpPr>
-            <a:spLocks xmlns:a="http://schemas.openxmlformats.org/drawingml/2006/main" noGrp="1"/>
-          </p:cNvSpPr>
-          <p:nvPr/>
-        </p:nvSpPr>
-        <p:spPr>
-          <a:xfrm xmlns:a="http://schemas.openxmlformats.org/drawingml/2006/main">
-            <a:off x="609600" y="1771650"/>
+                <a16:creationId xmlns:a16="http://schemas.microsoft.com/office/drawing/2014/main" id="{57739074-5C04-4251-8219-8197CBFF5F8C}"/>
+              </a:ext>
+            </a:extLst>
+          </p:cNvPr>
+          <p:cNvSpPr>
+            <a:spLocks xmlns:a="http://schemas.openxmlformats.org/drawingml/2006/main" noGrp="1"/>
+          </p:cNvSpPr>
+          <p:nvPr/>
+        </p:nvSpPr>
+        <p:spPr>
+          <a:xfrm xmlns:a="http://schemas.openxmlformats.org/drawingml/2006/main">
+            <a:off x="609600" y="1390650"/>
             <a:ext cx="9525000" cy="323850"/>
           </a:xfrm>
           <a:prstGeom xmlns:a="http://schemas.openxmlformats.org/drawingml/2006/main" prst="rect">
@@ -1633,7 +1807,7 @@
               </a:defRPr>
             </a:pPr>
             <a:r>
-              <a:t>LEXHACK '26 / BUILD FOR SOMEONE REAL</a:t>
+              <a:t>LEXHACK '26 / BUILD SOMETHING REAL FOR SOMEONE</a:t>
             </a:r>
           </a:p>
         </p:txBody>
@@ -1643,18 +1817,18 @@
           <p:cNvPr id="2" name="">
             <a:extLst xmlns:a="http://schemas.openxmlformats.org/drawingml/2006/main">
               <a:ext uri="{FF2B5EF4-FFF2-40B4-BE49-F238E27FC236}">
-                <a16:creationId xmlns:a16="http://schemas.microsoft.com/office/drawing/2014/main" id="{FC60CA8F-E1AA-4FD1-B55C-ED9D262AF750}"/>
-              </a:ext>
-            </a:extLst>
-          </p:cNvPr>
-          <p:cNvSpPr>
-            <a:spLocks xmlns:a="http://schemas.openxmlformats.org/drawingml/2006/main" noGrp="1"/>
-          </p:cNvSpPr>
-          <p:nvPr/>
-        </p:nvSpPr>
-        <p:spPr>
-          <a:xfrm xmlns:a="http://schemas.openxmlformats.org/drawingml/2006/main">
-            <a:off x="609600" y="2324100"/>
+                <a16:creationId xmlns:a16="http://schemas.microsoft.com/office/drawing/2014/main" id="{C5EAB797-BFCB-4847-8858-17D0A6C66B59}"/>
+              </a:ext>
+            </a:extLst>
+          </p:cNvPr>
+          <p:cNvSpPr>
+            <a:spLocks xmlns:a="http://schemas.openxmlformats.org/drawingml/2006/main" noGrp="1"/>
+          </p:cNvSpPr>
+          <p:nvPr/>
+        </p:nvSpPr>
+        <p:spPr>
+          <a:xfrm xmlns:a="http://schemas.openxmlformats.org/drawingml/2006/main">
+            <a:off x="609600" y="1885950"/>
             <a:ext cx="8096250" cy="1428750"/>
           </a:xfrm>
           <a:prstGeom xmlns:a="http://schemas.openxmlformats.org/drawingml/2006/main" prst="rect">
@@ -1676,7 +1850,7 @@
               </a:defRPr>
             </a:pPr>
             <a:r>
-              <a:t>VarFoot gives the player training alone a varsity plan.</a:t>
+              <a:t>VarFoot</a:t>
             </a:r>
           </a:p>
         </p:txBody>
@@ -1686,19 +1860,62 @@
           <p:cNvPr id="3" name="">
             <a:extLst xmlns:a="http://schemas.openxmlformats.org/drawingml/2006/main">
               <a:ext uri="{FF2B5EF4-FFF2-40B4-BE49-F238E27FC236}">
-                <a16:creationId xmlns:a16="http://schemas.microsoft.com/office/drawing/2014/main" id="{7CFA9233-0178-42AF-BD4A-3620972A643C}"/>
-              </a:ext>
-            </a:extLst>
-          </p:cNvPr>
-          <p:cNvSpPr>
-            <a:spLocks xmlns:a="http://schemas.openxmlformats.org/drawingml/2006/main" noGrp="1"/>
-          </p:cNvSpPr>
-          <p:nvPr/>
-        </p:nvSpPr>
-        <p:spPr>
-          <a:xfrm xmlns:a="http://schemas.openxmlformats.org/drawingml/2006/main">
-            <a:off x="609600" y="3981450"/>
-            <a:ext cx="7810500" cy="1333500"/>
+                <a16:creationId xmlns:a16="http://schemas.microsoft.com/office/drawing/2014/main" id="{4BB725E1-A946-4880-8D83-CEA53CE9331D}"/>
+              </a:ext>
+            </a:extLst>
+          </p:cNvPr>
+          <p:cNvSpPr>
+            <a:spLocks xmlns:a="http://schemas.openxmlformats.org/drawingml/2006/main" noGrp="1"/>
+          </p:cNvSpPr>
+          <p:nvPr/>
+        </p:nvSpPr>
+        <p:spPr>
+          <a:xfrm xmlns:a="http://schemas.openxmlformats.org/drawingml/2006/main">
+            <a:off x="609600" y="3486150"/>
+            <a:ext cx="8001000" cy="1143000"/>
+          </a:xfrm>
+          <a:prstGeom xmlns:a="http://schemas.openxmlformats.org/drawingml/2006/main" prst="rect">
+            <a:avLst/>
+          </a:prstGeom>
+        </p:spPr>
+        <p:txBody>
+          <a:bodyPr xmlns:a="http://schemas.openxmlformats.org/drawingml/2006/main" wrap="square" lIns="0" tIns="0" rIns="0" bIns="0"/>
+          <a:lstStyle xmlns:a="http://schemas.openxmlformats.org/drawingml/2006/main"/>
+          <a:p xmlns:a="http://schemas.openxmlformats.org/drawingml/2006/main">
+            <a:pPr>
+              <a:defRPr sz="3300" b="1">
+                <a:solidFill>
+                  <a:srgbClr val="F4F5F6"/>
+                </a:solidFill>
+                <a:latin typeface="Avenir Next"/>
+                <a:ea typeface="Avenir Next"/>
+                <a:cs typeface="Avenir Next"/>
+              </a:defRPr>
+            </a:pPr>
+            <a:r>
+              <a:t>A personalized AI soccer roadmap for athletes trying to make varsity.</a:t>
+            </a:r>
+          </a:p>
+        </p:txBody>
+      </p:sp>
+      <p:sp>
+        <p:nvSpPr>
+          <p:cNvPr id="4" name="">
+            <a:extLst xmlns:a="http://schemas.openxmlformats.org/drawingml/2006/main">
+              <a:ext uri="{FF2B5EF4-FFF2-40B4-BE49-F238E27FC236}">
+                <a16:creationId xmlns:a16="http://schemas.microsoft.com/office/drawing/2014/main" id="{2519FBCF-445A-4DEA-98CB-00D2EAD5B5B6}"/>
+              </a:ext>
+            </a:extLst>
+          </p:cNvPr>
+          <p:cNvSpPr>
+            <a:spLocks xmlns:a="http://schemas.openxmlformats.org/drawingml/2006/main" noGrp="1"/>
+          </p:cNvSpPr>
+          <p:nvPr/>
+        </p:nvSpPr>
+        <p:spPr>
+          <a:xfrm xmlns:a="http://schemas.openxmlformats.org/drawingml/2006/main">
+            <a:off x="609600" y="4800600"/>
+            <a:ext cx="7810500" cy="952500"/>
           </a:xfrm>
           <a:prstGeom xmlns:a="http://schemas.openxmlformats.org/drawingml/2006/main" prst="rect">
             <a:avLst/>
@@ -1719,28 +1936,28 @@
               </a:defRPr>
             </a:pPr>
             <a:r>
-              <a:t>Built for Jordan Reyes, a 16-year-old JV midfielder who already trains after school but does not know whether the work is actually moving him toward varsity.</a:t>
-            </a:r>
-          </a:p>
-        </p:txBody>
-      </p:sp>
-      <p:sp>
-        <p:nvSpPr>
-          <p:cNvPr id="4" name="">
-            <a:extLst xmlns:a="http://schemas.openxmlformats.org/drawingml/2006/main">
-              <a:ext uri="{FF2B5EF4-FFF2-40B4-BE49-F238E27FC236}">
-                <a16:creationId xmlns:a16="http://schemas.microsoft.com/office/drawing/2014/main" id="{C198C1DC-7125-4826-94B6-8AB31A44001C}"/>
-              </a:ext>
-            </a:extLst>
-          </p:cNvPr>
-          <p:cNvSpPr>
-            <a:spLocks xmlns:a="http://schemas.openxmlformats.org/drawingml/2006/main" noGrp="1"/>
-          </p:cNvSpPr>
-          <p:nvPr/>
-        </p:nvSpPr>
-        <p:spPr>
-          <a:xfrm xmlns:a="http://schemas.openxmlformats.org/drawingml/2006/main">
-            <a:off x="762000" y="5695950"/>
+              <a:t>Changing future athletes all around the world. Built by Sansar Karki &amp; Saaransh Jinna — and built for a real one chasing varsity.</a:t>
+            </a:r>
+          </a:p>
+        </p:txBody>
+      </p:sp>
+      <p:sp>
+        <p:nvSpPr>
+          <p:cNvPr id="5" name="">
+            <a:extLst xmlns:a="http://schemas.openxmlformats.org/drawingml/2006/main">
+              <a:ext uri="{FF2B5EF4-FFF2-40B4-BE49-F238E27FC236}">
+                <a16:creationId xmlns:a16="http://schemas.microsoft.com/office/drawing/2014/main" id="{BAA00450-7D6C-494A-90FE-F0D9C7FAC626}"/>
+              </a:ext>
+            </a:extLst>
+          </p:cNvPr>
+          <p:cNvSpPr>
+            <a:spLocks xmlns:a="http://schemas.openxmlformats.org/drawingml/2006/main" noGrp="1"/>
+          </p:cNvSpPr>
+          <p:nvPr/>
+        </p:nvSpPr>
+        <p:spPr>
+          <a:xfrm xmlns:a="http://schemas.openxmlformats.org/drawingml/2006/main">
+            <a:off x="762000" y="6076950"/>
             <a:ext cx="1809750" cy="552450"/>
           </a:xfrm>
           <a:prstGeom xmlns:a="http://schemas.openxmlformats.org/drawingml/2006/main" prst="rect">
@@ -1769,21 +1986,21 @@
       </p:sp>
       <p:sp>
         <p:nvSpPr>
-          <p:cNvPr id="5" name="">
-            <a:extLst xmlns:a="http://schemas.openxmlformats.org/drawingml/2006/main">
-              <a:ext uri="{FF2B5EF4-FFF2-40B4-BE49-F238E27FC236}">
-                <a16:creationId xmlns:a16="http://schemas.microsoft.com/office/drawing/2014/main" id="{E2CB3A27-0399-49EA-80B3-D282905DC89B}"/>
-              </a:ext>
-            </a:extLst>
-          </p:cNvPr>
-          <p:cNvSpPr>
-            <a:spLocks xmlns:a="http://schemas.openxmlformats.org/drawingml/2006/main" noGrp="1"/>
-          </p:cNvSpPr>
-          <p:nvPr/>
-        </p:nvSpPr>
-        <p:spPr>
-          <a:xfrm xmlns:a="http://schemas.openxmlformats.org/drawingml/2006/main">
-            <a:off x="762000" y="6267450"/>
+          <p:cNvPr id="6" name="">
+            <a:extLst xmlns:a="http://schemas.openxmlformats.org/drawingml/2006/main">
+              <a:ext uri="{FF2B5EF4-FFF2-40B4-BE49-F238E27FC236}">
+                <a16:creationId xmlns:a16="http://schemas.microsoft.com/office/drawing/2014/main" id="{3508B2F7-D1A2-4BF1-B9CC-7B31A1D166BD}"/>
+              </a:ext>
+            </a:extLst>
+          </p:cNvPr>
+          <p:cNvSpPr>
+            <a:spLocks xmlns:a="http://schemas.openxmlformats.org/drawingml/2006/main" noGrp="1"/>
+          </p:cNvSpPr>
+          <p:nvPr/>
+        </p:nvSpPr>
+        <p:spPr>
+          <a:xfrm xmlns:a="http://schemas.openxmlformats.org/drawingml/2006/main">
+            <a:off x="762000" y="6648450"/>
             <a:ext cx="1714500" cy="381000"/>
           </a:xfrm>
           <a:prstGeom xmlns:a="http://schemas.openxmlformats.org/drawingml/2006/main" prst="rect">
@@ -1812,21 +2029,21 @@
       </p:sp>
       <p:sp>
         <p:nvSpPr>
-          <p:cNvPr id="6" name="">
-            <a:extLst xmlns:a="http://schemas.openxmlformats.org/drawingml/2006/main">
-              <a:ext uri="{FF2B5EF4-FFF2-40B4-BE49-F238E27FC236}">
-                <a16:creationId xmlns:a16="http://schemas.microsoft.com/office/drawing/2014/main" id="{11E021BB-93D1-40AE-8B1B-6D2BFD08BD9E}"/>
-              </a:ext>
-            </a:extLst>
-          </p:cNvPr>
-          <p:cNvSpPr>
-            <a:spLocks xmlns:a="http://schemas.openxmlformats.org/drawingml/2006/main" noGrp="1"/>
-          </p:cNvSpPr>
-          <p:nvPr/>
-        </p:nvSpPr>
-        <p:spPr>
-          <a:xfrm xmlns:a="http://schemas.openxmlformats.org/drawingml/2006/main">
-            <a:off x="3028950" y="5695950"/>
+          <p:cNvPr id="7" name="">
+            <a:extLst xmlns:a="http://schemas.openxmlformats.org/drawingml/2006/main">
+              <a:ext uri="{FF2B5EF4-FFF2-40B4-BE49-F238E27FC236}">
+                <a16:creationId xmlns:a16="http://schemas.microsoft.com/office/drawing/2014/main" id="{C97B25C1-E29F-4A78-9F1E-9C289047E5CD}"/>
+              </a:ext>
+            </a:extLst>
+          </p:cNvPr>
+          <p:cNvSpPr>
+            <a:spLocks xmlns:a="http://schemas.openxmlformats.org/drawingml/2006/main" noGrp="1"/>
+          </p:cNvSpPr>
+          <p:nvPr/>
+        </p:nvSpPr>
+        <p:spPr>
+          <a:xfrm xmlns:a="http://schemas.openxmlformats.org/drawingml/2006/main">
+            <a:off x="3028950" y="6076950"/>
             <a:ext cx="1809750" cy="552450"/>
           </a:xfrm>
           <a:prstGeom xmlns:a="http://schemas.openxmlformats.org/drawingml/2006/main" prst="rect">
@@ -1848,28 +2065,28 @@
               </a:defRPr>
             </a:pPr>
             <a:r>
-              <a:t>38</a:t>
-            </a:r>
-          </a:p>
-        </p:txBody>
-      </p:sp>
-      <p:sp>
-        <p:nvSpPr>
-          <p:cNvPr id="7" name="">
-            <a:extLst xmlns:a="http://schemas.openxmlformats.org/drawingml/2006/main">
-              <a:ext uri="{FF2B5EF4-FFF2-40B4-BE49-F238E27FC236}">
-                <a16:creationId xmlns:a16="http://schemas.microsoft.com/office/drawing/2014/main" id="{1A933B87-273B-47C5-B3AA-678496BF3E94}"/>
-              </a:ext>
-            </a:extLst>
-          </p:cNvPr>
-          <p:cNvSpPr>
-            <a:spLocks xmlns:a="http://schemas.openxmlformats.org/drawingml/2006/main" noGrp="1"/>
-          </p:cNvSpPr>
-          <p:nvPr/>
-        </p:nvSpPr>
-        <p:spPr>
-          <a:xfrm xmlns:a="http://schemas.openxmlformats.org/drawingml/2006/main">
-            <a:off x="3028950" y="6267450"/>
+              <a:t>35</a:t>
+            </a:r>
+          </a:p>
+        </p:txBody>
+      </p:sp>
+      <p:sp>
+        <p:nvSpPr>
+          <p:cNvPr id="8" name="">
+            <a:extLst xmlns:a="http://schemas.openxmlformats.org/drawingml/2006/main">
+              <a:ext uri="{FF2B5EF4-FFF2-40B4-BE49-F238E27FC236}">
+                <a16:creationId xmlns:a16="http://schemas.microsoft.com/office/drawing/2014/main" id="{5A441CE9-DEE7-4457-A714-F3D45054615A}"/>
+              </a:ext>
+            </a:extLst>
+          </p:cNvPr>
+          <p:cNvSpPr>
+            <a:spLocks xmlns:a="http://schemas.openxmlformats.org/drawingml/2006/main" noGrp="1"/>
+          </p:cNvSpPr>
+          <p:nvPr/>
+        </p:nvSpPr>
+        <p:spPr>
+          <a:xfrm xmlns:a="http://schemas.openxmlformats.org/drawingml/2006/main">
+            <a:off x="3028950" y="6648450"/>
             <a:ext cx="1714500" cy="381000"/>
           </a:xfrm>
           <a:prstGeom xmlns:a="http://schemas.openxmlformats.org/drawingml/2006/main" prst="rect">
@@ -1891,28 +2108,28 @@
               </a:defRPr>
             </a:pPr>
             <a:r>
-              <a:t>days left</a:t>
-            </a:r>
-          </a:p>
-        </p:txBody>
-      </p:sp>
-      <p:sp>
-        <p:nvSpPr>
-          <p:cNvPr id="8" name="">
-            <a:extLst xmlns:a="http://schemas.openxmlformats.org/drawingml/2006/main">
-              <a:ext uri="{FF2B5EF4-FFF2-40B4-BE49-F238E27FC236}">
-                <a16:creationId xmlns:a16="http://schemas.microsoft.com/office/drawing/2014/main" id="{50439530-118F-458E-8617-9619D4A8CBD4}"/>
-              </a:ext>
-            </a:extLst>
-          </p:cNvPr>
-          <p:cNvSpPr>
-            <a:spLocks xmlns:a="http://schemas.openxmlformats.org/drawingml/2006/main" noGrp="1"/>
-          </p:cNvSpPr>
-          <p:nvPr/>
-        </p:nvSpPr>
-        <p:spPr>
-          <a:xfrm xmlns:a="http://schemas.openxmlformats.org/drawingml/2006/main">
-            <a:off x="5295900" y="5695950"/>
+              <a:t>days to tryouts</a:t>
+            </a:r>
+          </a:p>
+        </p:txBody>
+      </p:sp>
+      <p:sp>
+        <p:nvSpPr>
+          <p:cNvPr id="9" name="">
+            <a:extLst xmlns:a="http://schemas.openxmlformats.org/drawingml/2006/main">
+              <a:ext uri="{FF2B5EF4-FFF2-40B4-BE49-F238E27FC236}">
+                <a16:creationId xmlns:a16="http://schemas.microsoft.com/office/drawing/2014/main" id="{BF76EE20-3B5A-49BA-BCE3-9987BDE376C2}"/>
+              </a:ext>
+            </a:extLst>
+          </p:cNvPr>
+          <p:cNvSpPr>
+            <a:spLocks xmlns:a="http://schemas.openxmlformats.org/drawingml/2006/main" noGrp="1"/>
+          </p:cNvSpPr>
+          <p:nvPr/>
+        </p:nvSpPr>
+        <p:spPr>
+          <a:xfrm xmlns:a="http://schemas.openxmlformats.org/drawingml/2006/main">
+            <a:off x="5295900" y="6076950"/>
             <a:ext cx="1809750" cy="552450"/>
           </a:xfrm>
           <a:prstGeom xmlns:a="http://schemas.openxmlformats.org/drawingml/2006/main" prst="rect">
@@ -1941,33 +2158,478 @@
       </p:sp>
       <p:sp>
         <p:nvSpPr>
+          <p:cNvPr id="10" name="">
+            <a:extLst xmlns:a="http://schemas.openxmlformats.org/drawingml/2006/main">
+              <a:ext uri="{FF2B5EF4-FFF2-40B4-BE49-F238E27FC236}">
+                <a16:creationId xmlns:a16="http://schemas.microsoft.com/office/drawing/2014/main" id="{8D346F15-FB61-4A50-A6CA-5E805C58834A}"/>
+              </a:ext>
+            </a:extLst>
+          </p:cNvPr>
+          <p:cNvSpPr>
+            <a:spLocks xmlns:a="http://schemas.openxmlformats.org/drawingml/2006/main" noGrp="1"/>
+          </p:cNvSpPr>
+          <p:nvPr/>
+        </p:nvSpPr>
+        <p:spPr>
+          <a:xfrm xmlns:a="http://schemas.openxmlformats.org/drawingml/2006/main">
+            <a:off x="5295900" y="6648450"/>
+            <a:ext cx="1714500" cy="381000"/>
+          </a:xfrm>
+          <a:prstGeom xmlns:a="http://schemas.openxmlformats.org/drawingml/2006/main" prst="rect">
+            <a:avLst/>
+          </a:prstGeom>
+        </p:spPr>
+        <p:txBody>
+          <a:bodyPr xmlns:a="http://schemas.openxmlformats.org/drawingml/2006/main" wrap="square" lIns="0" tIns="0" rIns="0" bIns="0"/>
+          <a:lstStyle xmlns:a="http://schemas.openxmlformats.org/drawingml/2006/main"/>
+          <a:p xmlns:a="http://schemas.openxmlformats.org/drawingml/2006/main">
+            <a:pPr>
+              <a:defRPr sz="1425" b="1">
+                <a:solidFill>
+                  <a:srgbClr val="9AA1A9"/>
+                </a:solidFill>
+                <a:latin typeface="Avenir Next"/>
+                <a:ea typeface="Avenir Next"/>
+                <a:cs typeface="Avenir Next"/>
+              </a:defRPr>
+            </a:pPr>
+            <a:r>
+              <a:t>next session</a:t>
+            </a:r>
+          </a:p>
+        </p:txBody>
+      </p:sp>
+      <p:pic>
+        <p:nvPicPr>
+          <p:cNvPr id="11" name=""/>
+          <p:cNvPicPr>
+            <a:picLocks xmlns:a="http://schemas.openxmlformats.org/drawingml/2006/main" noChangeAspect="1"/>
+          </p:cNvPicPr>
+          <p:nvPr/>
+        </p:nvPicPr>
+        <p:blipFill>
+          <a:blip xmlns:r="http://schemas.openxmlformats.org/officeDocument/2006/relationships" xmlns:a="http://schemas.openxmlformats.org/drawingml/2006/main" r:embed="R22a37a724e4541b8"/>
+          <a:stretch xmlns:a="http://schemas.openxmlformats.org/drawingml/2006/main"/>
+        </p:blipFill>
+        <p:spPr>
+          <a:xfrm xmlns:a="http://schemas.openxmlformats.org/drawingml/2006/main">
+            <a:off x="9744346" y="704850"/>
+            <a:ext cx="3257008" cy="7048500"/>
+          </a:xfrm>
+          <a:prstGeom xmlns:a="http://schemas.openxmlformats.org/drawingml/2006/main" prst="rect">
+            <a:avLst/>
+          </a:prstGeom>
+        </p:spPr>
+      </p:pic>
+    </p:spTree>
+    <p:extLst>
+      <p:ext uri="{BB962C8B-B14F-4D97-AF65-F5344CB8AC3E}">
+        <p14:creationId xmlns:p14="http://schemas.microsoft.com/office/powerpoint/2010/main" val="920400057"/>
+      </p:ext>
+    </p:extLst>
+  </p:cSld>
+</p:sld>
+</file>
+
+<file path=ppt/slides/slide10.xml><?xml version="1.0" encoding="utf-8"?>
+<p:sld xmlns:p="http://schemas.openxmlformats.org/presentationml/2006/main">
+  <p:cSld>
+    <p:bg>
+      <p:bgPr>
+        <a:solidFill xmlns:a="http://schemas.openxmlformats.org/drawingml/2006/main">
+          <a:srgbClr val="0A0A0B"/>
+        </a:solidFill>
+      </p:bgPr>
+    </p:bg>
+    <p:spTree>
+      <p:nvGrpSpPr>
+        <p:cNvPr id="1" name=""/>
+        <p:cNvGrpSpPr/>
+        <p:nvPr/>
+      </p:nvGrpSpPr>
+      <p:grpSpPr>
+        <a:xfrm xmlns:a="http://schemas.openxmlformats.org/drawingml/2006/main"/>
+      </p:grpSpPr>
+      <p:sp>
+        <p:nvSpPr>
+          <p:cNvPr id="1" name="">
+            <a:extLst xmlns:a="http://schemas.openxmlformats.org/drawingml/2006/main">
+              <a:ext uri="{FF2B5EF4-FFF2-40B4-BE49-F238E27FC236}">
+                <a16:creationId xmlns:a16="http://schemas.microsoft.com/office/drawing/2014/main" id="{DF015B93-85D7-4494-B4D8-B3B50CDAE5E6}"/>
+              </a:ext>
+            </a:extLst>
+          </p:cNvPr>
+          <p:cNvSpPr>
+            <a:spLocks xmlns:a="http://schemas.openxmlformats.org/drawingml/2006/main" noGrp="1"/>
+          </p:cNvSpPr>
+          <p:nvPr/>
+        </p:nvSpPr>
+        <p:spPr>
+          <a:xfrm xmlns:a="http://schemas.openxmlformats.org/drawingml/2006/main">
+            <a:off x="609600" y="609600"/>
+            <a:ext cx="9525000" cy="323850"/>
+          </a:xfrm>
+          <a:prstGeom xmlns:a="http://schemas.openxmlformats.org/drawingml/2006/main" prst="rect">
+            <a:avLst/>
+          </a:prstGeom>
+        </p:spPr>
+        <p:txBody>
+          <a:bodyPr xmlns:a="http://schemas.openxmlformats.org/drawingml/2006/main" wrap="square" lIns="0" tIns="0" rIns="0" bIns="0"/>
+          <a:lstStyle xmlns:a="http://schemas.openxmlformats.org/drawingml/2006/main"/>
+          <a:p xmlns:a="http://schemas.openxmlformats.org/drawingml/2006/main">
+            <a:pPr>
+              <a:defRPr sz="1350" b="1">
+                <a:solidFill>
+                  <a:srgbClr val="39FF73"/>
+                </a:solidFill>
+                <a:latin typeface="Avenir Next"/>
+                <a:ea typeface="Avenir Next"/>
+                <a:cs typeface="Avenir Next"/>
+              </a:defRPr>
+            </a:pPr>
+            <a:r>
+              <a:t>ABOUT THE CREATORS</a:t>
+            </a:r>
+          </a:p>
+        </p:txBody>
+      </p:sp>
+      <p:sp>
+        <p:nvSpPr>
+          <p:cNvPr id="2" name="">
+            <a:extLst xmlns:a="http://schemas.openxmlformats.org/drawingml/2006/main">
+              <a:ext uri="{FF2B5EF4-FFF2-40B4-BE49-F238E27FC236}">
+                <a16:creationId xmlns:a16="http://schemas.microsoft.com/office/drawing/2014/main" id="{D1EE7E54-5524-4913-AA7F-794D812A9B24}"/>
+              </a:ext>
+            </a:extLst>
+          </p:cNvPr>
+          <p:cNvSpPr>
+            <a:spLocks xmlns:a="http://schemas.openxmlformats.org/drawingml/2006/main" noGrp="1"/>
+          </p:cNvSpPr>
+          <p:nvPr/>
+        </p:nvSpPr>
+        <p:spPr>
+          <a:xfrm xmlns:a="http://schemas.openxmlformats.org/drawingml/2006/main">
+            <a:off x="609600" y="1219200"/>
+            <a:ext cx="11239500" cy="1143000"/>
+          </a:xfrm>
+          <a:prstGeom xmlns:a="http://schemas.openxmlformats.org/drawingml/2006/main" prst="rect">
+            <a:avLst/>
+          </a:prstGeom>
+        </p:spPr>
+        <p:txBody>
+          <a:bodyPr xmlns:a="http://schemas.openxmlformats.org/drawingml/2006/main" wrap="square" lIns="0" tIns="0" rIns="0" bIns="0"/>
+          <a:lstStyle xmlns:a="http://schemas.openxmlformats.org/drawingml/2006/main"/>
+          <a:p xmlns:a="http://schemas.openxmlformats.org/drawingml/2006/main">
+            <a:pPr>
+              <a:defRPr sz="3300" b="1">
+                <a:solidFill>
+                  <a:srgbClr val="F4F5F6"/>
+                </a:solidFill>
+                <a:latin typeface="Avenir Next"/>
+                <a:ea typeface="Avenir Next"/>
+                <a:cs typeface="Avenir Next"/>
+              </a:defRPr>
+            </a:pPr>
+            <a:r>
+              <a:t>Two 8th graders from Andover, MA.</a:t>
+            </a:r>
+          </a:p>
+        </p:txBody>
+      </p:sp>
+      <p:pic>
+        <p:nvPicPr>
+          <p:cNvPr id="3" name=""/>
+          <p:cNvPicPr>
+            <a:picLocks xmlns:a="http://schemas.openxmlformats.org/drawingml/2006/main" noChangeAspect="1"/>
+          </p:cNvPicPr>
+          <p:nvPr/>
+        </p:nvPicPr>
+        <p:blipFill>
+          <a:blip xmlns:r="http://schemas.openxmlformats.org/officeDocument/2006/relationships" xmlns:a="http://schemas.openxmlformats.org/drawingml/2006/main" r:embed="Rf8ca60a1434444a3"/>
+          <a:srcRect xmlns:a="http://schemas.openxmlformats.org/drawingml/2006/main" l="0" t="0" r="0" b="0"/>
+          <a:stretch xmlns:a="http://schemas.openxmlformats.org/drawingml/2006/main">
+            <a:fillRect l="0" t="0" r="0" b="0"/>
+          </a:stretch>
+        </p:blipFill>
+        <p:spPr>
+          <a:xfrm xmlns:a="http://schemas.openxmlformats.org/drawingml/2006/main">
+            <a:off x="609600" y="2647950"/>
+            <a:ext cx="1428750" cy="1428750"/>
+          </a:xfrm>
+          <a:prstGeom xmlns:a="http://schemas.openxmlformats.org/drawingml/2006/main" prst="rect">
+            <a:avLst/>
+          </a:prstGeom>
+        </p:spPr>
+      </p:pic>
+      <p:sp>
+        <p:nvSpPr>
+          <p:cNvPr id="4" name="">
+            <a:extLst xmlns:a="http://schemas.openxmlformats.org/drawingml/2006/main">
+              <a:ext uri="{FF2B5EF4-FFF2-40B4-BE49-F238E27FC236}">
+                <a16:creationId xmlns:a16="http://schemas.microsoft.com/office/drawing/2014/main" id="{DA4BFE60-B61B-44C6-9621-8619E4315C49}"/>
+              </a:ext>
+            </a:extLst>
+          </p:cNvPr>
+          <p:cNvSpPr>
+            <a:spLocks xmlns:a="http://schemas.openxmlformats.org/drawingml/2006/main" noGrp="1"/>
+          </p:cNvSpPr>
+          <p:nvPr/>
+        </p:nvSpPr>
+        <p:spPr>
+          <a:xfrm xmlns:a="http://schemas.openxmlformats.org/drawingml/2006/main">
+            <a:off x="2247900" y="2847975"/>
+            <a:ext cx="5029200" cy="438150"/>
+          </a:xfrm>
+          <a:prstGeom xmlns:a="http://schemas.openxmlformats.org/drawingml/2006/main" prst="rect">
+            <a:avLst/>
+          </a:prstGeom>
+        </p:spPr>
+        <p:txBody>
+          <a:bodyPr xmlns:a="http://schemas.openxmlformats.org/drawingml/2006/main" wrap="square" lIns="0" tIns="0" rIns="0" bIns="0"/>
+          <a:lstStyle xmlns:a="http://schemas.openxmlformats.org/drawingml/2006/main"/>
+          <a:p xmlns:a="http://schemas.openxmlformats.org/drawingml/2006/main">
+            <a:pPr>
+              <a:defRPr sz="2250" b="1">
+                <a:solidFill>
+                  <a:srgbClr val="F4F5F6"/>
+                </a:solidFill>
+                <a:latin typeface="Avenir Next"/>
+                <a:ea typeface="Avenir Next"/>
+                <a:cs typeface="Avenir Next"/>
+              </a:defRPr>
+            </a:pPr>
+            <a:r>
+              <a:t>Sansar Karki</a:t>
+            </a:r>
+          </a:p>
+        </p:txBody>
+      </p:sp>
+      <p:sp>
+        <p:nvSpPr>
+          <p:cNvPr id="5" name="">
+            <a:extLst xmlns:a="http://schemas.openxmlformats.org/drawingml/2006/main">
+              <a:ext uri="{FF2B5EF4-FFF2-40B4-BE49-F238E27FC236}">
+                <a16:creationId xmlns:a16="http://schemas.microsoft.com/office/drawing/2014/main" id="{1DA5799D-4F83-4A4C-ACB9-AF167CD13B93}"/>
+              </a:ext>
+            </a:extLst>
+          </p:cNvPr>
+          <p:cNvSpPr>
+            <a:spLocks xmlns:a="http://schemas.openxmlformats.org/drawingml/2006/main" noGrp="1"/>
+          </p:cNvSpPr>
+          <p:nvPr/>
+        </p:nvSpPr>
+        <p:spPr>
+          <a:xfrm xmlns:a="http://schemas.openxmlformats.org/drawingml/2006/main">
+            <a:off x="2247900" y="3343275"/>
+            <a:ext cx="5029200" cy="533400"/>
+          </a:xfrm>
+          <a:prstGeom xmlns:a="http://schemas.openxmlformats.org/drawingml/2006/main" prst="rect">
+            <a:avLst/>
+          </a:prstGeom>
+        </p:spPr>
+        <p:txBody>
+          <a:bodyPr xmlns:a="http://schemas.openxmlformats.org/drawingml/2006/main" wrap="square" lIns="0" tIns="0" rIns="0" bIns="0"/>
+          <a:lstStyle xmlns:a="http://schemas.openxmlformats.org/drawingml/2006/main"/>
+          <a:p xmlns:a="http://schemas.openxmlformats.org/drawingml/2006/main">
+            <a:pPr>
+              <a:defRPr sz="1500" b="1">
+                <a:solidFill>
+                  <a:srgbClr val="39FF73"/>
+                </a:solidFill>
+                <a:latin typeface="Avenir Next"/>
+                <a:ea typeface="Avenir Next"/>
+                <a:cs typeface="Avenir Next"/>
+              </a:defRPr>
+            </a:pPr>
+            <a:r>
+              <a:t>Doherty Middle School · @sansar.mp4</a:t>
+            </a:r>
+          </a:p>
+        </p:txBody>
+      </p:sp>
+      <p:sp>
+        <p:nvSpPr>
+          <p:cNvPr id="6" name="">
+            <a:extLst xmlns:a="http://schemas.openxmlformats.org/drawingml/2006/main">
+              <a:ext uri="{FF2B5EF4-FFF2-40B4-BE49-F238E27FC236}">
+                <a16:creationId xmlns:a16="http://schemas.microsoft.com/office/drawing/2014/main" id="{100CDEF5-F8CC-4C0F-A4FA-C066B4B9DDD7}"/>
+              </a:ext>
+            </a:extLst>
+          </p:cNvPr>
+          <p:cNvSpPr>
+            <a:spLocks xmlns:a="http://schemas.openxmlformats.org/drawingml/2006/main" noGrp="1"/>
+          </p:cNvSpPr>
+          <p:nvPr/>
+        </p:nvSpPr>
+        <p:spPr>
+          <a:xfrm xmlns:a="http://schemas.openxmlformats.org/drawingml/2006/main">
+            <a:off x="609600" y="4229100"/>
+            <a:ext cx="6667500" cy="1905000"/>
+          </a:xfrm>
+          <a:prstGeom xmlns:a="http://schemas.openxmlformats.org/drawingml/2006/main" prst="rect">
+            <a:avLst/>
+          </a:prstGeom>
+        </p:spPr>
+        <p:txBody>
+          <a:bodyPr xmlns:a="http://schemas.openxmlformats.org/drawingml/2006/main" wrap="square" lIns="0" tIns="0" rIns="0" bIns="0"/>
+          <a:lstStyle xmlns:a="http://schemas.openxmlformats.org/drawingml/2006/main"/>
+          <a:p xmlns:a="http://schemas.openxmlformats.org/drawingml/2006/main">
+            <a:pPr>
+              <a:defRPr sz="1575" b="0">
+                <a:solidFill>
+                  <a:srgbClr val="9AA1A9"/>
+                </a:solidFill>
+                <a:latin typeface="Avenir Next"/>
+                <a:ea typeface="Avenir Next"/>
+                <a:cs typeface="Avenir Next"/>
+              </a:defRPr>
+            </a:pPr>
+            <a:r>
+              <a:t>Trying to make varsity soccer as a freshman and documenting the journey to 1,100+ followers. Builds apps and is into AI and robotics. VarFoot is the system he wished he had — so he built it.</a:t>
+            </a:r>
+          </a:p>
+        </p:txBody>
+      </p:sp>
+      <p:pic>
+        <p:nvPicPr>
+          <p:cNvPr id="7" name=""/>
+          <p:cNvPicPr>
+            <a:picLocks xmlns:a="http://schemas.openxmlformats.org/drawingml/2006/main" noChangeAspect="1"/>
+          </p:cNvPicPr>
+          <p:nvPr/>
+        </p:nvPicPr>
+        <p:blipFill>
+          <a:blip xmlns:r="http://schemas.openxmlformats.org/officeDocument/2006/relationships" xmlns:a="http://schemas.openxmlformats.org/drawingml/2006/main" r:embed="R987c03b2c05846a4"/>
+          <a:srcRect xmlns:a="http://schemas.openxmlformats.org/drawingml/2006/main" l="0" t="12487" r="0" b="12487"/>
+          <a:stretch xmlns:a="http://schemas.openxmlformats.org/drawingml/2006/main">
+            <a:fillRect l="0" t="0" r="0" b="0"/>
+          </a:stretch>
+        </p:blipFill>
+        <p:spPr>
+          <a:xfrm xmlns:a="http://schemas.openxmlformats.org/drawingml/2006/main">
+            <a:off x="7753350" y="2647950"/>
+            <a:ext cx="1428750" cy="1428750"/>
+          </a:xfrm>
+          <a:prstGeom xmlns:a="http://schemas.openxmlformats.org/drawingml/2006/main" prst="rect">
+            <a:avLst/>
+          </a:prstGeom>
+        </p:spPr>
+      </p:pic>
+      <p:sp>
+        <p:nvSpPr>
+          <p:cNvPr id="8" name="">
+            <a:extLst xmlns:a="http://schemas.openxmlformats.org/drawingml/2006/main">
+              <a:ext uri="{FF2B5EF4-FFF2-40B4-BE49-F238E27FC236}">
+                <a16:creationId xmlns:a16="http://schemas.microsoft.com/office/drawing/2014/main" id="{98C79F84-7608-4CEA-90B6-21F7C488B544}"/>
+              </a:ext>
+            </a:extLst>
+          </p:cNvPr>
+          <p:cNvSpPr>
+            <a:spLocks xmlns:a="http://schemas.openxmlformats.org/drawingml/2006/main" noGrp="1"/>
+          </p:cNvSpPr>
+          <p:nvPr/>
+        </p:nvSpPr>
+        <p:spPr>
+          <a:xfrm xmlns:a="http://schemas.openxmlformats.org/drawingml/2006/main">
+            <a:off x="9391650" y="2847975"/>
+            <a:ext cx="5029200" cy="438150"/>
+          </a:xfrm>
+          <a:prstGeom xmlns:a="http://schemas.openxmlformats.org/drawingml/2006/main" prst="rect">
+            <a:avLst/>
+          </a:prstGeom>
+        </p:spPr>
+        <p:txBody>
+          <a:bodyPr xmlns:a="http://schemas.openxmlformats.org/drawingml/2006/main" wrap="square" lIns="0" tIns="0" rIns="0" bIns="0"/>
+          <a:lstStyle xmlns:a="http://schemas.openxmlformats.org/drawingml/2006/main"/>
+          <a:p xmlns:a="http://schemas.openxmlformats.org/drawingml/2006/main">
+            <a:pPr>
+              <a:defRPr sz="2250" b="1">
+                <a:solidFill>
+                  <a:srgbClr val="F4F5F6"/>
+                </a:solidFill>
+                <a:latin typeface="Avenir Next"/>
+                <a:ea typeface="Avenir Next"/>
+                <a:cs typeface="Avenir Next"/>
+              </a:defRPr>
+            </a:pPr>
+            <a:r>
+              <a:t>Saaransh Jinna</a:t>
+            </a:r>
+          </a:p>
+        </p:txBody>
+      </p:sp>
+      <p:sp>
+        <p:nvSpPr>
           <p:cNvPr id="9" name="">
             <a:extLst xmlns:a="http://schemas.openxmlformats.org/drawingml/2006/main">
               <a:ext uri="{FF2B5EF4-FFF2-40B4-BE49-F238E27FC236}">
-                <a16:creationId xmlns:a16="http://schemas.microsoft.com/office/drawing/2014/main" id="{280DD724-E7C6-4DEE-B37E-AB7D41BCDAA8}"/>
-              </a:ext>
-            </a:extLst>
-          </p:cNvPr>
-          <p:cNvSpPr>
-            <a:spLocks xmlns:a="http://schemas.openxmlformats.org/drawingml/2006/main" noGrp="1"/>
-          </p:cNvSpPr>
-          <p:nvPr/>
-        </p:nvSpPr>
-        <p:spPr>
-          <a:xfrm xmlns:a="http://schemas.openxmlformats.org/drawingml/2006/main">
-            <a:off x="5295900" y="6267450"/>
-            <a:ext cx="1714500" cy="381000"/>
-          </a:xfrm>
-          <a:prstGeom xmlns:a="http://schemas.openxmlformats.org/drawingml/2006/main" prst="rect">
-            <a:avLst/>
-          </a:prstGeom>
-        </p:spPr>
-        <p:txBody>
-          <a:bodyPr xmlns:a="http://schemas.openxmlformats.org/drawingml/2006/main" wrap="square" lIns="0" tIns="0" rIns="0" bIns="0"/>
-          <a:lstStyle xmlns:a="http://schemas.openxmlformats.org/drawingml/2006/main"/>
-          <a:p xmlns:a="http://schemas.openxmlformats.org/drawingml/2006/main">
-            <a:pPr>
-              <a:defRPr sz="1425" b="1">
+                <a16:creationId xmlns:a16="http://schemas.microsoft.com/office/drawing/2014/main" id="{A374F74C-6DB0-4CF9-9CED-90565B53144D}"/>
+              </a:ext>
+            </a:extLst>
+          </p:cNvPr>
+          <p:cNvSpPr>
+            <a:spLocks xmlns:a="http://schemas.openxmlformats.org/drawingml/2006/main" noGrp="1"/>
+          </p:cNvSpPr>
+          <p:nvPr/>
+        </p:nvSpPr>
+        <p:spPr>
+          <a:xfrm xmlns:a="http://schemas.openxmlformats.org/drawingml/2006/main">
+            <a:off x="9391650" y="3343275"/>
+            <a:ext cx="5029200" cy="533400"/>
+          </a:xfrm>
+          <a:prstGeom xmlns:a="http://schemas.openxmlformats.org/drawingml/2006/main" prst="rect">
+            <a:avLst/>
+          </a:prstGeom>
+        </p:spPr>
+        <p:txBody>
+          <a:bodyPr xmlns:a="http://schemas.openxmlformats.org/drawingml/2006/main" wrap="square" lIns="0" tIns="0" rIns="0" bIns="0"/>
+          <a:lstStyle xmlns:a="http://schemas.openxmlformats.org/drawingml/2006/main"/>
+          <a:p xmlns:a="http://schemas.openxmlformats.org/drawingml/2006/main">
+            <a:pPr>
+              <a:defRPr sz="1500" b="1">
+                <a:solidFill>
+                  <a:srgbClr val="4DB6FF"/>
+                </a:solidFill>
+                <a:latin typeface="Avenir Next"/>
+                <a:ea typeface="Avenir Next"/>
+                <a:cs typeface="Avenir Next"/>
+              </a:defRPr>
+            </a:pPr>
+            <a:r>
+              <a:t>Wood Hill Middle School</a:t>
+            </a:r>
+          </a:p>
+        </p:txBody>
+      </p:sp>
+      <p:sp>
+        <p:nvSpPr>
+          <p:cNvPr id="10" name="">
+            <a:extLst xmlns:a="http://schemas.openxmlformats.org/drawingml/2006/main">
+              <a:ext uri="{FF2B5EF4-FFF2-40B4-BE49-F238E27FC236}">
+                <a16:creationId xmlns:a16="http://schemas.microsoft.com/office/drawing/2014/main" id="{252AC640-A65F-40B7-A2D6-6E7383A4C215}"/>
+              </a:ext>
+            </a:extLst>
+          </p:cNvPr>
+          <p:cNvSpPr>
+            <a:spLocks xmlns:a="http://schemas.openxmlformats.org/drawingml/2006/main" noGrp="1"/>
+          </p:cNvSpPr>
+          <p:nvPr/>
+        </p:nvSpPr>
+        <p:spPr>
+          <a:xfrm xmlns:a="http://schemas.openxmlformats.org/drawingml/2006/main">
+            <a:off x="7753350" y="4229100"/>
+            <a:ext cx="6667500" cy="1905000"/>
+          </a:xfrm>
+          <a:prstGeom xmlns:a="http://schemas.openxmlformats.org/drawingml/2006/main" prst="rect">
+            <a:avLst/>
+          </a:prstGeom>
+        </p:spPr>
+        <p:txBody>
+          <a:bodyPr xmlns:a="http://schemas.openxmlformats.org/drawingml/2006/main" wrap="square" lIns="0" tIns="0" rIns="0" bIns="0"/>
+          <a:lstStyle xmlns:a="http://schemas.openxmlformats.org/drawingml/2006/main"/>
+          <a:p xmlns:a="http://schemas.openxmlformats.org/drawingml/2006/main">
+            <a:pPr>
+              <a:defRPr sz="1575" b="0">
                 <a:solidFill>
                   <a:srgbClr val="9AA1A9"/>
                 </a:solidFill>
@@ -1977,7 +2639,423 @@
               </a:defRPr>
             </a:pPr>
             <a:r>
-              <a:t>next session</a:t>
+              <a:t>Training to make the AHS tennis team; into robotics and math. Plays piano and any sport with friends. Brings the same athlete-chasing-a-spot perspective to how VarFoot is designed.</a:t>
+            </a:r>
+          </a:p>
+        </p:txBody>
+      </p:sp>
+    </p:spTree>
+    <p:extLst>
+      <p:ext uri="{BB962C8B-B14F-4D97-AF65-F5344CB8AC3E}">
+        <p14:creationId xmlns:p14="http://schemas.microsoft.com/office/powerpoint/2010/main" val="900112620"/>
+      </p:ext>
+    </p:extLst>
+  </p:cSld>
+</p:sld>
+</file>
+
+<file path=ppt/slides/slide11.xml><?xml version="1.0" encoding="utf-8"?>
+<p:sld xmlns:p="http://schemas.openxmlformats.org/presentationml/2006/main">
+  <p:cSld>
+    <p:bg>
+      <p:bgPr>
+        <a:solidFill xmlns:a="http://schemas.openxmlformats.org/drawingml/2006/main">
+          <a:srgbClr val="0A0A0B"/>
+        </a:solidFill>
+      </p:bgPr>
+    </p:bg>
+    <p:spTree>
+      <p:nvGrpSpPr>
+        <p:cNvPr id="1" name=""/>
+        <p:cNvGrpSpPr/>
+        <p:nvPr/>
+      </p:nvGrpSpPr>
+      <p:grpSpPr>
+        <a:xfrm xmlns:a="http://schemas.openxmlformats.org/drawingml/2006/main"/>
+      </p:grpSpPr>
+      <p:sp>
+        <p:nvSpPr>
+          <p:cNvPr id="1" name="">
+            <a:extLst xmlns:a="http://schemas.openxmlformats.org/drawingml/2006/main">
+              <a:ext uri="{FF2B5EF4-FFF2-40B4-BE49-F238E27FC236}">
+                <a16:creationId xmlns:a16="http://schemas.microsoft.com/office/drawing/2014/main" id="{5351A315-1116-4B86-86CC-AD349EA547E5}"/>
+              </a:ext>
+            </a:extLst>
+          </p:cNvPr>
+          <p:cNvSpPr>
+            <a:spLocks xmlns:a="http://schemas.openxmlformats.org/drawingml/2006/main" noGrp="1"/>
+          </p:cNvSpPr>
+          <p:nvPr/>
+        </p:nvSpPr>
+        <p:spPr>
+          <a:xfrm xmlns:a="http://schemas.openxmlformats.org/drawingml/2006/main">
+            <a:off x="609600" y="1428750"/>
+            <a:ext cx="9525000" cy="323850"/>
+          </a:xfrm>
+          <a:prstGeom xmlns:a="http://schemas.openxmlformats.org/drawingml/2006/main" prst="rect">
+            <a:avLst/>
+          </a:prstGeom>
+        </p:spPr>
+        <p:txBody>
+          <a:bodyPr xmlns:a="http://schemas.openxmlformats.org/drawingml/2006/main" wrap="square" lIns="0" tIns="0" rIns="0" bIns="0"/>
+          <a:lstStyle xmlns:a="http://schemas.openxmlformats.org/drawingml/2006/main"/>
+          <a:p xmlns:a="http://schemas.openxmlformats.org/drawingml/2006/main">
+            <a:pPr>
+              <a:defRPr sz="1350" b="1">
+                <a:solidFill>
+                  <a:srgbClr val="39FF73"/>
+                </a:solidFill>
+                <a:latin typeface="Avenir Next"/>
+                <a:ea typeface="Avenir Next"/>
+                <a:cs typeface="Avenir Next"/>
+              </a:defRPr>
+            </a:pPr>
+            <a:r>
+              <a:t>CLOSING</a:t>
+            </a:r>
+          </a:p>
+        </p:txBody>
+      </p:sp>
+      <p:sp>
+        <p:nvSpPr>
+          <p:cNvPr id="2" name="">
+            <a:extLst xmlns:a="http://schemas.openxmlformats.org/drawingml/2006/main">
+              <a:ext uri="{FF2B5EF4-FFF2-40B4-BE49-F238E27FC236}">
+                <a16:creationId xmlns:a16="http://schemas.microsoft.com/office/drawing/2014/main" id="{D208ABBD-0E88-429A-833A-E142B1E28651}"/>
+              </a:ext>
+            </a:extLst>
+          </p:cNvPr>
+          <p:cNvSpPr>
+            <a:spLocks xmlns:a="http://schemas.openxmlformats.org/drawingml/2006/main" noGrp="1"/>
+          </p:cNvSpPr>
+          <p:nvPr/>
+        </p:nvSpPr>
+        <p:spPr>
+          <a:xfrm xmlns:a="http://schemas.openxmlformats.org/drawingml/2006/main">
+            <a:off x="609600" y="1981200"/>
+            <a:ext cx="8001000" cy="1428750"/>
+          </a:xfrm>
+          <a:prstGeom xmlns:a="http://schemas.openxmlformats.org/drawingml/2006/main" prst="rect">
+            <a:avLst/>
+          </a:prstGeom>
+        </p:spPr>
+        <p:txBody>
+          <a:bodyPr xmlns:a="http://schemas.openxmlformats.org/drawingml/2006/main" wrap="square" lIns="0" tIns="0" rIns="0" bIns="0"/>
+          <a:lstStyle xmlns:a="http://schemas.openxmlformats.org/drawingml/2006/main"/>
+          <a:p xmlns:a="http://schemas.openxmlformats.org/drawingml/2006/main">
+            <a:pPr>
+              <a:defRPr sz="4350" b="1">
+                <a:solidFill>
+                  <a:srgbClr val="F4F5F6"/>
+                </a:solidFill>
+                <a:latin typeface="Avenir Next"/>
+                <a:ea typeface="Avenir Next"/>
+                <a:cs typeface="Avenir Next"/>
+              </a:defRPr>
+            </a:pPr>
+            <a:r>
+              <a:t>Built for someone real: me.</a:t>
+            </a:r>
+          </a:p>
+        </p:txBody>
+      </p:sp>
+      <p:sp>
+        <p:nvSpPr>
+          <p:cNvPr id="3" name="">
+            <a:extLst xmlns:a="http://schemas.openxmlformats.org/drawingml/2006/main">
+              <a:ext uri="{FF2B5EF4-FFF2-40B4-BE49-F238E27FC236}">
+                <a16:creationId xmlns:a16="http://schemas.microsoft.com/office/drawing/2014/main" id="{445C696F-9BC7-439C-A547-D7D6156011EA}"/>
+              </a:ext>
+            </a:extLst>
+          </p:cNvPr>
+          <p:cNvSpPr>
+            <a:spLocks xmlns:a="http://schemas.openxmlformats.org/drawingml/2006/main" noGrp="1"/>
+          </p:cNvSpPr>
+          <p:nvPr/>
+        </p:nvSpPr>
+        <p:spPr>
+          <a:xfrm xmlns:a="http://schemas.openxmlformats.org/drawingml/2006/main">
+            <a:off x="609600" y="3638550"/>
+            <a:ext cx="7810500" cy="1333500"/>
+          </a:xfrm>
+          <a:prstGeom xmlns:a="http://schemas.openxmlformats.org/drawingml/2006/main" prst="rect">
+            <a:avLst/>
+          </a:prstGeom>
+        </p:spPr>
+        <p:txBody>
+          <a:bodyPr xmlns:a="http://schemas.openxmlformats.org/drawingml/2006/main" wrap="square" lIns="0" tIns="0" rIns="0" bIns="0"/>
+          <a:lstStyle xmlns:a="http://schemas.openxmlformats.org/drawingml/2006/main"/>
+          <a:p xmlns:a="http://schemas.openxmlformats.org/drawingml/2006/main">
+            <a:pPr>
+              <a:defRPr sz="1875" b="0">
+                <a:solidFill>
+                  <a:srgbClr val="9AA1A9"/>
+                </a:solidFill>
+                <a:latin typeface="Avenir Next"/>
+                <a:ea typeface="Avenir Next"/>
+                <a:cs typeface="Avenir Next"/>
+              </a:defRPr>
+            </a:pPr>
+            <a:r>
+              <a:t>VarFoot was built for one athlete with a real, public goal. If it can help me chase varsity, it can help thousands of athletes with the same goal and no plan.</a:t>
+            </a:r>
+          </a:p>
+        </p:txBody>
+      </p:sp>
+      <p:sp>
+        <p:nvSpPr>
+          <p:cNvPr id="4" name="">
+            <a:extLst xmlns:a="http://schemas.openxmlformats.org/drawingml/2006/main">
+              <a:ext uri="{FF2B5EF4-FFF2-40B4-BE49-F238E27FC236}">
+                <a16:creationId xmlns:a16="http://schemas.microsoft.com/office/drawing/2014/main" id="{938B72DF-9F2E-40CE-B067-32B899905096}"/>
+              </a:ext>
+            </a:extLst>
+          </p:cNvPr>
+          <p:cNvSpPr>
+            <a:spLocks xmlns:a="http://schemas.openxmlformats.org/drawingml/2006/main" noGrp="1"/>
+          </p:cNvSpPr>
+          <p:nvPr/>
+        </p:nvSpPr>
+        <p:spPr>
+          <a:xfrm xmlns:a="http://schemas.openxmlformats.org/drawingml/2006/main">
+            <a:off x="609600" y="5200650"/>
+            <a:ext cx="190500" cy="323850"/>
+          </a:xfrm>
+          <a:prstGeom xmlns:a="http://schemas.openxmlformats.org/drawingml/2006/main" prst="rect">
+            <a:avLst/>
+          </a:prstGeom>
+        </p:spPr>
+        <p:txBody>
+          <a:bodyPr xmlns:a="http://schemas.openxmlformats.org/drawingml/2006/main" wrap="square" lIns="0" tIns="0" rIns="0" bIns="0"/>
+          <a:lstStyle xmlns:a="http://schemas.openxmlformats.org/drawingml/2006/main"/>
+          <a:p xmlns:a="http://schemas.openxmlformats.org/drawingml/2006/main">
+            <a:pPr>
+              <a:defRPr sz="1875" b="1">
+                <a:solidFill>
+                  <a:srgbClr val="39FF73"/>
+                </a:solidFill>
+                <a:latin typeface="Avenir Next"/>
+                <a:ea typeface="Avenir Next"/>
+                <a:cs typeface="Avenir Next"/>
+              </a:defRPr>
+            </a:pPr>
+            <a:r>
+              <a:t>-</a:t>
+            </a:r>
+          </a:p>
+        </p:txBody>
+      </p:sp>
+      <p:sp>
+        <p:nvSpPr>
+          <p:cNvPr id="5" name="">
+            <a:extLst xmlns:a="http://schemas.openxmlformats.org/drawingml/2006/main">
+              <a:ext uri="{FF2B5EF4-FFF2-40B4-BE49-F238E27FC236}">
+                <a16:creationId xmlns:a16="http://schemas.microsoft.com/office/drawing/2014/main" id="{34A3D159-C229-4444-B8D0-DD3271593C12}"/>
+              </a:ext>
+            </a:extLst>
+          </p:cNvPr>
+          <p:cNvSpPr>
+            <a:spLocks xmlns:a="http://schemas.openxmlformats.org/drawingml/2006/main" noGrp="1"/>
+          </p:cNvSpPr>
+          <p:nvPr/>
+        </p:nvSpPr>
+        <p:spPr>
+          <a:xfrm xmlns:a="http://schemas.openxmlformats.org/drawingml/2006/main">
+            <a:off x="914400" y="5200650"/>
+            <a:ext cx="7239000" cy="533400"/>
+          </a:xfrm>
+          <a:prstGeom xmlns:a="http://schemas.openxmlformats.org/drawingml/2006/main" prst="rect">
+            <a:avLst/>
+          </a:prstGeom>
+        </p:spPr>
+        <p:txBody>
+          <a:bodyPr xmlns:a="http://schemas.openxmlformats.org/drawingml/2006/main" wrap="square" lIns="0" tIns="0" rIns="0" bIns="0"/>
+          <a:lstStyle xmlns:a="http://schemas.openxmlformats.org/drawingml/2006/main"/>
+          <a:p xmlns:a="http://schemas.openxmlformats.org/drawingml/2006/main">
+            <a:pPr>
+              <a:defRPr sz="1800" b="1">
+                <a:solidFill>
+                  <a:srgbClr val="F4F5F6"/>
+                </a:solidFill>
+                <a:latin typeface="Avenir Next"/>
+                <a:ea typeface="Avenir Next"/>
+                <a:cs typeface="Avenir Next"/>
+              </a:defRPr>
+            </a:pPr>
+            <a:r>
+              <a:t>Live app: varfoot.vercel.app</a:t>
+            </a:r>
+          </a:p>
+        </p:txBody>
+      </p:sp>
+      <p:sp>
+        <p:nvSpPr>
+          <p:cNvPr id="6" name="">
+            <a:extLst xmlns:a="http://schemas.openxmlformats.org/drawingml/2006/main">
+              <a:ext uri="{FF2B5EF4-FFF2-40B4-BE49-F238E27FC236}">
+                <a16:creationId xmlns:a16="http://schemas.microsoft.com/office/drawing/2014/main" id="{E4042858-2271-47F4-A140-A83F4D49B5EA}"/>
+              </a:ext>
+            </a:extLst>
+          </p:cNvPr>
+          <p:cNvSpPr>
+            <a:spLocks xmlns:a="http://schemas.openxmlformats.org/drawingml/2006/main" noGrp="1"/>
+          </p:cNvSpPr>
+          <p:nvPr/>
+        </p:nvSpPr>
+        <p:spPr>
+          <a:xfrm xmlns:a="http://schemas.openxmlformats.org/drawingml/2006/main">
+            <a:off x="609600" y="5848350"/>
+            <a:ext cx="190500" cy="323850"/>
+          </a:xfrm>
+          <a:prstGeom xmlns:a="http://schemas.openxmlformats.org/drawingml/2006/main" prst="rect">
+            <a:avLst/>
+          </a:prstGeom>
+        </p:spPr>
+        <p:txBody>
+          <a:bodyPr xmlns:a="http://schemas.openxmlformats.org/drawingml/2006/main" wrap="square" lIns="0" tIns="0" rIns="0" bIns="0"/>
+          <a:lstStyle xmlns:a="http://schemas.openxmlformats.org/drawingml/2006/main"/>
+          <a:p xmlns:a="http://schemas.openxmlformats.org/drawingml/2006/main">
+            <a:pPr>
+              <a:defRPr sz="1875" b="1">
+                <a:solidFill>
+                  <a:srgbClr val="39FF73"/>
+                </a:solidFill>
+                <a:latin typeface="Avenir Next"/>
+                <a:ea typeface="Avenir Next"/>
+                <a:cs typeface="Avenir Next"/>
+              </a:defRPr>
+            </a:pPr>
+            <a:r>
+              <a:t>-</a:t>
+            </a:r>
+          </a:p>
+        </p:txBody>
+      </p:sp>
+      <p:sp>
+        <p:nvSpPr>
+          <p:cNvPr id="7" name="">
+            <a:extLst xmlns:a="http://schemas.openxmlformats.org/drawingml/2006/main">
+              <a:ext uri="{FF2B5EF4-FFF2-40B4-BE49-F238E27FC236}">
+                <a16:creationId xmlns:a16="http://schemas.microsoft.com/office/drawing/2014/main" id="{2E8A4508-D2BF-40FD-B89C-625AE814545F}"/>
+              </a:ext>
+            </a:extLst>
+          </p:cNvPr>
+          <p:cNvSpPr>
+            <a:spLocks xmlns:a="http://schemas.openxmlformats.org/drawingml/2006/main" noGrp="1"/>
+          </p:cNvSpPr>
+          <p:nvPr/>
+        </p:nvSpPr>
+        <p:spPr>
+          <a:xfrm xmlns:a="http://schemas.openxmlformats.org/drawingml/2006/main">
+            <a:off x="914400" y="5848350"/>
+            <a:ext cx="7239000" cy="533400"/>
+          </a:xfrm>
+          <a:prstGeom xmlns:a="http://schemas.openxmlformats.org/drawingml/2006/main" prst="rect">
+            <a:avLst/>
+          </a:prstGeom>
+        </p:spPr>
+        <p:txBody>
+          <a:bodyPr xmlns:a="http://schemas.openxmlformats.org/drawingml/2006/main" wrap="square" lIns="0" tIns="0" rIns="0" bIns="0"/>
+          <a:lstStyle xmlns:a="http://schemas.openxmlformats.org/drawingml/2006/main"/>
+          <a:p xmlns:a="http://schemas.openxmlformats.org/drawingml/2006/main">
+            <a:pPr>
+              <a:defRPr sz="1800" b="1">
+                <a:solidFill>
+                  <a:srgbClr val="F4F5F6"/>
+                </a:solidFill>
+                <a:latin typeface="Avenir Next"/>
+                <a:ea typeface="Avenir Next"/>
+                <a:cs typeface="Avenir Next"/>
+              </a:defRPr>
+            </a:pPr>
+            <a:r>
+              <a:t>Demo button: Explore demo athlete (loads Sansar's profile)</a:t>
+            </a:r>
+          </a:p>
+        </p:txBody>
+      </p:sp>
+      <p:sp>
+        <p:nvSpPr>
+          <p:cNvPr id="8" name="">
+            <a:extLst xmlns:a="http://schemas.openxmlformats.org/drawingml/2006/main">
+              <a:ext uri="{FF2B5EF4-FFF2-40B4-BE49-F238E27FC236}">
+                <a16:creationId xmlns:a16="http://schemas.microsoft.com/office/drawing/2014/main" id="{C5C65084-4246-4865-AB00-DF3BADD0B7F1}"/>
+              </a:ext>
+            </a:extLst>
+          </p:cNvPr>
+          <p:cNvSpPr>
+            <a:spLocks xmlns:a="http://schemas.openxmlformats.org/drawingml/2006/main" noGrp="1"/>
+          </p:cNvSpPr>
+          <p:nvPr/>
+        </p:nvSpPr>
+        <p:spPr>
+          <a:xfrm xmlns:a="http://schemas.openxmlformats.org/drawingml/2006/main">
+            <a:off x="609600" y="6496050"/>
+            <a:ext cx="190500" cy="323850"/>
+          </a:xfrm>
+          <a:prstGeom xmlns:a="http://schemas.openxmlformats.org/drawingml/2006/main" prst="rect">
+            <a:avLst/>
+          </a:prstGeom>
+        </p:spPr>
+        <p:txBody>
+          <a:bodyPr xmlns:a="http://schemas.openxmlformats.org/drawingml/2006/main" wrap="square" lIns="0" tIns="0" rIns="0" bIns="0"/>
+          <a:lstStyle xmlns:a="http://schemas.openxmlformats.org/drawingml/2006/main"/>
+          <a:p xmlns:a="http://schemas.openxmlformats.org/drawingml/2006/main">
+            <a:pPr>
+              <a:defRPr sz="1875" b="1">
+                <a:solidFill>
+                  <a:srgbClr val="39FF73"/>
+                </a:solidFill>
+                <a:latin typeface="Avenir Next"/>
+                <a:ea typeface="Avenir Next"/>
+                <a:cs typeface="Avenir Next"/>
+              </a:defRPr>
+            </a:pPr>
+            <a:r>
+              <a:t>-</a:t>
+            </a:r>
+          </a:p>
+        </p:txBody>
+      </p:sp>
+      <p:sp>
+        <p:nvSpPr>
+          <p:cNvPr id="9" name="">
+            <a:extLst xmlns:a="http://schemas.openxmlformats.org/drawingml/2006/main">
+              <a:ext uri="{FF2B5EF4-FFF2-40B4-BE49-F238E27FC236}">
+                <a16:creationId xmlns:a16="http://schemas.microsoft.com/office/drawing/2014/main" id="{D2595447-FB5D-462A-8A43-16E9F1E22001}"/>
+              </a:ext>
+            </a:extLst>
+          </p:cNvPr>
+          <p:cNvSpPr>
+            <a:spLocks xmlns:a="http://schemas.openxmlformats.org/drawingml/2006/main" noGrp="1"/>
+          </p:cNvSpPr>
+          <p:nvPr/>
+        </p:nvSpPr>
+        <p:spPr>
+          <a:xfrm xmlns:a="http://schemas.openxmlformats.org/drawingml/2006/main">
+            <a:off x="914400" y="6496050"/>
+            <a:ext cx="7239000" cy="533400"/>
+          </a:xfrm>
+          <a:prstGeom xmlns:a="http://schemas.openxmlformats.org/drawingml/2006/main" prst="rect">
+            <a:avLst/>
+          </a:prstGeom>
+        </p:spPr>
+        <p:txBody>
+          <a:bodyPr xmlns:a="http://schemas.openxmlformats.org/drawingml/2006/main" wrap="square" lIns="0" tIns="0" rIns="0" bIns="0"/>
+          <a:lstStyle xmlns:a="http://schemas.openxmlformats.org/drawingml/2006/main"/>
+          <a:p xmlns:a="http://schemas.openxmlformats.org/drawingml/2006/main">
+            <a:pPr>
+              <a:defRPr sz="1800" b="1">
+                <a:solidFill>
+                  <a:srgbClr val="F4F5F6"/>
+                </a:solidFill>
+                <a:latin typeface="Avenir Next"/>
+                <a:ea typeface="Avenir Next"/>
+                <a:cs typeface="Avenir Next"/>
+              </a:defRPr>
+            </a:pPr>
+            <a:r>
+              <a:t>Public journey: @sansar.mp4</a:t>
             </a:r>
           </a:p>
         </p:txBody>
@@ -1991,7 +3069,7 @@
           <p:nvPr/>
         </p:nvPicPr>
         <p:blipFill>
-          <a:blip xmlns:r="http://schemas.openxmlformats.org/officeDocument/2006/relationships" xmlns:a="http://schemas.openxmlformats.org/drawingml/2006/main" r:embed="R904248be73c1404c"/>
+          <a:blip xmlns:r="http://schemas.openxmlformats.org/officeDocument/2006/relationships" xmlns:a="http://schemas.openxmlformats.org/drawingml/2006/main" r:embed="R8ffa5f98dd3448af"/>
           <a:stretch xmlns:a="http://schemas.openxmlformats.org/drawingml/2006/main"/>
         </p:blipFill>
         <p:spPr>
@@ -2007,7 +3085,7 @@
     </p:spTree>
     <p:extLst>
       <p:ext uri="{BB962C8B-B14F-4D97-AF65-F5344CB8AC3E}">
-        <p14:creationId xmlns:p14="http://schemas.microsoft.com/office/powerpoint/2010/main" val="273045408"/>
+        <p14:creationId xmlns:p14="http://schemas.microsoft.com/office/powerpoint/2010/main" val="680776409"/>
       </p:ext>
     </p:extLst>
   </p:cSld>
@@ -2038,18 +3116,18 @@
           <p:cNvPr id="1" name="">
             <a:extLst xmlns:a="http://schemas.openxmlformats.org/drawingml/2006/main">
               <a:ext uri="{FF2B5EF4-FFF2-40B4-BE49-F238E27FC236}">
-                <a16:creationId xmlns:a16="http://schemas.microsoft.com/office/drawing/2014/main" id="{0786AE44-B709-4D6C-AB6F-E23AE7374486}"/>
-              </a:ext>
-            </a:extLst>
-          </p:cNvPr>
-          <p:cNvSpPr>
-            <a:spLocks xmlns:a="http://schemas.openxmlformats.org/drawingml/2006/main" noGrp="1"/>
-          </p:cNvSpPr>
-          <p:nvPr/>
-        </p:nvSpPr>
-        <p:spPr>
-          <a:xfrm xmlns:a="http://schemas.openxmlformats.org/drawingml/2006/main">
-            <a:off x="609600" y="1647825"/>
+                <a16:creationId xmlns:a16="http://schemas.microsoft.com/office/drawing/2014/main" id="{151C6F9E-799C-41B5-B9AD-4138B0E1FCE4}"/>
+              </a:ext>
+            </a:extLst>
+          </p:cNvPr>
+          <p:cNvSpPr>
+            <a:spLocks xmlns:a="http://schemas.openxmlformats.org/drawingml/2006/main" noGrp="1"/>
+          </p:cNvSpPr>
+          <p:nvPr/>
+        </p:nvSpPr>
+        <p:spPr>
+          <a:xfrm xmlns:a="http://schemas.openxmlformats.org/drawingml/2006/main">
+            <a:off x="609600" y="1504950"/>
             <a:ext cx="9525000" cy="323850"/>
           </a:xfrm>
           <a:prstGeom xmlns:a="http://schemas.openxmlformats.org/drawingml/2006/main" prst="rect">
@@ -2063,15 +3141,15 @@
             <a:pPr>
               <a:defRPr sz="1350" b="1">
                 <a:solidFill>
-                  <a:srgbClr val="FFD23F"/>
-                </a:solidFill>
-                <a:latin typeface="Avenir Next"/>
-                <a:ea typeface="Avenir Next"/>
-                <a:cs typeface="Avenir Next"/>
-              </a:defRPr>
-            </a:pPr>
-            <a:r>
-              <a:t>PROBLEM</a:t>
+                  <a:srgbClr val="39FF73"/>
+                </a:solidFill>
+                <a:latin typeface="Avenir Next"/>
+                <a:ea typeface="Avenir Next"/>
+                <a:cs typeface="Avenir Next"/>
+              </a:defRPr>
+            </a:pPr>
+            <a:r>
+              <a:t>BUILT FOR A REAL PERSON</a:t>
             </a:r>
           </a:p>
         </p:txBody>
@@ -2081,30 +3159,30 @@
           <p:cNvPr id="2" name="">
             <a:extLst xmlns:a="http://schemas.openxmlformats.org/drawingml/2006/main">
               <a:ext uri="{FF2B5EF4-FFF2-40B4-BE49-F238E27FC236}">
-                <a16:creationId xmlns:a16="http://schemas.microsoft.com/office/drawing/2014/main" id="{1E72A03B-81AB-4597-9D01-8A7999D09A25}"/>
-              </a:ext>
-            </a:extLst>
-          </p:cNvPr>
-          <p:cNvSpPr>
-            <a:spLocks xmlns:a="http://schemas.openxmlformats.org/drawingml/2006/main" noGrp="1"/>
-          </p:cNvSpPr>
-          <p:nvPr/>
-        </p:nvSpPr>
-        <p:spPr>
-          <a:xfrm xmlns:a="http://schemas.openxmlformats.org/drawingml/2006/main">
-            <a:off x="609600" y="2181225"/>
-            <a:ext cx="7239000" cy="1143000"/>
-          </a:xfrm>
-          <a:prstGeom xmlns:a="http://schemas.openxmlformats.org/drawingml/2006/main" prst="rect">
-            <a:avLst/>
-          </a:prstGeom>
-        </p:spPr>
-        <p:txBody>
-          <a:bodyPr xmlns:a="http://schemas.openxmlformats.org/drawingml/2006/main" wrap="square" lIns="0" tIns="0" rIns="0" bIns="0"/>
-          <a:lstStyle xmlns:a="http://schemas.openxmlformats.org/drawingml/2006/main"/>
-          <a:p xmlns:a="http://schemas.openxmlformats.org/drawingml/2006/main">
-            <a:pPr>
-              <a:defRPr sz="3300" b="1">
+                <a16:creationId xmlns:a16="http://schemas.microsoft.com/office/drawing/2014/main" id="{7B4D2A7C-2DE2-41A5-A573-C139551A5DAF}"/>
+              </a:ext>
+            </a:extLst>
+          </p:cNvPr>
+          <p:cNvSpPr>
+            <a:spLocks xmlns:a="http://schemas.openxmlformats.org/drawingml/2006/main" noGrp="1"/>
+          </p:cNvSpPr>
+          <p:nvPr/>
+        </p:nvSpPr>
+        <p:spPr>
+          <a:xfrm xmlns:a="http://schemas.openxmlformats.org/drawingml/2006/main">
+            <a:off x="609600" y="2038350"/>
+            <a:ext cx="7620000" cy="1428750"/>
+          </a:xfrm>
+          <a:prstGeom xmlns:a="http://schemas.openxmlformats.org/drawingml/2006/main" prst="rect">
+            <a:avLst/>
+          </a:prstGeom>
+        </p:spPr>
+        <p:txBody>
+          <a:bodyPr xmlns:a="http://schemas.openxmlformats.org/drawingml/2006/main" wrap="square" lIns="0" tIns="0" rIns="0" bIns="0"/>
+          <a:lstStyle xmlns:a="http://schemas.openxmlformats.org/drawingml/2006/main"/>
+          <a:p xmlns:a="http://schemas.openxmlformats.org/drawingml/2006/main">
+            <a:pPr>
+              <a:defRPr sz="4350" b="1">
                 <a:solidFill>
                   <a:srgbClr val="F4F5F6"/>
                 </a:solidFill>
@@ -2114,7 +3192,7 @@
               </a:defRPr>
             </a:pPr>
             <a:r>
-              <a:t>Caring is not enough when training is guesswork.</a:t>
+              <a:t>This was built for me.</a:t>
             </a:r>
           </a:p>
         </p:txBody>
@@ -2124,19 +3202,19 @@
           <p:cNvPr id="3" name="">
             <a:extLst xmlns:a="http://schemas.openxmlformats.org/drawingml/2006/main">
               <a:ext uri="{FF2B5EF4-FFF2-40B4-BE49-F238E27FC236}">
-                <a16:creationId xmlns:a16="http://schemas.microsoft.com/office/drawing/2014/main" id="{DE14D83B-2901-42E2-B661-D68E3233B6D3}"/>
-              </a:ext>
-            </a:extLst>
-          </p:cNvPr>
-          <p:cNvSpPr>
-            <a:spLocks xmlns:a="http://schemas.openxmlformats.org/drawingml/2006/main" noGrp="1"/>
-          </p:cNvSpPr>
-          <p:nvPr/>
-        </p:nvSpPr>
-        <p:spPr>
-          <a:xfrm xmlns:a="http://schemas.openxmlformats.org/drawingml/2006/main">
-            <a:off x="609600" y="3533775"/>
-            <a:ext cx="7143750" cy="1238250"/>
+                <a16:creationId xmlns:a16="http://schemas.microsoft.com/office/drawing/2014/main" id="{150E32A3-9B6C-4E9D-A9A2-C7E5E44712FD}"/>
+              </a:ext>
+            </a:extLst>
+          </p:cNvPr>
+          <p:cNvSpPr>
+            <a:spLocks xmlns:a="http://schemas.openxmlformats.org/drawingml/2006/main" noGrp="1"/>
+          </p:cNvSpPr>
+          <p:nvPr/>
+        </p:nvSpPr>
+        <p:spPr>
+          <a:xfrm xmlns:a="http://schemas.openxmlformats.org/drawingml/2006/main">
+            <a:off x="609600" y="3676650"/>
+            <a:ext cx="7524750" cy="1238250"/>
           </a:xfrm>
           <a:prstGeom xmlns:a="http://schemas.openxmlformats.org/drawingml/2006/main" prst="rect">
             <a:avLst/>
@@ -2157,7 +3235,7 @@
               </a:defRPr>
             </a:pPr>
             <a:r>
-              <a:t>High-school soccer players can find drills anywhere. What they cannot easily find is an honest baseline, a benchmark, and a prioritized next step.</a:t>
+              <a:t>Sansar Karki — an incoming freshman trying to make varsity soccer. I have been documenting the journey publicly, so this is not a hypothetical user.</a:t>
             </a:r>
           </a:p>
         </p:txBody>
@@ -2167,18 +3245,18 @@
           <p:cNvPr id="4" name="">
             <a:extLst xmlns:a="http://schemas.openxmlformats.org/drawingml/2006/main">
               <a:ext uri="{FF2B5EF4-FFF2-40B4-BE49-F238E27FC236}">
-                <a16:creationId xmlns:a16="http://schemas.microsoft.com/office/drawing/2014/main" id="{588AC0E0-C166-47CE-B7F0-055AB6D365D0}"/>
-              </a:ext>
-            </a:extLst>
-          </p:cNvPr>
-          <p:cNvSpPr>
-            <a:spLocks xmlns:a="http://schemas.openxmlformats.org/drawingml/2006/main" noGrp="1"/>
-          </p:cNvSpPr>
-          <p:nvPr/>
-        </p:nvSpPr>
-        <p:spPr>
-          <a:xfrm xmlns:a="http://schemas.openxmlformats.org/drawingml/2006/main">
-            <a:off x="609600" y="4981575"/>
+                <a16:creationId xmlns:a16="http://schemas.microsoft.com/office/drawing/2014/main" id="{0E1CD776-598A-44DB-B32F-91CBB8778496}"/>
+              </a:ext>
+            </a:extLst>
+          </p:cNvPr>
+          <p:cNvSpPr>
+            <a:spLocks xmlns:a="http://schemas.openxmlformats.org/drawingml/2006/main" noGrp="1"/>
+          </p:cNvSpPr>
+          <p:nvPr/>
+        </p:nvSpPr>
+        <p:spPr>
+          <a:xfrm xmlns:a="http://schemas.openxmlformats.org/drawingml/2006/main">
+            <a:off x="609600" y="5124450"/>
             <a:ext cx="190500" cy="323850"/>
           </a:xfrm>
           <a:prstGeom xmlns:a="http://schemas.openxmlformats.org/drawingml/2006/main" prst="rect">
@@ -2192,7 +3270,7 @@
             <a:pPr>
               <a:defRPr sz="1875" b="1">
                 <a:solidFill>
-                  <a:srgbClr val="FFD23F"/>
+                  <a:srgbClr val="39FF73"/>
                 </a:solidFill>
                 <a:latin typeface="Avenir Next"/>
                 <a:ea typeface="Avenir Next"/>
@@ -2210,19 +3288,19 @@
           <p:cNvPr id="5" name="">
             <a:extLst xmlns:a="http://schemas.openxmlformats.org/drawingml/2006/main">
               <a:ext uri="{FF2B5EF4-FFF2-40B4-BE49-F238E27FC236}">
-                <a16:creationId xmlns:a16="http://schemas.microsoft.com/office/drawing/2014/main" id="{5FE63D47-1EEC-4FD1-BD86-97291D01C3D8}"/>
-              </a:ext>
-            </a:extLst>
-          </p:cNvPr>
-          <p:cNvSpPr>
-            <a:spLocks xmlns:a="http://schemas.openxmlformats.org/drawingml/2006/main" noGrp="1"/>
-          </p:cNvSpPr>
-          <p:nvPr/>
-        </p:nvSpPr>
-        <p:spPr>
-          <a:xfrm xmlns:a="http://schemas.openxmlformats.org/drawingml/2006/main">
-            <a:off x="914400" y="4981575"/>
-            <a:ext cx="6762750" cy="533400"/>
+                <a16:creationId xmlns:a16="http://schemas.microsoft.com/office/drawing/2014/main" id="{332EDE5F-9932-4894-9F19-4DD4E55BBAE8}"/>
+              </a:ext>
+            </a:extLst>
+          </p:cNvPr>
+          <p:cNvSpPr>
+            <a:spLocks xmlns:a="http://schemas.openxmlformats.org/drawingml/2006/main" noGrp="1"/>
+          </p:cNvSpPr>
+          <p:nvPr/>
+        </p:nvSpPr>
+        <p:spPr>
+          <a:xfrm xmlns:a="http://schemas.openxmlformats.org/drawingml/2006/main">
+            <a:off x="914400" y="5124450"/>
+            <a:ext cx="7048500" cy="533400"/>
           </a:xfrm>
           <a:prstGeom xmlns:a="http://schemas.openxmlformats.org/drawingml/2006/main" prst="rect">
             <a:avLst/>
@@ -2243,7 +3321,7 @@
               </a:defRPr>
             </a:pPr>
             <a:r>
-              <a:t>Team practice gives feedback, not a personal roadmap.</a:t>
+              <a:t>Instagram: @sansar.mp4</a:t>
             </a:r>
           </a:p>
         </p:txBody>
@@ -2253,18 +3331,18 @@
           <p:cNvPr id="6" name="">
             <a:extLst xmlns:a="http://schemas.openxmlformats.org/drawingml/2006/main">
               <a:ext uri="{FF2B5EF4-FFF2-40B4-BE49-F238E27FC236}">
-                <a16:creationId xmlns:a16="http://schemas.microsoft.com/office/drawing/2014/main" id="{229AE3F2-35D2-4CE5-BC70-A557E33C03F0}"/>
-              </a:ext>
-            </a:extLst>
-          </p:cNvPr>
-          <p:cNvSpPr>
-            <a:spLocks xmlns:a="http://schemas.openxmlformats.org/drawingml/2006/main" noGrp="1"/>
-          </p:cNvSpPr>
-          <p:nvPr/>
-        </p:nvSpPr>
-        <p:spPr>
-          <a:xfrm xmlns:a="http://schemas.openxmlformats.org/drawingml/2006/main">
-            <a:off x="609600" y="5629275"/>
+                <a16:creationId xmlns:a16="http://schemas.microsoft.com/office/drawing/2014/main" id="{F63C59D2-C8E7-47A1-B642-BE5FD71D21D4}"/>
+              </a:ext>
+            </a:extLst>
+          </p:cNvPr>
+          <p:cNvSpPr>
+            <a:spLocks xmlns:a="http://schemas.openxmlformats.org/drawingml/2006/main" noGrp="1"/>
+          </p:cNvSpPr>
+          <p:nvPr/>
+        </p:nvSpPr>
+        <p:spPr>
+          <a:xfrm xmlns:a="http://schemas.openxmlformats.org/drawingml/2006/main">
+            <a:off x="609600" y="5772150"/>
             <a:ext cx="190500" cy="323850"/>
           </a:xfrm>
           <a:prstGeom xmlns:a="http://schemas.openxmlformats.org/drawingml/2006/main" prst="rect">
@@ -2278,7 +3356,7 @@
             <a:pPr>
               <a:defRPr sz="1875" b="1">
                 <a:solidFill>
-                  <a:srgbClr val="FFD23F"/>
+                  <a:srgbClr val="39FF73"/>
                 </a:solidFill>
                 <a:latin typeface="Avenir Next"/>
                 <a:ea typeface="Avenir Next"/>
@@ -2296,19 +3374,19 @@
           <p:cNvPr id="7" name="">
             <a:extLst xmlns:a="http://schemas.openxmlformats.org/drawingml/2006/main">
               <a:ext uri="{FF2B5EF4-FFF2-40B4-BE49-F238E27FC236}">
-                <a16:creationId xmlns:a16="http://schemas.microsoft.com/office/drawing/2014/main" id="{51DD26F2-DCFD-4F5F-B431-8EC4B73528F6}"/>
-              </a:ext>
-            </a:extLst>
-          </p:cNvPr>
-          <p:cNvSpPr>
-            <a:spLocks xmlns:a="http://schemas.openxmlformats.org/drawingml/2006/main" noGrp="1"/>
-          </p:cNvSpPr>
-          <p:nvPr/>
-        </p:nvSpPr>
-        <p:spPr>
-          <a:xfrm xmlns:a="http://schemas.openxmlformats.org/drawingml/2006/main">
-            <a:off x="914400" y="5629275"/>
-            <a:ext cx="6762750" cy="533400"/>
+                <a16:creationId xmlns:a16="http://schemas.microsoft.com/office/drawing/2014/main" id="{2EB9AFF1-EFA7-411B-9545-7CA0573AC3BA}"/>
+              </a:ext>
+            </a:extLst>
+          </p:cNvPr>
+          <p:cNvSpPr>
+            <a:spLocks xmlns:a="http://schemas.openxmlformats.org/drawingml/2006/main" noGrp="1"/>
+          </p:cNvSpPr>
+          <p:nvPr/>
+        </p:nvSpPr>
+        <p:spPr>
+          <a:xfrm xmlns:a="http://schemas.openxmlformats.org/drawingml/2006/main">
+            <a:off x="914400" y="5772150"/>
+            <a:ext cx="7048500" cy="533400"/>
           </a:xfrm>
           <a:prstGeom xmlns:a="http://schemas.openxmlformats.org/drawingml/2006/main" prst="rect">
             <a:avLst/>
@@ -2329,7 +3407,7 @@
               </a:defRPr>
             </a:pPr>
             <a:r>
-              <a:t>PDF drills give activities, not readiness.</a:t>
+              <a:t>1,100+ followers following the varsity push</a:t>
             </a:r>
           </a:p>
         </p:txBody>
@@ -2339,18 +3417,18 @@
           <p:cNvPr id="8" name="">
             <a:extLst xmlns:a="http://schemas.openxmlformats.org/drawingml/2006/main">
               <a:ext uri="{FF2B5EF4-FFF2-40B4-BE49-F238E27FC236}">
-                <a16:creationId xmlns:a16="http://schemas.microsoft.com/office/drawing/2014/main" id="{61DC60A5-FF5E-4DB0-AC2E-FFD11343C6BF}"/>
-              </a:ext>
-            </a:extLst>
-          </p:cNvPr>
-          <p:cNvSpPr>
-            <a:spLocks xmlns:a="http://schemas.openxmlformats.org/drawingml/2006/main" noGrp="1"/>
-          </p:cNvSpPr>
-          <p:nvPr/>
-        </p:nvSpPr>
-        <p:spPr>
-          <a:xfrm xmlns:a="http://schemas.openxmlformats.org/drawingml/2006/main">
-            <a:off x="609600" y="6276975"/>
+                <a16:creationId xmlns:a16="http://schemas.microsoft.com/office/drawing/2014/main" id="{254D4432-FD73-43AD-83B9-50B54D1FD0DD}"/>
+              </a:ext>
+            </a:extLst>
+          </p:cNvPr>
+          <p:cNvSpPr>
+            <a:spLocks xmlns:a="http://schemas.openxmlformats.org/drawingml/2006/main" noGrp="1"/>
+          </p:cNvSpPr>
+          <p:nvPr/>
+        </p:nvSpPr>
+        <p:spPr>
+          <a:xfrm xmlns:a="http://schemas.openxmlformats.org/drawingml/2006/main">
+            <a:off x="609600" y="6419850"/>
             <a:ext cx="190500" cy="323850"/>
           </a:xfrm>
           <a:prstGeom xmlns:a="http://schemas.openxmlformats.org/drawingml/2006/main" prst="rect">
@@ -2364,7 +3442,7 @@
             <a:pPr>
               <a:defRPr sz="1875" b="1">
                 <a:solidFill>
-                  <a:srgbClr val="FFD23F"/>
+                  <a:srgbClr val="39FF73"/>
                 </a:solidFill>
                 <a:latin typeface="Avenir Next"/>
                 <a:ea typeface="Avenir Next"/>
@@ -2382,19 +3460,19 @@
           <p:cNvPr id="9" name="">
             <a:extLst xmlns:a="http://schemas.openxmlformats.org/drawingml/2006/main">
               <a:ext uri="{FF2B5EF4-FFF2-40B4-BE49-F238E27FC236}">
-                <a16:creationId xmlns:a16="http://schemas.microsoft.com/office/drawing/2014/main" id="{BE4495E5-8C0A-4685-BE87-969A3E95BC62}"/>
-              </a:ext>
-            </a:extLst>
-          </p:cNvPr>
-          <p:cNvSpPr>
-            <a:spLocks xmlns:a="http://schemas.openxmlformats.org/drawingml/2006/main" noGrp="1"/>
-          </p:cNvSpPr>
-          <p:nvPr/>
-        </p:nvSpPr>
-        <p:spPr>
-          <a:xfrm xmlns:a="http://schemas.openxmlformats.org/drawingml/2006/main">
-            <a:off x="914400" y="6276975"/>
-            <a:ext cx="6762750" cy="533400"/>
+                <a16:creationId xmlns:a16="http://schemas.microsoft.com/office/drawing/2014/main" id="{9C9ADB10-268B-45D6-904C-B0DC52B076DF}"/>
+              </a:ext>
+            </a:extLst>
+          </p:cNvPr>
+          <p:cNvSpPr>
+            <a:spLocks xmlns:a="http://schemas.openxmlformats.org/drawingml/2006/main" noGrp="1"/>
+          </p:cNvSpPr>
+          <p:nvPr/>
+        </p:nvSpPr>
+        <p:spPr>
+          <a:xfrm xmlns:a="http://schemas.openxmlformats.org/drawingml/2006/main">
+            <a:off x="914400" y="6419850"/>
+            <a:ext cx="7048500" cy="533400"/>
           </a:xfrm>
           <a:prstGeom xmlns:a="http://schemas.openxmlformats.org/drawingml/2006/main" prst="rect">
             <a:avLst/>
@@ -2415,7 +3493,7 @@
               </a:defRPr>
             </a:pPr>
             <a:r>
-              <a:t>Generic fitness apps miss tryouts, positions, and varsity standards.</a:t>
+              <a:t>Real training clips, a real public goal, a real deadline</a:t>
             </a:r>
           </a:p>
         </p:txBody>
@@ -2425,30 +3503,73 @@
           <p:cNvPr id="10" name="">
             <a:extLst xmlns:a="http://schemas.openxmlformats.org/drawingml/2006/main">
               <a:ext uri="{FF2B5EF4-FFF2-40B4-BE49-F238E27FC236}">
-                <a16:creationId xmlns:a16="http://schemas.microsoft.com/office/drawing/2014/main" id="{ADE11CC2-613E-4973-B885-A7D8D593847D}"/>
-              </a:ext>
-            </a:extLst>
-          </p:cNvPr>
-          <p:cNvSpPr>
-            <a:spLocks xmlns:a="http://schemas.openxmlformats.org/drawingml/2006/main" noGrp="1"/>
-          </p:cNvSpPr>
-          <p:nvPr/>
-        </p:nvSpPr>
-        <p:spPr>
-          <a:xfrm xmlns:a="http://schemas.openxmlformats.org/drawingml/2006/main">
-            <a:off x="8629650" y="3343275"/>
-            <a:ext cx="5048250" cy="476250"/>
-          </a:xfrm>
-          <a:prstGeom xmlns:a="http://schemas.openxmlformats.org/drawingml/2006/main" prst="rect">
-            <a:avLst/>
-          </a:prstGeom>
-        </p:spPr>
-        <p:txBody>
-          <a:bodyPr xmlns:a="http://schemas.openxmlformats.org/drawingml/2006/main" wrap="square" lIns="0" tIns="0" rIns="0" bIns="0"/>
-          <a:lstStyle xmlns:a="http://schemas.openxmlformats.org/drawingml/2006/main"/>
-          <a:p xmlns:a="http://schemas.openxmlformats.org/drawingml/2006/main">
-            <a:pPr>
-              <a:defRPr sz="1875" b="0">
+                <a16:creationId xmlns:a16="http://schemas.microsoft.com/office/drawing/2014/main" id="{02FECD06-505B-4D1A-80E8-1705B812233C}"/>
+              </a:ext>
+            </a:extLst>
+          </p:cNvPr>
+          <p:cNvSpPr>
+            <a:spLocks xmlns:a="http://schemas.openxmlformats.org/drawingml/2006/main" noGrp="1"/>
+          </p:cNvSpPr>
+          <p:nvPr/>
+        </p:nvSpPr>
+        <p:spPr>
+          <a:xfrm xmlns:a="http://schemas.openxmlformats.org/drawingml/2006/main">
+            <a:off x="9201150" y="895350"/>
+            <a:ext cx="4953000" cy="666750"/>
+          </a:xfrm>
+          <a:prstGeom xmlns:a="http://schemas.openxmlformats.org/drawingml/2006/main" prst="rect">
+            <a:avLst/>
+          </a:prstGeom>
+        </p:spPr>
+        <p:txBody>
+          <a:bodyPr xmlns:a="http://schemas.openxmlformats.org/drawingml/2006/main" wrap="square" lIns="0" tIns="0" rIns="0" bIns="0"/>
+          <a:lstStyle xmlns:a="http://schemas.openxmlformats.org/drawingml/2006/main"/>
+          <a:p xmlns:a="http://schemas.openxmlformats.org/drawingml/2006/main">
+            <a:pPr>
+              <a:defRPr sz="3450" b="1">
+                <a:solidFill>
+                  <a:srgbClr val="F4F5F6"/>
+                </a:solidFill>
+                <a:latin typeface="Avenir Next"/>
+                <a:ea typeface="Avenir Next"/>
+                <a:cs typeface="Avenir Next"/>
+              </a:defRPr>
+            </a:pPr>
+            <a:r>
+              <a:t>@sansar.mp4</a:t>
+            </a:r>
+          </a:p>
+        </p:txBody>
+      </p:sp>
+      <p:sp>
+        <p:nvSpPr>
+          <p:cNvPr id="11" name="">
+            <a:extLst xmlns:a="http://schemas.openxmlformats.org/drawingml/2006/main">
+              <a:ext uri="{FF2B5EF4-FFF2-40B4-BE49-F238E27FC236}">
+                <a16:creationId xmlns:a16="http://schemas.microsoft.com/office/drawing/2014/main" id="{A437AD1B-B281-4212-8FA6-B5679D2A2FDE}"/>
+              </a:ext>
+            </a:extLst>
+          </p:cNvPr>
+          <p:cNvSpPr>
+            <a:spLocks xmlns:a="http://schemas.openxmlformats.org/drawingml/2006/main" noGrp="1"/>
+          </p:cNvSpPr>
+          <p:nvPr/>
+        </p:nvSpPr>
+        <p:spPr>
+          <a:xfrm xmlns:a="http://schemas.openxmlformats.org/drawingml/2006/main">
+            <a:off x="9201150" y="1714500"/>
+            <a:ext cx="4953000" cy="476250"/>
+          </a:xfrm>
+          <a:prstGeom xmlns:a="http://schemas.openxmlformats.org/drawingml/2006/main" prst="rect">
+            <a:avLst/>
+          </a:prstGeom>
+        </p:spPr>
+        <p:txBody>
+          <a:bodyPr xmlns:a="http://schemas.openxmlformats.org/drawingml/2006/main" wrap="square" lIns="0" tIns="0" rIns="0" bIns="0"/>
+          <a:lstStyle xmlns:a="http://schemas.openxmlformats.org/drawingml/2006/main"/>
+          <a:p xmlns:a="http://schemas.openxmlformats.org/drawingml/2006/main">
+            <a:pPr>
+              <a:defRPr sz="1950" b="1">
                 <a:solidFill>
                   <a:srgbClr val="9AA1A9"/>
                 </a:solidFill>
@@ -2458,50 +3579,50 @@
               </a:defRPr>
             </a:pPr>
             <a:r>
-              <a:t>The question Jordan is really asking:</a:t>
-            </a:r>
-          </a:p>
-        </p:txBody>
-      </p:sp>
-      <p:sp>
-        <p:nvSpPr>
-          <p:cNvPr id="11" name="">
-            <a:extLst xmlns:a="http://schemas.openxmlformats.org/drawingml/2006/main">
-              <a:ext uri="{FF2B5EF4-FFF2-40B4-BE49-F238E27FC236}">
-                <a16:creationId xmlns:a16="http://schemas.microsoft.com/office/drawing/2014/main" id="{67D04FB3-FC36-41AB-92FB-8FDBE44BE08C}"/>
-              </a:ext>
-            </a:extLst>
-          </p:cNvPr>
-          <p:cNvSpPr>
-            <a:spLocks xmlns:a="http://schemas.openxmlformats.org/drawingml/2006/main" noGrp="1"/>
-          </p:cNvSpPr>
-          <p:nvPr/>
-        </p:nvSpPr>
-        <p:spPr>
-          <a:xfrm xmlns:a="http://schemas.openxmlformats.org/drawingml/2006/main">
-            <a:off x="8629650" y="3971925"/>
-            <a:ext cx="5143500" cy="1143000"/>
-          </a:xfrm>
-          <a:prstGeom xmlns:a="http://schemas.openxmlformats.org/drawingml/2006/main" prst="rect">
-            <a:avLst/>
-          </a:prstGeom>
-        </p:spPr>
-        <p:txBody>
-          <a:bodyPr xmlns:a="http://schemas.openxmlformats.org/drawingml/2006/main" wrap="square" lIns="0" tIns="0" rIns="0" bIns="0"/>
-          <a:lstStyle xmlns:a="http://schemas.openxmlformats.org/drawingml/2006/main"/>
-          <a:p xmlns:a="http://schemas.openxmlformats.org/drawingml/2006/main">
-            <a:pPr>
-              <a:defRPr sz="3300" b="1">
-                <a:solidFill>
-                  <a:srgbClr val="F4F5F6"/>
-                </a:solidFill>
-                <a:latin typeface="Avenir Next"/>
-                <a:ea typeface="Avenir Next"/>
-                <a:cs typeface="Avenir Next"/>
-              </a:defRPr>
-            </a:pPr>
-            <a:r>
-              <a:t>Am I closer to varsity, and what should I work on first?</a:t>
+              <a:t>1,100+ followers</a:t>
+            </a:r>
+          </a:p>
+        </p:txBody>
+      </p:sp>
+      <p:sp>
+        <p:nvSpPr>
+          <p:cNvPr id="12" name="">
+            <a:extLst xmlns:a="http://schemas.openxmlformats.org/drawingml/2006/main">
+              <a:ext uri="{FF2B5EF4-FFF2-40B4-BE49-F238E27FC236}">
+                <a16:creationId xmlns:a16="http://schemas.microsoft.com/office/drawing/2014/main" id="{97B81A03-990B-40CB-9CB5-237EA11DF491}"/>
+              </a:ext>
+            </a:extLst>
+          </p:cNvPr>
+          <p:cNvSpPr>
+            <a:spLocks xmlns:a="http://schemas.openxmlformats.org/drawingml/2006/main" noGrp="1"/>
+          </p:cNvSpPr>
+          <p:nvPr/>
+        </p:nvSpPr>
+        <p:spPr>
+          <a:xfrm xmlns:a="http://schemas.openxmlformats.org/drawingml/2006/main">
+            <a:off x="9201150" y="2343150"/>
+            <a:ext cx="4953000" cy="2286000"/>
+          </a:xfrm>
+          <a:prstGeom xmlns:a="http://schemas.openxmlformats.org/drawingml/2006/main" prst="rect">
+            <a:avLst/>
+          </a:prstGeom>
+        </p:spPr>
+        <p:txBody>
+          <a:bodyPr xmlns:a="http://schemas.openxmlformats.org/drawingml/2006/main" wrap="square" lIns="0" tIns="0" rIns="0" bIns="0"/>
+          <a:lstStyle xmlns:a="http://schemas.openxmlformats.org/drawingml/2006/main"/>
+          <a:p xmlns:a="http://schemas.openxmlformats.org/drawingml/2006/main">
+            <a:pPr>
+              <a:defRPr sz="1650" b="0">
+                <a:solidFill>
+                  <a:srgbClr val="686E76"/>
+                </a:solidFill>
+                <a:latin typeface="Avenir Next"/>
+                <a:ea typeface="Avenir Next"/>
+                <a:cs typeface="Avenir Next"/>
+              </a:defRPr>
+            </a:pPr>
+            <a:r>
+              <a:t>[ Insert a clean screenshot of the @sansar.mp4 profile here — handle + follower count ]</a:t>
             </a:r>
           </a:p>
         </p:txBody>
@@ -2509,7 +3630,7 @@
     </p:spTree>
     <p:extLst>
       <p:ext uri="{BB962C8B-B14F-4D97-AF65-F5344CB8AC3E}">
-        <p14:creationId xmlns:p14="http://schemas.microsoft.com/office/powerpoint/2010/main" val="2042887135"/>
+        <p14:creationId xmlns:p14="http://schemas.microsoft.com/office/powerpoint/2010/main" val="1503112856"/>
       </p:ext>
     </p:extLst>
   </p:cSld>
@@ -2540,18 +3661,18 @@
           <p:cNvPr id="1" name="">
             <a:extLst xmlns:a="http://schemas.openxmlformats.org/drawingml/2006/main">
               <a:ext uri="{FF2B5EF4-FFF2-40B4-BE49-F238E27FC236}">
-                <a16:creationId xmlns:a16="http://schemas.microsoft.com/office/drawing/2014/main" id="{472A9530-B114-4BEB-B225-F740D06028A7}"/>
-              </a:ext>
-            </a:extLst>
-          </p:cNvPr>
-          <p:cNvSpPr>
-            <a:spLocks xmlns:a="http://schemas.openxmlformats.org/drawingml/2006/main" noGrp="1"/>
-          </p:cNvSpPr>
-          <p:nvPr/>
-        </p:nvSpPr>
-        <p:spPr>
-          <a:xfrm xmlns:a="http://schemas.openxmlformats.org/drawingml/2006/main">
-            <a:off x="609600" y="1743075"/>
+                <a16:creationId xmlns:a16="http://schemas.microsoft.com/office/drawing/2014/main" id="{ECB9AAE3-B6C2-4E55-948C-6FA28A121CBD}"/>
+              </a:ext>
+            </a:extLst>
+          </p:cNvPr>
+          <p:cNvSpPr>
+            <a:spLocks xmlns:a="http://schemas.openxmlformats.org/drawingml/2006/main" noGrp="1"/>
+          </p:cNvSpPr>
+          <p:nvPr/>
+        </p:nvSpPr>
+        <p:spPr>
+          <a:xfrm xmlns:a="http://schemas.openxmlformats.org/drawingml/2006/main">
+            <a:off x="609600" y="1552575"/>
             <a:ext cx="9525000" cy="323850"/>
           </a:xfrm>
           <a:prstGeom xmlns:a="http://schemas.openxmlformats.org/drawingml/2006/main" prst="rect">
@@ -2565,15 +3686,15 @@
             <a:pPr>
               <a:defRPr sz="1350" b="1">
                 <a:solidFill>
-                  <a:srgbClr val="39FF73"/>
-                </a:solidFill>
-                <a:latin typeface="Avenir Next"/>
-                <a:ea typeface="Avenir Next"/>
-                <a:cs typeface="Avenir Next"/>
-              </a:defRPr>
-            </a:pPr>
-            <a:r>
-              <a:t>PRODUCT LOOP</a:t>
+                  <a:srgbClr val="FFD23F"/>
+                </a:solidFill>
+                <a:latin typeface="Avenir Next"/>
+                <a:ea typeface="Avenir Next"/>
+                <a:cs typeface="Avenir Next"/>
+              </a:defRPr>
+            </a:pPr>
+            <a:r>
+              <a:t>THE REAL PROBLEM</a:t>
             </a:r>
           </a:p>
         </p:txBody>
@@ -2583,19 +3704,19 @@
           <p:cNvPr id="2" name="">
             <a:extLst xmlns:a="http://schemas.openxmlformats.org/drawingml/2006/main">
               <a:ext uri="{FF2B5EF4-FFF2-40B4-BE49-F238E27FC236}">
-                <a16:creationId xmlns:a16="http://schemas.microsoft.com/office/drawing/2014/main" id="{038D5FBB-99D8-4967-9F49-8BA015435C73}"/>
-              </a:ext>
-            </a:extLst>
-          </p:cNvPr>
-          <p:cNvSpPr>
-            <a:spLocks xmlns:a="http://schemas.openxmlformats.org/drawingml/2006/main" noGrp="1"/>
-          </p:cNvSpPr>
-          <p:nvPr/>
-        </p:nvSpPr>
-        <p:spPr>
-          <a:xfrm xmlns:a="http://schemas.openxmlformats.org/drawingml/2006/main">
-            <a:off x="609600" y="2276475"/>
-            <a:ext cx="6858000" cy="1143000"/>
+                <a16:creationId xmlns:a16="http://schemas.microsoft.com/office/drawing/2014/main" id="{B05A9DB8-CE10-4279-BB60-C9BCC5D59147}"/>
+              </a:ext>
+            </a:extLst>
+          </p:cNvPr>
+          <p:cNvSpPr>
+            <a:spLocks xmlns:a="http://schemas.openxmlformats.org/drawingml/2006/main" noGrp="1"/>
+          </p:cNvSpPr>
+          <p:nvPr/>
+        </p:nvSpPr>
+        <p:spPr>
+          <a:xfrm xmlns:a="http://schemas.openxmlformats.org/drawingml/2006/main">
+            <a:off x="609600" y="2085975"/>
+            <a:ext cx="7239000" cy="1143000"/>
           </a:xfrm>
           <a:prstGeom xmlns:a="http://schemas.openxmlformats.org/drawingml/2006/main" prst="rect">
             <a:avLst/>
@@ -2616,7 +3737,7 @@
               </a:defRPr>
             </a:pPr>
             <a:r>
-              <a:t>Baseline -&gt; score -&gt; gap -&gt; session -&gt; updated plan.</a:t>
+              <a:t>Motivation was never the issue. A plan was.</a:t>
             </a:r>
           </a:p>
         </p:txBody>
@@ -2626,19 +3747,19 @@
           <p:cNvPr id="3" name="">
             <a:extLst xmlns:a="http://schemas.openxmlformats.org/drawingml/2006/main">
               <a:ext uri="{FF2B5EF4-FFF2-40B4-BE49-F238E27FC236}">
-                <a16:creationId xmlns:a16="http://schemas.microsoft.com/office/drawing/2014/main" id="{DB3C7670-14EF-428C-855C-03210BBA43A1}"/>
-              </a:ext>
-            </a:extLst>
-          </p:cNvPr>
-          <p:cNvSpPr>
-            <a:spLocks xmlns:a="http://schemas.openxmlformats.org/drawingml/2006/main" noGrp="1"/>
-          </p:cNvSpPr>
-          <p:nvPr/>
-        </p:nvSpPr>
-        <p:spPr>
-          <a:xfrm xmlns:a="http://schemas.openxmlformats.org/drawingml/2006/main">
-            <a:off x="609600" y="3629025"/>
-            <a:ext cx="6667500" cy="1047750"/>
+                <a16:creationId xmlns:a16="http://schemas.microsoft.com/office/drawing/2014/main" id="{181DC425-1F23-4A2F-89CA-3A4C3330F96D}"/>
+              </a:ext>
+            </a:extLst>
+          </p:cNvPr>
+          <p:cNvSpPr>
+            <a:spLocks xmlns:a="http://schemas.openxmlformats.org/drawingml/2006/main" noGrp="1"/>
+          </p:cNvSpPr>
+          <p:nvPr/>
+        </p:nvSpPr>
+        <p:spPr>
+          <a:xfrm xmlns:a="http://schemas.openxmlformats.org/drawingml/2006/main">
+            <a:off x="609600" y="3438525"/>
+            <a:ext cx="7143750" cy="1428750"/>
           </a:xfrm>
           <a:prstGeom xmlns:a="http://schemas.openxmlformats.org/drawingml/2006/main" prst="rect">
             <a:avLst/>
@@ -2659,7 +3780,7 @@
               </a:defRPr>
             </a:pPr>
             <a:r>
-              <a:t>VarFoot turns tryout prep into a loop the player can repeat without waiting for a coach to personalize every session.</a:t>
+              <a:t>I was training hard, posting the journey, and staying consistent. What I did not have was a system that told me what to work on and whether it was moving me toward varsity.</a:t>
             </a:r>
           </a:p>
         </p:txBody>
@@ -2669,18 +3790,18 @@
           <p:cNvPr id="4" name="">
             <a:extLst xmlns:a="http://schemas.openxmlformats.org/drawingml/2006/main">
               <a:ext uri="{FF2B5EF4-FFF2-40B4-BE49-F238E27FC236}">
-                <a16:creationId xmlns:a16="http://schemas.microsoft.com/office/drawing/2014/main" id="{E057B2B0-C8F1-4543-A7EF-05A345A4DB8D}"/>
-              </a:ext>
-            </a:extLst>
-          </p:cNvPr>
-          <p:cNvSpPr>
-            <a:spLocks xmlns:a="http://schemas.openxmlformats.org/drawingml/2006/main" noGrp="1"/>
-          </p:cNvSpPr>
-          <p:nvPr/>
-        </p:nvSpPr>
-        <p:spPr>
-          <a:xfrm xmlns:a="http://schemas.openxmlformats.org/drawingml/2006/main">
-            <a:off x="609600" y="4886325"/>
+                <a16:creationId xmlns:a16="http://schemas.microsoft.com/office/drawing/2014/main" id="{56FFB2D7-0D0C-4C18-8C10-B3856A519CED}"/>
+              </a:ext>
+            </a:extLst>
+          </p:cNvPr>
+          <p:cNvSpPr>
+            <a:spLocks xmlns:a="http://schemas.openxmlformats.org/drawingml/2006/main" noGrp="1"/>
+          </p:cNvSpPr>
+          <p:nvPr/>
+        </p:nvSpPr>
+        <p:spPr>
+          <a:xfrm xmlns:a="http://schemas.openxmlformats.org/drawingml/2006/main">
+            <a:off x="609600" y="5076825"/>
             <a:ext cx="190500" cy="323850"/>
           </a:xfrm>
           <a:prstGeom xmlns:a="http://schemas.openxmlformats.org/drawingml/2006/main" prst="rect">
@@ -2694,7 +3815,7 @@
             <a:pPr>
               <a:defRPr sz="1875" b="1">
                 <a:solidFill>
-                  <a:srgbClr val="39FF73"/>
+                  <a:srgbClr val="FFD23F"/>
                 </a:solidFill>
                 <a:latin typeface="Avenir Next"/>
                 <a:ea typeface="Avenir Next"/>
@@ -2712,19 +3833,19 @@
           <p:cNvPr id="5" name="">
             <a:extLst xmlns:a="http://schemas.openxmlformats.org/drawingml/2006/main">
               <a:ext uri="{FF2B5EF4-FFF2-40B4-BE49-F238E27FC236}">
-                <a16:creationId xmlns:a16="http://schemas.microsoft.com/office/drawing/2014/main" id="{F28A30F9-B598-40E3-8842-C3620BBFF18B}"/>
-              </a:ext>
-            </a:extLst>
-          </p:cNvPr>
-          <p:cNvSpPr>
-            <a:spLocks xmlns:a="http://schemas.openxmlformats.org/drawingml/2006/main" noGrp="1"/>
-          </p:cNvSpPr>
-          <p:nvPr/>
-        </p:nvSpPr>
-        <p:spPr>
-          <a:xfrm xmlns:a="http://schemas.openxmlformats.org/drawingml/2006/main">
-            <a:off x="914400" y="4886325"/>
-            <a:ext cx="6477000" cy="533400"/>
+                <a16:creationId xmlns:a16="http://schemas.microsoft.com/office/drawing/2014/main" id="{55773ECC-031D-47AC-AD8C-1A2986A93FAB}"/>
+              </a:ext>
+            </a:extLst>
+          </p:cNvPr>
+          <p:cNvSpPr>
+            <a:spLocks xmlns:a="http://schemas.openxmlformats.org/drawingml/2006/main" noGrp="1"/>
+          </p:cNvSpPr>
+          <p:nvPr/>
+        </p:nvSpPr>
+        <p:spPr>
+          <a:xfrm xmlns:a="http://schemas.openxmlformats.org/drawingml/2006/main">
+            <a:off x="914400" y="5076825"/>
+            <a:ext cx="6762750" cy="533400"/>
           </a:xfrm>
           <a:prstGeom xmlns:a="http://schemas.openxmlformats.org/drawingml/2006/main" prst="rect">
             <a:avLst/>
@@ -2745,7 +3866,7 @@
               </a:defRPr>
             </a:pPr>
             <a:r>
-              <a:t>19-drill baseline across technical, physical, speed, recovery, and fueling.</a:t>
+              <a:t>Training hard, but guessing at priorities.</a:t>
             </a:r>
           </a:p>
         </p:txBody>
@@ -2755,18 +3876,18 @@
           <p:cNvPr id="6" name="">
             <a:extLst xmlns:a="http://schemas.openxmlformats.org/drawingml/2006/main">
               <a:ext uri="{FF2B5EF4-FFF2-40B4-BE49-F238E27FC236}">
-                <a16:creationId xmlns:a16="http://schemas.microsoft.com/office/drawing/2014/main" id="{9B590D38-3EE9-4A3B-B652-D6A762C2B721}"/>
-              </a:ext>
-            </a:extLst>
-          </p:cNvPr>
-          <p:cNvSpPr>
-            <a:spLocks xmlns:a="http://schemas.openxmlformats.org/drawingml/2006/main" noGrp="1"/>
-          </p:cNvSpPr>
-          <p:nvPr/>
-        </p:nvSpPr>
-        <p:spPr>
-          <a:xfrm xmlns:a="http://schemas.openxmlformats.org/drawingml/2006/main">
-            <a:off x="609600" y="5534025"/>
+                <a16:creationId xmlns:a16="http://schemas.microsoft.com/office/drawing/2014/main" id="{8CE9F640-F53E-45AD-83C1-825B22B7F591}"/>
+              </a:ext>
+            </a:extLst>
+          </p:cNvPr>
+          <p:cNvSpPr>
+            <a:spLocks xmlns:a="http://schemas.openxmlformats.org/drawingml/2006/main" noGrp="1"/>
+          </p:cNvSpPr>
+          <p:nvPr/>
+        </p:nvSpPr>
+        <p:spPr>
+          <a:xfrm xmlns:a="http://schemas.openxmlformats.org/drawingml/2006/main">
+            <a:off x="609600" y="5724525"/>
             <a:ext cx="190500" cy="323850"/>
           </a:xfrm>
           <a:prstGeom xmlns:a="http://schemas.openxmlformats.org/drawingml/2006/main" prst="rect">
@@ -2780,7 +3901,7 @@
             <a:pPr>
               <a:defRPr sz="1875" b="1">
                 <a:solidFill>
-                  <a:srgbClr val="39FF73"/>
+                  <a:srgbClr val="FFD23F"/>
                 </a:solidFill>
                 <a:latin typeface="Avenir Next"/>
                 <a:ea typeface="Avenir Next"/>
@@ -2798,19 +3919,19 @@
           <p:cNvPr id="7" name="">
             <a:extLst xmlns:a="http://schemas.openxmlformats.org/drawingml/2006/main">
               <a:ext uri="{FF2B5EF4-FFF2-40B4-BE49-F238E27FC236}">
-                <a16:creationId xmlns:a16="http://schemas.microsoft.com/office/drawing/2014/main" id="{7948C706-27B8-4947-A09F-CCA8F8235C94}"/>
-              </a:ext>
-            </a:extLst>
-          </p:cNvPr>
-          <p:cNvSpPr>
-            <a:spLocks xmlns:a="http://schemas.openxmlformats.org/drawingml/2006/main" noGrp="1"/>
-          </p:cNvSpPr>
-          <p:nvPr/>
-        </p:nvSpPr>
-        <p:spPr>
-          <a:xfrm xmlns:a="http://schemas.openxmlformats.org/drawingml/2006/main">
-            <a:off x="914400" y="5534025"/>
-            <a:ext cx="6477000" cy="533400"/>
+                <a16:creationId xmlns:a16="http://schemas.microsoft.com/office/drawing/2014/main" id="{7569849E-7AB4-4920-9D22-C6F20B896B6C}"/>
+              </a:ext>
+            </a:extLst>
+          </p:cNvPr>
+          <p:cNvSpPr>
+            <a:spLocks xmlns:a="http://schemas.openxmlformats.org/drawingml/2006/main" noGrp="1"/>
+          </p:cNvSpPr>
+          <p:nvPr/>
+        </p:nvSpPr>
+        <p:spPr>
+          <a:xfrm xmlns:a="http://schemas.openxmlformats.org/drawingml/2006/main">
+            <a:off x="914400" y="5724525"/>
+            <a:ext cx="6762750" cy="533400"/>
           </a:xfrm>
           <a:prstGeom xmlns:a="http://schemas.openxmlformats.org/drawingml/2006/main" prst="rect">
             <a:avLst/>
@@ -2831,7 +3952,7 @@
               </a:defRPr>
             </a:pPr>
             <a:r>
-              <a:t>Freshman/JV/varsity anchors make the score understandable.</a:t>
+              <a:t>No baseline, no benchmark, no ranked next step.</a:t>
             </a:r>
           </a:p>
         </p:txBody>
@@ -2841,18 +3962,18 @@
           <p:cNvPr id="8" name="">
             <a:extLst xmlns:a="http://schemas.openxmlformats.org/drawingml/2006/main">
               <a:ext uri="{FF2B5EF4-FFF2-40B4-BE49-F238E27FC236}">
-                <a16:creationId xmlns:a16="http://schemas.microsoft.com/office/drawing/2014/main" id="{08EE1C2B-8224-4140-9D06-A0104750BE98}"/>
-              </a:ext>
-            </a:extLst>
-          </p:cNvPr>
-          <p:cNvSpPr>
-            <a:spLocks xmlns:a="http://schemas.openxmlformats.org/drawingml/2006/main" noGrp="1"/>
-          </p:cNvSpPr>
-          <p:nvPr/>
-        </p:nvSpPr>
-        <p:spPr>
-          <a:xfrm xmlns:a="http://schemas.openxmlformats.org/drawingml/2006/main">
-            <a:off x="609600" y="6181725"/>
+                <a16:creationId xmlns:a16="http://schemas.microsoft.com/office/drawing/2014/main" id="{5AB17FDB-B757-4FBD-817B-FC5DF604052B}"/>
+              </a:ext>
+            </a:extLst>
+          </p:cNvPr>
+          <p:cNvSpPr>
+            <a:spLocks xmlns:a="http://schemas.openxmlformats.org/drawingml/2006/main" noGrp="1"/>
+          </p:cNvSpPr>
+          <p:nvPr/>
+        </p:nvSpPr>
+        <p:spPr>
+          <a:xfrm xmlns:a="http://schemas.openxmlformats.org/drawingml/2006/main">
+            <a:off x="609600" y="6372225"/>
             <a:ext cx="190500" cy="323850"/>
           </a:xfrm>
           <a:prstGeom xmlns:a="http://schemas.openxmlformats.org/drawingml/2006/main" prst="rect">
@@ -2866,7 +3987,7 @@
             <a:pPr>
               <a:defRPr sz="1875" b="1">
                 <a:solidFill>
-                  <a:srgbClr val="39FF73"/>
+                  <a:srgbClr val="FFD23F"/>
                 </a:solidFill>
                 <a:latin typeface="Avenir Next"/>
                 <a:ea typeface="Avenir Next"/>
@@ -2884,19 +4005,19 @@
           <p:cNvPr id="9" name="">
             <a:extLst xmlns:a="http://schemas.openxmlformats.org/drawingml/2006/main">
               <a:ext uri="{FF2B5EF4-FFF2-40B4-BE49-F238E27FC236}">
-                <a16:creationId xmlns:a16="http://schemas.microsoft.com/office/drawing/2014/main" id="{B0A6021D-934D-495F-9D4B-D5B89CD9A62A}"/>
-              </a:ext>
-            </a:extLst>
-          </p:cNvPr>
-          <p:cNvSpPr>
-            <a:spLocks xmlns:a="http://schemas.openxmlformats.org/drawingml/2006/main" noGrp="1"/>
-          </p:cNvSpPr>
-          <p:nvPr/>
-        </p:nvSpPr>
-        <p:spPr>
-          <a:xfrm xmlns:a="http://schemas.openxmlformats.org/drawingml/2006/main">
-            <a:off x="914400" y="6181725"/>
-            <a:ext cx="6477000" cy="533400"/>
+                <a16:creationId xmlns:a16="http://schemas.microsoft.com/office/drawing/2014/main" id="{0BCC7E59-BFC6-43E9-B58E-5765DBB79ECF}"/>
+              </a:ext>
+            </a:extLst>
+          </p:cNvPr>
+          <p:cNvSpPr>
+            <a:spLocks xmlns:a="http://schemas.openxmlformats.org/drawingml/2006/main" noGrp="1"/>
+          </p:cNvSpPr>
+          <p:nvPr/>
+        </p:nvSpPr>
+        <p:spPr>
+          <a:xfrm xmlns:a="http://schemas.openxmlformats.org/drawingml/2006/main">
+            <a:off x="914400" y="6372225"/>
+            <a:ext cx="6762750" cy="533400"/>
           </a:xfrm>
           <a:prstGeom xmlns:a="http://schemas.openxmlformats.org/drawingml/2006/main" prst="rect">
             <a:avLst/>
@@ -2917,59 +4038,187 @@
               </a:defRPr>
             </a:pPr>
             <a:r>
-              <a:t>Completed sessions regenerate future work from the latest state.</a:t>
-            </a:r>
-          </a:p>
-        </p:txBody>
-      </p:sp>
-      <p:pic>
-        <p:nvPicPr>
-          <p:cNvPr id="10" name=""/>
-          <p:cNvPicPr>
-            <a:picLocks xmlns:a="http://schemas.openxmlformats.org/drawingml/2006/main" noChangeAspect="1"/>
-          </p:cNvPicPr>
-          <p:nvPr/>
-        </p:nvPicPr>
-        <p:blipFill>
-          <a:blip xmlns:r="http://schemas.openxmlformats.org/officeDocument/2006/relationships" xmlns:a="http://schemas.openxmlformats.org/drawingml/2006/main" r:embed="Rb223e036d2ad407b"/>
-          <a:stretch xmlns:a="http://schemas.openxmlformats.org/drawingml/2006/main"/>
-        </p:blipFill>
-        <p:spPr>
-          <a:xfrm xmlns:a="http://schemas.openxmlformats.org/drawingml/2006/main">
-            <a:off x="8337941" y="1371600"/>
-            <a:ext cx="2640818" cy="5715000"/>
-          </a:xfrm>
-          <a:prstGeom xmlns:a="http://schemas.openxmlformats.org/drawingml/2006/main" prst="rect">
-            <a:avLst/>
-          </a:prstGeom>
-        </p:spPr>
-      </p:pic>
-      <p:pic>
-        <p:nvPicPr>
-          <p:cNvPr id="11" name=""/>
-          <p:cNvPicPr>
-            <a:picLocks xmlns:a="http://schemas.openxmlformats.org/drawingml/2006/main" noChangeAspect="1"/>
-          </p:cNvPicPr>
-          <p:nvPr/>
-        </p:nvPicPr>
-        <p:blipFill>
-          <a:blip xmlns:r="http://schemas.openxmlformats.org/officeDocument/2006/relationships" xmlns:a="http://schemas.openxmlformats.org/drawingml/2006/main" r:embed="Re63547898cb14861"/>
-          <a:stretch xmlns:a="http://schemas.openxmlformats.org/drawingml/2006/main"/>
-        </p:blipFill>
-        <p:spPr>
-          <a:xfrm xmlns:a="http://schemas.openxmlformats.org/drawingml/2006/main">
-            <a:off x="11271641" y="1371600"/>
-            <a:ext cx="2640818" cy="5715000"/>
-          </a:xfrm>
-          <a:prstGeom xmlns:a="http://schemas.openxmlformats.org/drawingml/2006/main" prst="rect">
-            <a:avLst/>
-          </a:prstGeom>
-        </p:spPr>
-      </p:pic>
+              <a:t>No clear line from a weakness to a drill to tryout-readiness.</a:t>
+            </a:r>
+          </a:p>
+        </p:txBody>
+      </p:sp>
+      <p:sp>
+        <p:nvSpPr>
+          <p:cNvPr id="10" name="">
+            <a:extLst xmlns:a="http://schemas.openxmlformats.org/drawingml/2006/main">
+              <a:ext uri="{FF2B5EF4-FFF2-40B4-BE49-F238E27FC236}">
+                <a16:creationId xmlns:a16="http://schemas.microsoft.com/office/drawing/2014/main" id="{B5D238EE-C6CB-43DB-84F6-A5AFA9F1525F}"/>
+              </a:ext>
+            </a:extLst>
+          </p:cNvPr>
+          <p:cNvSpPr>
+            <a:spLocks xmlns:a="http://schemas.openxmlformats.org/drawingml/2006/main" noGrp="1"/>
+          </p:cNvSpPr>
+          <p:nvPr/>
+        </p:nvSpPr>
+        <p:spPr>
+          <a:xfrm xmlns:a="http://schemas.openxmlformats.org/drawingml/2006/main">
+            <a:off x="8629650" y="2400300"/>
+            <a:ext cx="5048250" cy="476250"/>
+          </a:xfrm>
+          <a:prstGeom xmlns:a="http://schemas.openxmlformats.org/drawingml/2006/main" prst="rect">
+            <a:avLst/>
+          </a:prstGeom>
+        </p:spPr>
+        <p:txBody>
+          <a:bodyPr xmlns:a="http://schemas.openxmlformats.org/drawingml/2006/main" wrap="square" lIns="0" tIns="0" rIns="0" bIns="0"/>
+          <a:lstStyle xmlns:a="http://schemas.openxmlformats.org/drawingml/2006/main"/>
+          <a:p xmlns:a="http://schemas.openxmlformats.org/drawingml/2006/main">
+            <a:pPr>
+              <a:defRPr sz="1875" b="0">
+                <a:solidFill>
+                  <a:srgbClr val="9AA1A9"/>
+                </a:solidFill>
+                <a:latin typeface="Avenir Next"/>
+                <a:ea typeface="Avenir Next"/>
+                <a:cs typeface="Avenir Next"/>
+              </a:defRPr>
+            </a:pPr>
+            <a:r>
+              <a:t>The question was never:</a:t>
+            </a:r>
+          </a:p>
+        </p:txBody>
+      </p:sp>
+      <p:sp>
+        <p:nvSpPr>
+          <p:cNvPr id="11" name="">
+            <a:extLst xmlns:a="http://schemas.openxmlformats.org/drawingml/2006/main">
+              <a:ext uri="{FF2B5EF4-FFF2-40B4-BE49-F238E27FC236}">
+                <a16:creationId xmlns:a16="http://schemas.microsoft.com/office/drawing/2014/main" id="{CDFEF1A3-3C40-48C2-A09A-89554F02C373}"/>
+              </a:ext>
+            </a:extLst>
+          </p:cNvPr>
+          <p:cNvSpPr>
+            <a:spLocks xmlns:a="http://schemas.openxmlformats.org/drawingml/2006/main" noGrp="1"/>
+          </p:cNvSpPr>
+          <p:nvPr/>
+        </p:nvSpPr>
+        <p:spPr>
+          <a:xfrm xmlns:a="http://schemas.openxmlformats.org/drawingml/2006/main">
+            <a:off x="8629650" y="3048000"/>
+            <a:ext cx="5143500" cy="1143000"/>
+          </a:xfrm>
+          <a:prstGeom xmlns:a="http://schemas.openxmlformats.org/drawingml/2006/main" prst="rect">
+            <a:avLst/>
+          </a:prstGeom>
+        </p:spPr>
+        <p:txBody>
+          <a:bodyPr xmlns:a="http://schemas.openxmlformats.org/drawingml/2006/main" wrap="square" lIns="0" tIns="0" rIns="0" bIns="0"/>
+          <a:lstStyle xmlns:a="http://schemas.openxmlformats.org/drawingml/2006/main"/>
+          <a:p xmlns:a="http://schemas.openxmlformats.org/drawingml/2006/main">
+            <a:pPr>
+              <a:defRPr sz="3300" b="1">
+                <a:solidFill>
+                  <a:srgbClr val="F4F5F6"/>
+                </a:solidFill>
+                <a:latin typeface="Avenir Next"/>
+                <a:ea typeface="Avenir Next"/>
+                <a:cs typeface="Avenir Next"/>
+              </a:defRPr>
+            </a:pPr>
+            <a:r>
+              <a:t>"Will I put in the work?"</a:t>
+            </a:r>
+          </a:p>
+        </p:txBody>
+      </p:sp>
+      <p:sp>
+        <p:nvSpPr>
+          <p:cNvPr id="12" name="">
+            <a:extLst xmlns:a="http://schemas.openxmlformats.org/drawingml/2006/main">
+              <a:ext uri="{FF2B5EF4-FFF2-40B4-BE49-F238E27FC236}">
+                <a16:creationId xmlns:a16="http://schemas.microsoft.com/office/drawing/2014/main" id="{44184C11-B696-47D4-AFD9-1BB1DC81BD08}"/>
+              </a:ext>
+            </a:extLst>
+          </p:cNvPr>
+          <p:cNvSpPr>
+            <a:spLocks xmlns:a="http://schemas.openxmlformats.org/drawingml/2006/main" noGrp="1"/>
+          </p:cNvSpPr>
+          <p:nvPr/>
+        </p:nvSpPr>
+        <p:spPr>
+          <a:xfrm xmlns:a="http://schemas.openxmlformats.org/drawingml/2006/main">
+            <a:off x="8629650" y="4362450"/>
+            <a:ext cx="5048250" cy="381000"/>
+          </a:xfrm>
+          <a:prstGeom xmlns:a="http://schemas.openxmlformats.org/drawingml/2006/main" prst="rect">
+            <a:avLst/>
+          </a:prstGeom>
+        </p:spPr>
+        <p:txBody>
+          <a:bodyPr xmlns:a="http://schemas.openxmlformats.org/drawingml/2006/main" wrap="square" lIns="0" tIns="0" rIns="0" bIns="0"/>
+          <a:lstStyle xmlns:a="http://schemas.openxmlformats.org/drawingml/2006/main"/>
+          <a:p xmlns:a="http://schemas.openxmlformats.org/drawingml/2006/main">
+            <a:pPr>
+              <a:defRPr sz="1875" b="0">
+                <a:solidFill>
+                  <a:srgbClr val="9AA1A9"/>
+                </a:solidFill>
+                <a:latin typeface="Avenir Next"/>
+                <a:ea typeface="Avenir Next"/>
+                <a:cs typeface="Avenir Next"/>
+              </a:defRPr>
+            </a:pPr>
+            <a:r>
+              <a:t>It was:</a:t>
+            </a:r>
+          </a:p>
+        </p:txBody>
+      </p:sp>
+      <p:sp>
+        <p:nvSpPr>
+          <p:cNvPr id="13" name="">
+            <a:extLst xmlns:a="http://schemas.openxmlformats.org/drawingml/2006/main">
+              <a:ext uri="{FF2B5EF4-FFF2-40B4-BE49-F238E27FC236}">
+                <a16:creationId xmlns:a16="http://schemas.microsoft.com/office/drawing/2014/main" id="{94A3EE91-284B-40D3-8BDD-CB24A193627A}"/>
+              </a:ext>
+            </a:extLst>
+          </p:cNvPr>
+          <p:cNvSpPr>
+            <a:spLocks xmlns:a="http://schemas.openxmlformats.org/drawingml/2006/main" noGrp="1"/>
+          </p:cNvSpPr>
+          <p:nvPr/>
+        </p:nvSpPr>
+        <p:spPr>
+          <a:xfrm xmlns:a="http://schemas.openxmlformats.org/drawingml/2006/main">
+            <a:off x="8629650" y="4914900"/>
+            <a:ext cx="5143500" cy="1143000"/>
+          </a:xfrm>
+          <a:prstGeom xmlns:a="http://schemas.openxmlformats.org/drawingml/2006/main" prst="rect">
+            <a:avLst/>
+          </a:prstGeom>
+        </p:spPr>
+        <p:txBody>
+          <a:bodyPr xmlns:a="http://schemas.openxmlformats.org/drawingml/2006/main" wrap="square" lIns="0" tIns="0" rIns="0" bIns="0"/>
+          <a:lstStyle xmlns:a="http://schemas.openxmlformats.org/drawingml/2006/main"/>
+          <a:p xmlns:a="http://schemas.openxmlformats.org/drawingml/2006/main">
+            <a:pPr>
+              <a:defRPr sz="3300" b="1">
+                <a:solidFill>
+                  <a:srgbClr val="F4F5F6"/>
+                </a:solidFill>
+                <a:latin typeface="Avenir Next"/>
+                <a:ea typeface="Avenir Next"/>
+                <a:cs typeface="Avenir Next"/>
+              </a:defRPr>
+            </a:pPr>
+            <a:r>
+              <a:t>"What exactly should I work on today to become varsity-ready?"</a:t>
+            </a:r>
+          </a:p>
+        </p:txBody>
+      </p:sp>
     </p:spTree>
     <p:extLst>
       <p:ext uri="{BB962C8B-B14F-4D97-AF65-F5344CB8AC3E}">
-        <p14:creationId xmlns:p14="http://schemas.microsoft.com/office/powerpoint/2010/main" val="946437795"/>
+        <p14:creationId xmlns:p14="http://schemas.microsoft.com/office/powerpoint/2010/main" val="2040478252"/>
       </p:ext>
     </p:extLst>
   </p:cSld>
@@ -3000,18 +4249,18 @@
           <p:cNvPr id="1" name="">
             <a:extLst xmlns:a="http://schemas.openxmlformats.org/drawingml/2006/main">
               <a:ext uri="{FF2B5EF4-FFF2-40B4-BE49-F238E27FC236}">
-                <a16:creationId xmlns:a16="http://schemas.microsoft.com/office/drawing/2014/main" id="{610E551F-896A-451E-826D-89EB22263578}"/>
-              </a:ext>
-            </a:extLst>
-          </p:cNvPr>
-          <p:cNvSpPr>
-            <a:spLocks xmlns:a="http://schemas.openxmlformats.org/drawingml/2006/main" noGrp="1"/>
-          </p:cNvSpPr>
-          <p:nvPr/>
-        </p:nvSpPr>
-        <p:spPr>
-          <a:xfrm xmlns:a="http://schemas.openxmlformats.org/drawingml/2006/main">
-            <a:off x="609600" y="1695450"/>
+                <a16:creationId xmlns:a16="http://schemas.microsoft.com/office/drawing/2014/main" id="{5E3A8297-1B14-42F8-9673-3CF471F56334}"/>
+              </a:ext>
+            </a:extLst>
+          </p:cNvPr>
+          <p:cNvSpPr>
+            <a:spLocks xmlns:a="http://schemas.openxmlformats.org/drawingml/2006/main" noGrp="1"/>
+          </p:cNvSpPr>
+          <p:nvPr/>
+        </p:nvSpPr>
+        <p:spPr>
+          <a:xfrm xmlns:a="http://schemas.openxmlformats.org/drawingml/2006/main">
+            <a:off x="609600" y="609600"/>
             <a:ext cx="9525000" cy="323850"/>
           </a:xfrm>
           <a:prstGeom xmlns:a="http://schemas.openxmlformats.org/drawingml/2006/main" prst="rect">
@@ -3025,15 +4274,15 @@
             <a:pPr>
               <a:defRPr sz="1350" b="1">
                 <a:solidFill>
-                  <a:srgbClr val="4DB6FF"/>
-                </a:solidFill>
-                <a:latin typeface="Avenir Next"/>
-                <a:ea typeface="Avenir Next"/>
-                <a:cs typeface="Avenir Next"/>
-              </a:defRPr>
-            </a:pPr>
-            <a:r>
-              <a:t>PROOF OBJECT</a:t>
+                  <a:srgbClr val="FF6B5E"/>
+                </a:solidFill>
+                <a:latin typeface="Avenir Next"/>
+                <a:ea typeface="Avenir Next"/>
+                <a:cs typeface="Avenir Next"/>
+              </a:defRPr>
+            </a:pPr>
+            <a:r>
+              <a:t>WHY EXISTING SOLUTIONS FAIL</a:t>
             </a:r>
           </a:p>
         </p:txBody>
@@ -3043,19 +4292,19 @@
           <p:cNvPr id="2" name="">
             <a:extLst xmlns:a="http://schemas.openxmlformats.org/drawingml/2006/main">
               <a:ext uri="{FF2B5EF4-FFF2-40B4-BE49-F238E27FC236}">
-                <a16:creationId xmlns:a16="http://schemas.microsoft.com/office/drawing/2014/main" id="{9DAE18F4-A9C0-4AD0-9AA9-6F157CF47011}"/>
-              </a:ext>
-            </a:extLst>
-          </p:cNvPr>
-          <p:cNvSpPr>
-            <a:spLocks xmlns:a="http://schemas.openxmlformats.org/drawingml/2006/main" noGrp="1"/>
-          </p:cNvSpPr>
-          <p:nvPr/>
-        </p:nvSpPr>
-        <p:spPr>
-          <a:xfrm xmlns:a="http://schemas.openxmlformats.org/drawingml/2006/main">
-            <a:off x="609600" y="2228850"/>
-            <a:ext cx="6286500" cy="1143000"/>
+                <a16:creationId xmlns:a16="http://schemas.microsoft.com/office/drawing/2014/main" id="{9C457C93-E848-4BCE-90CB-94F4FABE35AE}"/>
+              </a:ext>
+            </a:extLst>
+          </p:cNvPr>
+          <p:cNvSpPr>
+            <a:spLocks xmlns:a="http://schemas.openxmlformats.org/drawingml/2006/main" noGrp="1"/>
+          </p:cNvSpPr>
+          <p:nvPr/>
+        </p:nvSpPr>
+        <p:spPr>
+          <a:xfrm xmlns:a="http://schemas.openxmlformats.org/drawingml/2006/main">
+            <a:off x="609600" y="1200150"/>
+            <a:ext cx="11239500" cy="1143000"/>
           </a:xfrm>
           <a:prstGeom xmlns:a="http://schemas.openxmlformats.org/drawingml/2006/main" prst="rect">
             <a:avLst/>
@@ -3076,7 +4325,7 @@
               </a:defRPr>
             </a:pPr>
             <a:r>
-              <a:t>The roadmap is generated from Jordan's measured gaps.</a:t>
+              <a:t>Everything available solves a different problem.</a:t>
             </a:r>
           </a:p>
         </p:txBody>
@@ -3086,19 +4335,363 @@
           <p:cNvPr id="3" name="">
             <a:extLst xmlns:a="http://schemas.openxmlformats.org/drawingml/2006/main">
               <a:ext uri="{FF2B5EF4-FFF2-40B4-BE49-F238E27FC236}">
-                <a16:creationId xmlns:a16="http://schemas.microsoft.com/office/drawing/2014/main" id="{BC9FC7F7-15D4-4D21-8C38-7A313652B4BD}"/>
-              </a:ext>
-            </a:extLst>
-          </p:cNvPr>
-          <p:cNvSpPr>
-            <a:spLocks xmlns:a="http://schemas.openxmlformats.org/drawingml/2006/main" noGrp="1"/>
-          </p:cNvSpPr>
-          <p:nvPr/>
-        </p:nvSpPr>
-        <p:spPr>
-          <a:xfrm xmlns:a="http://schemas.openxmlformats.org/drawingml/2006/main">
-            <a:off x="609600" y="3581400"/>
-            <a:ext cx="6191250" cy="1143000"/>
+                <a16:creationId xmlns:a16="http://schemas.microsoft.com/office/drawing/2014/main" id="{94493D55-8BDE-4D29-965F-2AC1ACE77B4E}"/>
+              </a:ext>
+            </a:extLst>
+          </p:cNvPr>
+          <p:cNvSpPr>
+            <a:spLocks xmlns:a="http://schemas.openxmlformats.org/drawingml/2006/main" noGrp="1"/>
+          </p:cNvSpPr>
+          <p:nvPr/>
+        </p:nvSpPr>
+        <p:spPr>
+          <a:xfrm xmlns:a="http://schemas.openxmlformats.org/drawingml/2006/main">
+            <a:off x="609600" y="2609850"/>
+            <a:ext cx="190500" cy="323850"/>
+          </a:xfrm>
+          <a:prstGeom xmlns:a="http://schemas.openxmlformats.org/drawingml/2006/main" prst="rect">
+            <a:avLst/>
+          </a:prstGeom>
+        </p:spPr>
+        <p:txBody>
+          <a:bodyPr xmlns:a="http://schemas.openxmlformats.org/drawingml/2006/main" wrap="square" lIns="0" tIns="0" rIns="0" bIns="0"/>
+          <a:lstStyle xmlns:a="http://schemas.openxmlformats.org/drawingml/2006/main"/>
+          <a:p xmlns:a="http://schemas.openxmlformats.org/drawingml/2006/main">
+            <a:pPr>
+              <a:defRPr sz="1875" b="1">
+                <a:solidFill>
+                  <a:srgbClr val="FF6B5E"/>
+                </a:solidFill>
+                <a:latin typeface="Avenir Next"/>
+                <a:ea typeface="Avenir Next"/>
+                <a:cs typeface="Avenir Next"/>
+              </a:defRPr>
+            </a:pPr>
+            <a:r>
+              <a:t>-</a:t>
+            </a:r>
+          </a:p>
+        </p:txBody>
+      </p:sp>
+      <p:sp>
+        <p:nvSpPr>
+          <p:cNvPr id="4" name="">
+            <a:extLst xmlns:a="http://schemas.openxmlformats.org/drawingml/2006/main">
+              <a:ext uri="{FF2B5EF4-FFF2-40B4-BE49-F238E27FC236}">
+                <a16:creationId xmlns:a16="http://schemas.microsoft.com/office/drawing/2014/main" id="{8C4262B2-766F-4A6E-968F-5FB2A0701553}"/>
+              </a:ext>
+            </a:extLst>
+          </p:cNvPr>
+          <p:cNvSpPr>
+            <a:spLocks xmlns:a="http://schemas.openxmlformats.org/drawingml/2006/main" noGrp="1"/>
+          </p:cNvSpPr>
+          <p:nvPr/>
+        </p:nvSpPr>
+        <p:spPr>
+          <a:xfrm xmlns:a="http://schemas.openxmlformats.org/drawingml/2006/main">
+            <a:off x="914400" y="2609850"/>
+            <a:ext cx="6191250" cy="533400"/>
+          </a:xfrm>
+          <a:prstGeom xmlns:a="http://schemas.openxmlformats.org/drawingml/2006/main" prst="rect">
+            <a:avLst/>
+          </a:prstGeom>
+        </p:spPr>
+        <p:txBody>
+          <a:bodyPr xmlns:a="http://schemas.openxmlformats.org/drawingml/2006/main" wrap="square" lIns="0" tIns="0" rIns="0" bIns="0"/>
+          <a:lstStyle xmlns:a="http://schemas.openxmlformats.org/drawingml/2006/main"/>
+          <a:p xmlns:a="http://schemas.openxmlformats.org/drawingml/2006/main">
+            <a:pPr>
+              <a:defRPr sz="1800" b="1">
+                <a:solidFill>
+                  <a:srgbClr val="F4F5F6"/>
+                </a:solidFill>
+                <a:latin typeface="Avenir Next"/>
+                <a:ea typeface="Avenir Next"/>
+                <a:cs typeface="Avenir Next"/>
+              </a:defRPr>
+            </a:pPr>
+            <a:r>
+              <a:t>Generic YouTube drills are not personalized to my position or weaknesses.</a:t>
+            </a:r>
+          </a:p>
+        </p:txBody>
+      </p:sp>
+      <p:sp>
+        <p:nvSpPr>
+          <p:cNvPr id="5" name="">
+            <a:extLst xmlns:a="http://schemas.openxmlformats.org/drawingml/2006/main">
+              <a:ext uri="{FF2B5EF4-FFF2-40B4-BE49-F238E27FC236}">
+                <a16:creationId xmlns:a16="http://schemas.microsoft.com/office/drawing/2014/main" id="{1205F8E4-DF5A-45B9-9F75-8DE8A8B582F1}"/>
+              </a:ext>
+            </a:extLst>
+          </p:cNvPr>
+          <p:cNvSpPr>
+            <a:spLocks xmlns:a="http://schemas.openxmlformats.org/drawingml/2006/main" noGrp="1"/>
+          </p:cNvSpPr>
+          <p:nvPr/>
+        </p:nvSpPr>
+        <p:spPr>
+          <a:xfrm xmlns:a="http://schemas.openxmlformats.org/drawingml/2006/main">
+            <a:off x="609600" y="3257550"/>
+            <a:ext cx="190500" cy="323850"/>
+          </a:xfrm>
+          <a:prstGeom xmlns:a="http://schemas.openxmlformats.org/drawingml/2006/main" prst="rect">
+            <a:avLst/>
+          </a:prstGeom>
+        </p:spPr>
+        <p:txBody>
+          <a:bodyPr xmlns:a="http://schemas.openxmlformats.org/drawingml/2006/main" wrap="square" lIns="0" tIns="0" rIns="0" bIns="0"/>
+          <a:lstStyle xmlns:a="http://schemas.openxmlformats.org/drawingml/2006/main"/>
+          <a:p xmlns:a="http://schemas.openxmlformats.org/drawingml/2006/main">
+            <a:pPr>
+              <a:defRPr sz="1875" b="1">
+                <a:solidFill>
+                  <a:srgbClr val="FF6B5E"/>
+                </a:solidFill>
+                <a:latin typeface="Avenir Next"/>
+                <a:ea typeface="Avenir Next"/>
+                <a:cs typeface="Avenir Next"/>
+              </a:defRPr>
+            </a:pPr>
+            <a:r>
+              <a:t>-</a:t>
+            </a:r>
+          </a:p>
+        </p:txBody>
+      </p:sp>
+      <p:sp>
+        <p:nvSpPr>
+          <p:cNvPr id="6" name="">
+            <a:extLst xmlns:a="http://schemas.openxmlformats.org/drawingml/2006/main">
+              <a:ext uri="{FF2B5EF4-FFF2-40B4-BE49-F238E27FC236}">
+                <a16:creationId xmlns:a16="http://schemas.microsoft.com/office/drawing/2014/main" id="{F541FB4F-609F-42C7-BB7A-7D8B1BF7D7A1}"/>
+              </a:ext>
+            </a:extLst>
+          </p:cNvPr>
+          <p:cNvSpPr>
+            <a:spLocks xmlns:a="http://schemas.openxmlformats.org/drawingml/2006/main" noGrp="1"/>
+          </p:cNvSpPr>
+          <p:nvPr/>
+        </p:nvSpPr>
+        <p:spPr>
+          <a:xfrm xmlns:a="http://schemas.openxmlformats.org/drawingml/2006/main">
+            <a:off x="914400" y="3257550"/>
+            <a:ext cx="6191250" cy="533400"/>
+          </a:xfrm>
+          <a:prstGeom xmlns:a="http://schemas.openxmlformats.org/drawingml/2006/main" prst="rect">
+            <a:avLst/>
+          </a:prstGeom>
+        </p:spPr>
+        <p:txBody>
+          <a:bodyPr xmlns:a="http://schemas.openxmlformats.org/drawingml/2006/main" wrap="square" lIns="0" tIns="0" rIns="0" bIns="0"/>
+          <a:lstStyle xmlns:a="http://schemas.openxmlformats.org/drawingml/2006/main"/>
+          <a:p xmlns:a="http://schemas.openxmlformats.org/drawingml/2006/main">
+            <a:pPr>
+              <a:defRPr sz="1800" b="1">
+                <a:solidFill>
+                  <a:srgbClr val="F4F5F6"/>
+                </a:solidFill>
+                <a:latin typeface="Avenir Next"/>
+                <a:ea typeface="Avenir Next"/>
+                <a:cs typeface="Avenir Next"/>
+              </a:defRPr>
+            </a:pPr>
+            <a:r>
+              <a:t>Fitness apps track workouts but do not understand soccer tryouts.</a:t>
+            </a:r>
+          </a:p>
+        </p:txBody>
+      </p:sp>
+      <p:sp>
+        <p:nvSpPr>
+          <p:cNvPr id="7" name="">
+            <a:extLst xmlns:a="http://schemas.openxmlformats.org/drawingml/2006/main">
+              <a:ext uri="{FF2B5EF4-FFF2-40B4-BE49-F238E27FC236}">
+                <a16:creationId xmlns:a16="http://schemas.microsoft.com/office/drawing/2014/main" id="{8DE1F2E1-1DC5-453D-B892-177E762DD9E6}"/>
+              </a:ext>
+            </a:extLst>
+          </p:cNvPr>
+          <p:cNvSpPr>
+            <a:spLocks xmlns:a="http://schemas.openxmlformats.org/drawingml/2006/main" noGrp="1"/>
+          </p:cNvSpPr>
+          <p:nvPr/>
+        </p:nvSpPr>
+        <p:spPr>
+          <a:xfrm xmlns:a="http://schemas.openxmlformats.org/drawingml/2006/main">
+            <a:off x="7562850" y="2609850"/>
+            <a:ext cx="190500" cy="323850"/>
+          </a:xfrm>
+          <a:prstGeom xmlns:a="http://schemas.openxmlformats.org/drawingml/2006/main" prst="rect">
+            <a:avLst/>
+          </a:prstGeom>
+        </p:spPr>
+        <p:txBody>
+          <a:bodyPr xmlns:a="http://schemas.openxmlformats.org/drawingml/2006/main" wrap="square" lIns="0" tIns="0" rIns="0" bIns="0"/>
+          <a:lstStyle xmlns:a="http://schemas.openxmlformats.org/drawingml/2006/main"/>
+          <a:p xmlns:a="http://schemas.openxmlformats.org/drawingml/2006/main">
+            <a:pPr>
+              <a:defRPr sz="1875" b="1">
+                <a:solidFill>
+                  <a:srgbClr val="FF6B5E"/>
+                </a:solidFill>
+                <a:latin typeface="Avenir Next"/>
+                <a:ea typeface="Avenir Next"/>
+                <a:cs typeface="Avenir Next"/>
+              </a:defRPr>
+            </a:pPr>
+            <a:r>
+              <a:t>-</a:t>
+            </a:r>
+          </a:p>
+        </p:txBody>
+      </p:sp>
+      <p:sp>
+        <p:nvSpPr>
+          <p:cNvPr id="8" name="">
+            <a:extLst xmlns:a="http://schemas.openxmlformats.org/drawingml/2006/main">
+              <a:ext uri="{FF2B5EF4-FFF2-40B4-BE49-F238E27FC236}">
+                <a16:creationId xmlns:a16="http://schemas.microsoft.com/office/drawing/2014/main" id="{50EB2DA1-314A-43DA-A4C8-CDAFDE80CDB9}"/>
+              </a:ext>
+            </a:extLst>
+          </p:cNvPr>
+          <p:cNvSpPr>
+            <a:spLocks xmlns:a="http://schemas.openxmlformats.org/drawingml/2006/main" noGrp="1"/>
+          </p:cNvSpPr>
+          <p:nvPr/>
+        </p:nvSpPr>
+        <p:spPr>
+          <a:xfrm xmlns:a="http://schemas.openxmlformats.org/drawingml/2006/main">
+            <a:off x="7867650" y="2609850"/>
+            <a:ext cx="6191250" cy="533400"/>
+          </a:xfrm>
+          <a:prstGeom xmlns:a="http://schemas.openxmlformats.org/drawingml/2006/main" prst="rect">
+            <a:avLst/>
+          </a:prstGeom>
+        </p:spPr>
+        <p:txBody>
+          <a:bodyPr xmlns:a="http://schemas.openxmlformats.org/drawingml/2006/main" wrap="square" lIns="0" tIns="0" rIns="0" bIns="0"/>
+          <a:lstStyle xmlns:a="http://schemas.openxmlformats.org/drawingml/2006/main"/>
+          <a:p xmlns:a="http://schemas.openxmlformats.org/drawingml/2006/main">
+            <a:pPr>
+              <a:defRPr sz="1800" b="1">
+                <a:solidFill>
+                  <a:srgbClr val="F4F5F6"/>
+                </a:solidFill>
+                <a:latin typeface="Avenir Next"/>
+                <a:ea typeface="Avenir Next"/>
+                <a:cs typeface="Avenir Next"/>
+              </a:defRPr>
+            </a:pPr>
+            <a:r>
+              <a:t>Coaches give team feedback and are not available every day.</a:t>
+            </a:r>
+          </a:p>
+        </p:txBody>
+      </p:sp>
+      <p:sp>
+        <p:nvSpPr>
+          <p:cNvPr id="9" name="">
+            <a:extLst xmlns:a="http://schemas.openxmlformats.org/drawingml/2006/main">
+              <a:ext uri="{FF2B5EF4-FFF2-40B4-BE49-F238E27FC236}">
+                <a16:creationId xmlns:a16="http://schemas.microsoft.com/office/drawing/2014/main" id="{15A832F2-5D84-46BE-8ECB-5769DC71FAE4}"/>
+              </a:ext>
+            </a:extLst>
+          </p:cNvPr>
+          <p:cNvSpPr>
+            <a:spLocks xmlns:a="http://schemas.openxmlformats.org/drawingml/2006/main" noGrp="1"/>
+          </p:cNvSpPr>
+          <p:nvPr/>
+        </p:nvSpPr>
+        <p:spPr>
+          <a:xfrm xmlns:a="http://schemas.openxmlformats.org/drawingml/2006/main">
+            <a:off x="7562850" y="3257550"/>
+            <a:ext cx="190500" cy="323850"/>
+          </a:xfrm>
+          <a:prstGeom xmlns:a="http://schemas.openxmlformats.org/drawingml/2006/main" prst="rect">
+            <a:avLst/>
+          </a:prstGeom>
+        </p:spPr>
+        <p:txBody>
+          <a:bodyPr xmlns:a="http://schemas.openxmlformats.org/drawingml/2006/main" wrap="square" lIns="0" tIns="0" rIns="0" bIns="0"/>
+          <a:lstStyle xmlns:a="http://schemas.openxmlformats.org/drawingml/2006/main"/>
+          <a:p xmlns:a="http://schemas.openxmlformats.org/drawingml/2006/main">
+            <a:pPr>
+              <a:defRPr sz="1875" b="1">
+                <a:solidFill>
+                  <a:srgbClr val="FF6B5E"/>
+                </a:solidFill>
+                <a:latin typeface="Avenir Next"/>
+                <a:ea typeface="Avenir Next"/>
+                <a:cs typeface="Avenir Next"/>
+              </a:defRPr>
+            </a:pPr>
+            <a:r>
+              <a:t>-</a:t>
+            </a:r>
+          </a:p>
+        </p:txBody>
+      </p:sp>
+      <p:sp>
+        <p:nvSpPr>
+          <p:cNvPr id="10" name="">
+            <a:extLst xmlns:a="http://schemas.openxmlformats.org/drawingml/2006/main">
+              <a:ext uri="{FF2B5EF4-FFF2-40B4-BE49-F238E27FC236}">
+                <a16:creationId xmlns:a16="http://schemas.microsoft.com/office/drawing/2014/main" id="{10838870-7EDD-4C5E-A169-DDF76E9F297D}"/>
+              </a:ext>
+            </a:extLst>
+          </p:cNvPr>
+          <p:cNvSpPr>
+            <a:spLocks xmlns:a="http://schemas.openxmlformats.org/drawingml/2006/main" noGrp="1"/>
+          </p:cNvSpPr>
+          <p:nvPr/>
+        </p:nvSpPr>
+        <p:spPr>
+          <a:xfrm xmlns:a="http://schemas.openxmlformats.org/drawingml/2006/main">
+            <a:off x="7867650" y="3257550"/>
+            <a:ext cx="6191250" cy="533400"/>
+          </a:xfrm>
+          <a:prstGeom xmlns:a="http://schemas.openxmlformats.org/drawingml/2006/main" prst="rect">
+            <a:avLst/>
+          </a:prstGeom>
+        </p:spPr>
+        <p:txBody>
+          <a:bodyPr xmlns:a="http://schemas.openxmlformats.org/drawingml/2006/main" wrap="square" lIns="0" tIns="0" rIns="0" bIns="0"/>
+          <a:lstStyle xmlns:a="http://schemas.openxmlformats.org/drawingml/2006/main"/>
+          <a:p xmlns:a="http://schemas.openxmlformats.org/drawingml/2006/main">
+            <a:pPr>
+              <a:defRPr sz="1800" b="1">
+                <a:solidFill>
+                  <a:srgbClr val="F4F5F6"/>
+                </a:solidFill>
+                <a:latin typeface="Avenir Next"/>
+                <a:ea typeface="Avenir Next"/>
+                <a:cs typeface="Avenir Next"/>
+              </a:defRPr>
+            </a:pPr>
+            <a:r>
+              <a:t>Nutrition apps are not built around a teen athlete with soccer-specific goals.</a:t>
+            </a:r>
+          </a:p>
+        </p:txBody>
+      </p:sp>
+      <p:sp>
+        <p:nvSpPr>
+          <p:cNvPr id="11" name="">
+            <a:extLst xmlns:a="http://schemas.openxmlformats.org/drawingml/2006/main">
+              <a:ext uri="{FF2B5EF4-FFF2-40B4-BE49-F238E27FC236}">
+                <a16:creationId xmlns:a16="http://schemas.microsoft.com/office/drawing/2014/main" id="{43B62EBF-5EC4-4A69-BE0D-120EF2F23600}"/>
+              </a:ext>
+            </a:extLst>
+          </p:cNvPr>
+          <p:cNvSpPr>
+            <a:spLocks xmlns:a="http://schemas.openxmlformats.org/drawingml/2006/main" noGrp="1"/>
+          </p:cNvSpPr>
+          <p:nvPr/>
+        </p:nvSpPr>
+        <p:spPr>
+          <a:xfrm xmlns:a="http://schemas.openxmlformats.org/drawingml/2006/main">
+            <a:off x="609600" y="4057650"/>
+            <a:ext cx="11430000" cy="762000"/>
           </a:xfrm>
           <a:prstGeom xmlns:a="http://schemas.openxmlformats.org/drawingml/2006/main" prst="rect">
             <a:avLst/>
@@ -3119,295 +4712,15 @@
               </a:defRPr>
             </a:pPr>
             <a:r>
-              <a:t>The plan is not a canned Day 1 / Day 2 calendar. It ranks weaknesses, balances training load, and respects the tryout date.</a:t>
-            </a:r>
-          </a:p>
-        </p:txBody>
-      </p:sp>
-      <p:sp>
-        <p:nvSpPr>
-          <p:cNvPr id="4" name="">
-            <a:extLst xmlns:a="http://schemas.openxmlformats.org/drawingml/2006/main">
-              <a:ext uri="{FF2B5EF4-FFF2-40B4-BE49-F238E27FC236}">
-                <a16:creationId xmlns:a16="http://schemas.microsoft.com/office/drawing/2014/main" id="{722BF987-9938-45A9-9C33-8A4D4A4D1C6A}"/>
-              </a:ext>
-            </a:extLst>
-          </p:cNvPr>
-          <p:cNvSpPr>
-            <a:spLocks xmlns:a="http://schemas.openxmlformats.org/drawingml/2006/main" noGrp="1"/>
-          </p:cNvSpPr>
-          <p:nvPr/>
-        </p:nvSpPr>
-        <p:spPr>
-          <a:xfrm xmlns:a="http://schemas.openxmlformats.org/drawingml/2006/main">
-            <a:off x="609600" y="4933950"/>
-            <a:ext cx="190500" cy="323850"/>
-          </a:xfrm>
-          <a:prstGeom xmlns:a="http://schemas.openxmlformats.org/drawingml/2006/main" prst="rect">
-            <a:avLst/>
-          </a:prstGeom>
-        </p:spPr>
-        <p:txBody>
-          <a:bodyPr xmlns:a="http://schemas.openxmlformats.org/drawingml/2006/main" wrap="square" lIns="0" tIns="0" rIns="0" bIns="0"/>
-          <a:lstStyle xmlns:a="http://schemas.openxmlformats.org/drawingml/2006/main"/>
-          <a:p xmlns:a="http://schemas.openxmlformats.org/drawingml/2006/main">
-            <a:pPr>
-              <a:defRPr sz="1875" b="1">
-                <a:solidFill>
-                  <a:srgbClr val="4DB6FF"/>
-                </a:solidFill>
-                <a:latin typeface="Avenir Next"/>
-                <a:ea typeface="Avenir Next"/>
-                <a:cs typeface="Avenir Next"/>
-              </a:defRPr>
-            </a:pPr>
-            <a:r>
-              <a:t>-</a:t>
-            </a:r>
-          </a:p>
-        </p:txBody>
-      </p:sp>
-      <p:sp>
-        <p:nvSpPr>
-          <p:cNvPr id="5" name="">
-            <a:extLst xmlns:a="http://schemas.openxmlformats.org/drawingml/2006/main">
-              <a:ext uri="{FF2B5EF4-FFF2-40B4-BE49-F238E27FC236}">
-                <a16:creationId xmlns:a16="http://schemas.microsoft.com/office/drawing/2014/main" id="{91C997A8-2377-47ED-9EEB-734EA6221ED9}"/>
-              </a:ext>
-            </a:extLst>
-          </p:cNvPr>
-          <p:cNvSpPr>
-            <a:spLocks xmlns:a="http://schemas.openxmlformats.org/drawingml/2006/main" noGrp="1"/>
-          </p:cNvSpPr>
-          <p:nvPr/>
-        </p:nvSpPr>
-        <p:spPr>
-          <a:xfrm xmlns:a="http://schemas.openxmlformats.org/drawingml/2006/main">
-            <a:off x="914400" y="4933950"/>
-            <a:ext cx="5905500" cy="533400"/>
-          </a:xfrm>
-          <a:prstGeom xmlns:a="http://schemas.openxmlformats.org/drawingml/2006/main" prst="rect">
-            <a:avLst/>
-          </a:prstGeom>
-        </p:spPr>
-        <p:txBody>
-          <a:bodyPr xmlns:a="http://schemas.openxmlformats.org/drawingml/2006/main" wrap="square" lIns="0" tIns="0" rIns="0" bIns="0"/>
-          <a:lstStyle xmlns:a="http://schemas.openxmlformats.org/drawingml/2006/main"/>
-          <a:p xmlns:a="http://schemas.openxmlformats.org/drawingml/2006/main">
-            <a:pPr>
-              <a:defRPr sz="1800" b="1">
-                <a:solidFill>
-                  <a:srgbClr val="F4F5F6"/>
-                </a:solidFill>
-                <a:latin typeface="Avenir Next"/>
-                <a:ea typeface="Avenir Next"/>
-                <a:cs typeface="Avenir Next"/>
-              </a:defRPr>
-            </a:pPr>
-            <a:r>
-              <a:t>Speed/agility rises because it is Jordan's biggest blocker.</a:t>
-            </a:r>
-          </a:p>
-        </p:txBody>
-      </p:sp>
-      <p:sp>
-        <p:nvSpPr>
-          <p:cNvPr id="6" name="">
-            <a:extLst xmlns:a="http://schemas.openxmlformats.org/drawingml/2006/main">
-              <a:ext uri="{FF2B5EF4-FFF2-40B4-BE49-F238E27FC236}">
-                <a16:creationId xmlns:a16="http://schemas.microsoft.com/office/drawing/2014/main" id="{8E632229-EBAB-4D17-BD75-5AAFFFBE13E1}"/>
-              </a:ext>
-            </a:extLst>
-          </p:cNvPr>
-          <p:cNvSpPr>
-            <a:spLocks xmlns:a="http://schemas.openxmlformats.org/drawingml/2006/main" noGrp="1"/>
-          </p:cNvSpPr>
-          <p:nvPr/>
-        </p:nvSpPr>
-        <p:spPr>
-          <a:xfrm xmlns:a="http://schemas.openxmlformats.org/drawingml/2006/main">
-            <a:off x="609600" y="5581650"/>
-            <a:ext cx="190500" cy="323850"/>
-          </a:xfrm>
-          <a:prstGeom xmlns:a="http://schemas.openxmlformats.org/drawingml/2006/main" prst="rect">
-            <a:avLst/>
-          </a:prstGeom>
-        </p:spPr>
-        <p:txBody>
-          <a:bodyPr xmlns:a="http://schemas.openxmlformats.org/drawingml/2006/main" wrap="square" lIns="0" tIns="0" rIns="0" bIns="0"/>
-          <a:lstStyle xmlns:a="http://schemas.openxmlformats.org/drawingml/2006/main"/>
-          <a:p xmlns:a="http://schemas.openxmlformats.org/drawingml/2006/main">
-            <a:pPr>
-              <a:defRPr sz="1875" b="1">
-                <a:solidFill>
-                  <a:srgbClr val="4DB6FF"/>
-                </a:solidFill>
-                <a:latin typeface="Avenir Next"/>
-                <a:ea typeface="Avenir Next"/>
-                <a:cs typeface="Avenir Next"/>
-              </a:defRPr>
-            </a:pPr>
-            <a:r>
-              <a:t>-</a:t>
-            </a:r>
-          </a:p>
-        </p:txBody>
-      </p:sp>
-      <p:sp>
-        <p:nvSpPr>
-          <p:cNvPr id="7" name="">
-            <a:extLst xmlns:a="http://schemas.openxmlformats.org/drawingml/2006/main">
-              <a:ext uri="{FF2B5EF4-FFF2-40B4-BE49-F238E27FC236}">
-                <a16:creationId xmlns:a16="http://schemas.microsoft.com/office/drawing/2014/main" id="{31AA1405-FF5C-4105-8E18-875081D67B60}"/>
-              </a:ext>
-            </a:extLst>
-          </p:cNvPr>
-          <p:cNvSpPr>
-            <a:spLocks xmlns:a="http://schemas.openxmlformats.org/drawingml/2006/main" noGrp="1"/>
-          </p:cNvSpPr>
-          <p:nvPr/>
-        </p:nvSpPr>
-        <p:spPr>
-          <a:xfrm xmlns:a="http://schemas.openxmlformats.org/drawingml/2006/main">
-            <a:off x="914400" y="5581650"/>
-            <a:ext cx="5905500" cy="533400"/>
-          </a:xfrm>
-          <a:prstGeom xmlns:a="http://schemas.openxmlformats.org/drawingml/2006/main" prst="rect">
-            <a:avLst/>
-          </a:prstGeom>
-        </p:spPr>
-        <p:txBody>
-          <a:bodyPr xmlns:a="http://schemas.openxmlformats.org/drawingml/2006/main" wrap="square" lIns="0" tIns="0" rIns="0" bIns="0"/>
-          <a:lstStyle xmlns:a="http://schemas.openxmlformats.org/drawingml/2006/main"/>
-          <a:p xmlns:a="http://schemas.openxmlformats.org/drawingml/2006/main">
-            <a:pPr>
-              <a:defRPr sz="1800" b="1">
-                <a:solidFill>
-                  <a:srgbClr val="F4F5F6"/>
-                </a:solidFill>
-                <a:latin typeface="Avenir Next"/>
-                <a:ea typeface="Avenir Next"/>
-                <a:cs typeface="Avenir Next"/>
-              </a:defRPr>
-            </a:pPr>
-            <a:r>
-              <a:t>Focus labels say Passing, First Touch, Speed/Agility.</a:t>
-            </a:r>
-          </a:p>
-        </p:txBody>
-      </p:sp>
-      <p:sp>
-        <p:nvSpPr>
-          <p:cNvPr id="8" name="">
-            <a:extLst xmlns:a="http://schemas.openxmlformats.org/drawingml/2006/main">
-              <a:ext uri="{FF2B5EF4-FFF2-40B4-BE49-F238E27FC236}">
-                <a16:creationId xmlns:a16="http://schemas.microsoft.com/office/drawing/2014/main" id="{2578C397-045F-47B3-BD44-94B7E58D0ED0}"/>
-              </a:ext>
-            </a:extLst>
-          </p:cNvPr>
-          <p:cNvSpPr>
-            <a:spLocks xmlns:a="http://schemas.openxmlformats.org/drawingml/2006/main" noGrp="1"/>
-          </p:cNvSpPr>
-          <p:nvPr/>
-        </p:nvSpPr>
-        <p:spPr>
-          <a:xfrm xmlns:a="http://schemas.openxmlformats.org/drawingml/2006/main">
-            <a:off x="609600" y="6229350"/>
-            <a:ext cx="190500" cy="323850"/>
-          </a:xfrm>
-          <a:prstGeom xmlns:a="http://schemas.openxmlformats.org/drawingml/2006/main" prst="rect">
-            <a:avLst/>
-          </a:prstGeom>
-        </p:spPr>
-        <p:txBody>
-          <a:bodyPr xmlns:a="http://schemas.openxmlformats.org/drawingml/2006/main" wrap="square" lIns="0" tIns="0" rIns="0" bIns="0"/>
-          <a:lstStyle xmlns:a="http://schemas.openxmlformats.org/drawingml/2006/main"/>
-          <a:p xmlns:a="http://schemas.openxmlformats.org/drawingml/2006/main">
-            <a:pPr>
-              <a:defRPr sz="1875" b="1">
-                <a:solidFill>
-                  <a:srgbClr val="4DB6FF"/>
-                </a:solidFill>
-                <a:latin typeface="Avenir Next"/>
-                <a:ea typeface="Avenir Next"/>
-                <a:cs typeface="Avenir Next"/>
-              </a:defRPr>
-            </a:pPr>
-            <a:r>
-              <a:t>-</a:t>
-            </a:r>
-          </a:p>
-        </p:txBody>
-      </p:sp>
-      <p:sp>
-        <p:nvSpPr>
-          <p:cNvPr id="9" name="">
-            <a:extLst xmlns:a="http://schemas.openxmlformats.org/drawingml/2006/main">
-              <a:ext uri="{FF2B5EF4-FFF2-40B4-BE49-F238E27FC236}">
-                <a16:creationId xmlns:a16="http://schemas.microsoft.com/office/drawing/2014/main" id="{B293E851-C8AE-4532-9A00-956C3F189C35}"/>
-              </a:ext>
-            </a:extLst>
-          </p:cNvPr>
-          <p:cNvSpPr>
-            <a:spLocks xmlns:a="http://schemas.openxmlformats.org/drawingml/2006/main" noGrp="1"/>
-          </p:cNvSpPr>
-          <p:nvPr/>
-        </p:nvSpPr>
-        <p:spPr>
-          <a:xfrm xmlns:a="http://schemas.openxmlformats.org/drawingml/2006/main">
-            <a:off x="914400" y="6229350"/>
-            <a:ext cx="5905500" cy="533400"/>
-          </a:xfrm>
-          <a:prstGeom xmlns:a="http://schemas.openxmlformats.org/drawingml/2006/main" prst="rect">
-            <a:avLst/>
-          </a:prstGeom>
-        </p:spPr>
-        <p:txBody>
-          <a:bodyPr xmlns:a="http://schemas.openxmlformats.org/drawingml/2006/main" wrap="square" lIns="0" tIns="0" rIns="0" bIns="0"/>
-          <a:lstStyle xmlns:a="http://schemas.openxmlformats.org/drawingml/2006/main"/>
-          <a:p xmlns:a="http://schemas.openxmlformats.org/drawingml/2006/main">
-            <a:pPr>
-              <a:defRPr sz="1800" b="1">
-                <a:solidFill>
-                  <a:srgbClr val="F4F5F6"/>
-                </a:solidFill>
-                <a:latin typeface="Avenir Next"/>
-                <a:ea typeface="Avenir Next"/>
-                <a:cs typeface="Avenir Next"/>
-              </a:defRPr>
-            </a:pPr>
-            <a:r>
-              <a:t>Regeneration now continues after future completed sessions.</a:t>
-            </a:r>
-          </a:p>
-        </p:txBody>
-      </p:sp>
-      <p:pic>
-        <p:nvPicPr>
-          <p:cNvPr id="10" name=""/>
-          <p:cNvPicPr>
-            <a:picLocks xmlns:a="http://schemas.openxmlformats.org/drawingml/2006/main" noChangeAspect="1"/>
-          </p:cNvPicPr>
-          <p:nvPr/>
-        </p:nvPicPr>
-        <p:blipFill>
-          <a:blip xmlns:r="http://schemas.openxmlformats.org/officeDocument/2006/relationships" xmlns:a="http://schemas.openxmlformats.org/drawingml/2006/main" r:embed="R928d409eaea8485e"/>
-          <a:stretch xmlns:a="http://schemas.openxmlformats.org/drawingml/2006/main"/>
-        </p:blipFill>
-        <p:spPr>
-          <a:xfrm xmlns:a="http://schemas.openxmlformats.org/drawingml/2006/main">
-            <a:off x="7839346" y="704850"/>
-            <a:ext cx="3257008" cy="7048500"/>
-          </a:xfrm>
-          <a:prstGeom xmlns:a="http://schemas.openxmlformats.org/drawingml/2006/main" prst="rect">
-            <a:avLst/>
-          </a:prstGeom>
-        </p:spPr>
-      </p:pic>
+              <a:t>The result: a motivated player can spend months on the wrong work and never know it.</a:t>
+            </a:r>
+          </a:p>
+        </p:txBody>
+      </p:sp>
     </p:spTree>
     <p:extLst>
       <p:ext uri="{BB962C8B-B14F-4D97-AF65-F5344CB8AC3E}">
-        <p14:creationId xmlns:p14="http://schemas.microsoft.com/office/powerpoint/2010/main" val="1748823122"/>
+        <p14:creationId xmlns:p14="http://schemas.microsoft.com/office/powerpoint/2010/main" val="924897069"/>
       </p:ext>
     </p:extLst>
   </p:cSld>
@@ -3438,18 +4751,18 @@
           <p:cNvPr id="1" name="">
             <a:extLst xmlns:a="http://schemas.openxmlformats.org/drawingml/2006/main">
               <a:ext uri="{FF2B5EF4-FFF2-40B4-BE49-F238E27FC236}">
-                <a16:creationId xmlns:a16="http://schemas.microsoft.com/office/drawing/2014/main" id="{B157F064-AB3B-43F9-8594-7656755091D0}"/>
-              </a:ext>
-            </a:extLst>
-          </p:cNvPr>
-          <p:cNvSpPr>
-            <a:spLocks xmlns:a="http://schemas.openxmlformats.org/drawingml/2006/main" noGrp="1"/>
-          </p:cNvSpPr>
-          <p:nvPr/>
-        </p:nvSpPr>
-        <p:spPr>
-          <a:xfrm xmlns:a="http://schemas.openxmlformats.org/drawingml/2006/main">
-            <a:off x="609600" y="1695450"/>
+                <a16:creationId xmlns:a16="http://schemas.microsoft.com/office/drawing/2014/main" id="{5D782E2E-F83C-4B35-915D-820CBD32626B}"/>
+              </a:ext>
+            </a:extLst>
+          </p:cNvPr>
+          <p:cNvSpPr>
+            <a:spLocks xmlns:a="http://schemas.openxmlformats.org/drawingml/2006/main" noGrp="1"/>
+          </p:cNvSpPr>
+          <p:nvPr/>
+        </p:nvSpPr>
+        <p:spPr>
+          <a:xfrm xmlns:a="http://schemas.openxmlformats.org/drawingml/2006/main">
+            <a:off x="609600" y="1419225"/>
             <a:ext cx="9525000" cy="323850"/>
           </a:xfrm>
           <a:prstGeom xmlns:a="http://schemas.openxmlformats.org/drawingml/2006/main" prst="rect">
@@ -3471,7 +4784,7 @@
               </a:defRPr>
             </a:pPr>
             <a:r>
-              <a:t>FEEDBACK</a:t>
+              <a:t>THE VARFOOT SOLUTION</a:t>
             </a:r>
           </a:p>
         </p:txBody>
@@ -3481,19 +4794,19 @@
           <p:cNvPr id="2" name="">
             <a:extLst xmlns:a="http://schemas.openxmlformats.org/drawingml/2006/main">
               <a:ext uri="{FF2B5EF4-FFF2-40B4-BE49-F238E27FC236}">
-                <a16:creationId xmlns:a16="http://schemas.microsoft.com/office/drawing/2014/main" id="{31714136-88BD-427A-898F-265CD18C54AA}"/>
-              </a:ext>
-            </a:extLst>
-          </p:cNvPr>
-          <p:cNvSpPr>
-            <a:spLocks xmlns:a="http://schemas.openxmlformats.org/drawingml/2006/main" noGrp="1"/>
-          </p:cNvSpPr>
-          <p:nvPr/>
-        </p:nvSpPr>
-        <p:spPr>
-          <a:xfrm xmlns:a="http://schemas.openxmlformats.org/drawingml/2006/main">
-            <a:off x="609600" y="2228850"/>
-            <a:ext cx="6477000" cy="1143000"/>
+                <a16:creationId xmlns:a16="http://schemas.microsoft.com/office/drawing/2014/main" id="{5DE93A0B-72AE-4DF8-BDB2-D26931B30C0A}"/>
+              </a:ext>
+            </a:extLst>
+          </p:cNvPr>
+          <p:cNvSpPr>
+            <a:spLocks xmlns:a="http://schemas.openxmlformats.org/drawingml/2006/main" noGrp="1"/>
+          </p:cNvSpPr>
+          <p:nvPr/>
+        </p:nvSpPr>
+        <p:spPr>
+          <a:xfrm xmlns:a="http://schemas.openxmlformats.org/drawingml/2006/main">
+            <a:off x="609600" y="1952625"/>
+            <a:ext cx="7048500" cy="1143000"/>
           </a:xfrm>
           <a:prstGeom xmlns:a="http://schemas.openxmlformats.org/drawingml/2006/main" prst="rect">
             <a:avLst/>
@@ -3514,7 +4827,7 @@
               </a:defRPr>
             </a:pPr>
             <a:r>
-              <a:t>Progress shows evidence, not vibes.</a:t>
+              <a:t>One loop: assess, diagnose, plan, train, fuel, coach.</a:t>
             </a:r>
           </a:p>
         </p:txBody>
@@ -3524,19 +4837,19 @@
           <p:cNvPr id="3" name="">
             <a:extLst xmlns:a="http://schemas.openxmlformats.org/drawingml/2006/main">
               <a:ext uri="{FF2B5EF4-FFF2-40B4-BE49-F238E27FC236}">
-                <a16:creationId xmlns:a16="http://schemas.microsoft.com/office/drawing/2014/main" id="{8120F478-D422-4E4B-AE4C-87C776A46EA3}"/>
-              </a:ext>
-            </a:extLst>
-          </p:cNvPr>
-          <p:cNvSpPr>
-            <a:spLocks xmlns:a="http://schemas.openxmlformats.org/drawingml/2006/main" noGrp="1"/>
-          </p:cNvSpPr>
-          <p:nvPr/>
-        </p:nvSpPr>
-        <p:spPr>
-          <a:xfrm xmlns:a="http://schemas.openxmlformats.org/drawingml/2006/main">
-            <a:off x="609600" y="3581400"/>
-            <a:ext cx="6286500" cy="1143000"/>
+                <a16:creationId xmlns:a16="http://schemas.microsoft.com/office/drawing/2014/main" id="{0143E054-F993-4F38-9999-D24CCEAF16A5}"/>
+              </a:ext>
+            </a:extLst>
+          </p:cNvPr>
+          <p:cNvSpPr>
+            <a:spLocks xmlns:a="http://schemas.openxmlformats.org/drawingml/2006/main" noGrp="1"/>
+          </p:cNvSpPr>
+          <p:nvPr/>
+        </p:nvSpPr>
+        <p:spPr>
+          <a:xfrm xmlns:a="http://schemas.openxmlformats.org/drawingml/2006/main">
+            <a:off x="609600" y="3305175"/>
+            <a:ext cx="6858000" cy="1047750"/>
           </a:xfrm>
           <a:prstGeom xmlns:a="http://schemas.openxmlformats.org/drawingml/2006/main" prst="rect">
             <a:avLst/>
@@ -3557,7 +4870,7 @@
               </a:defRPr>
             </a:pPr>
             <a:r>
-              <a:t>Jordan can see history, a skill radar, weakest-first gaps, and which drills have already reached varsity level.</a:t>
+              <a:t>VarFoot turns the goal into a repeatable system the player can run without waiting for a coach to personalize every session.</a:t>
             </a:r>
           </a:p>
         </p:txBody>
@@ -3567,18 +4880,18 @@
           <p:cNvPr id="4" name="">
             <a:extLst xmlns:a="http://schemas.openxmlformats.org/drawingml/2006/main">
               <a:ext uri="{FF2B5EF4-FFF2-40B4-BE49-F238E27FC236}">
-                <a16:creationId xmlns:a16="http://schemas.microsoft.com/office/drawing/2014/main" id="{D420E05B-EDC1-4F72-8883-A4E49CC6386B}"/>
-              </a:ext>
-            </a:extLst>
-          </p:cNvPr>
-          <p:cNvSpPr>
-            <a:spLocks xmlns:a="http://schemas.openxmlformats.org/drawingml/2006/main" noGrp="1"/>
-          </p:cNvSpPr>
-          <p:nvPr/>
-        </p:nvSpPr>
-        <p:spPr>
-          <a:xfrm xmlns:a="http://schemas.openxmlformats.org/drawingml/2006/main">
-            <a:off x="609600" y="4933950"/>
+                <a16:creationId xmlns:a16="http://schemas.microsoft.com/office/drawing/2014/main" id="{A6DF8F72-4E2D-4F80-801D-DA5B62C397E6}"/>
+              </a:ext>
+            </a:extLst>
+          </p:cNvPr>
+          <p:cNvSpPr>
+            <a:spLocks xmlns:a="http://schemas.openxmlformats.org/drawingml/2006/main" noGrp="1"/>
+          </p:cNvSpPr>
+          <p:nvPr/>
+        </p:nvSpPr>
+        <p:spPr>
+          <a:xfrm xmlns:a="http://schemas.openxmlformats.org/drawingml/2006/main">
+            <a:off x="609600" y="4562475"/>
             <a:ext cx="190500" cy="323850"/>
           </a:xfrm>
           <a:prstGeom xmlns:a="http://schemas.openxmlformats.org/drawingml/2006/main" prst="rect">
@@ -3610,19 +4923,19 @@
           <p:cNvPr id="5" name="">
             <a:extLst xmlns:a="http://schemas.openxmlformats.org/drawingml/2006/main">
               <a:ext uri="{FF2B5EF4-FFF2-40B4-BE49-F238E27FC236}">
-                <a16:creationId xmlns:a16="http://schemas.microsoft.com/office/drawing/2014/main" id="{510F6D8B-01C5-4F46-83C4-940194F38791}"/>
-              </a:ext>
-            </a:extLst>
-          </p:cNvPr>
-          <p:cNvSpPr>
-            <a:spLocks xmlns:a="http://schemas.openxmlformats.org/drawingml/2006/main" noGrp="1"/>
-          </p:cNvSpPr>
-          <p:nvPr/>
-        </p:nvSpPr>
-        <p:spPr>
-          <a:xfrm xmlns:a="http://schemas.openxmlformats.org/drawingml/2006/main">
-            <a:off x="914400" y="4933950"/>
-            <a:ext cx="5905500" cy="533400"/>
+                <a16:creationId xmlns:a16="http://schemas.microsoft.com/office/drawing/2014/main" id="{0641F677-3C9C-4B08-B6B4-2673F6DD25AB}"/>
+              </a:ext>
+            </a:extLst>
+          </p:cNvPr>
+          <p:cNvSpPr>
+            <a:spLocks xmlns:a="http://schemas.openxmlformats.org/drawingml/2006/main" noGrp="1"/>
+          </p:cNvSpPr>
+          <p:nvPr/>
+        </p:nvSpPr>
+        <p:spPr>
+          <a:xfrm xmlns:a="http://schemas.openxmlformats.org/drawingml/2006/main">
+            <a:off x="914400" y="4562475"/>
+            <a:ext cx="6572250" cy="533400"/>
           </a:xfrm>
           <a:prstGeom xmlns:a="http://schemas.openxmlformats.org/drawingml/2006/main" prst="rect">
             <a:avLst/>
@@ -3643,7 +4956,7 @@
               </a:defRPr>
             </a:pPr>
             <a:r>
-              <a:t>Score trend for the improvement story.</a:t>
+              <a:t>Assessment across technical, physical, speed, recovery, and fueling.</a:t>
             </a:r>
           </a:p>
         </p:txBody>
@@ -3653,18 +4966,18 @@
           <p:cNvPr id="6" name="">
             <a:extLst xmlns:a="http://schemas.openxmlformats.org/drawingml/2006/main">
               <a:ext uri="{FF2B5EF4-FFF2-40B4-BE49-F238E27FC236}">
-                <a16:creationId xmlns:a16="http://schemas.microsoft.com/office/drawing/2014/main" id="{3C03FCFC-E613-420E-8A18-DDCD41F31DDD}"/>
-              </a:ext>
-            </a:extLst>
-          </p:cNvPr>
-          <p:cNvSpPr>
-            <a:spLocks xmlns:a="http://schemas.openxmlformats.org/drawingml/2006/main" noGrp="1"/>
-          </p:cNvSpPr>
-          <p:nvPr/>
-        </p:nvSpPr>
-        <p:spPr>
-          <a:xfrm xmlns:a="http://schemas.openxmlformats.org/drawingml/2006/main">
-            <a:off x="609600" y="5581650"/>
+                <a16:creationId xmlns:a16="http://schemas.microsoft.com/office/drawing/2014/main" id="{795DD30A-D3FF-42FE-939F-14C39D313716}"/>
+              </a:ext>
+            </a:extLst>
+          </p:cNvPr>
+          <p:cNvSpPr>
+            <a:spLocks xmlns:a="http://schemas.openxmlformats.org/drawingml/2006/main" noGrp="1"/>
+          </p:cNvSpPr>
+          <p:nvPr/>
+        </p:nvSpPr>
+        <p:spPr>
+          <a:xfrm xmlns:a="http://schemas.openxmlformats.org/drawingml/2006/main">
+            <a:off x="609600" y="5210175"/>
             <a:ext cx="190500" cy="323850"/>
           </a:xfrm>
           <a:prstGeom xmlns:a="http://schemas.openxmlformats.org/drawingml/2006/main" prst="rect">
@@ -3696,19 +5009,19 @@
           <p:cNvPr id="7" name="">
             <a:extLst xmlns:a="http://schemas.openxmlformats.org/drawingml/2006/main">
               <a:ext uri="{FF2B5EF4-FFF2-40B4-BE49-F238E27FC236}">
-                <a16:creationId xmlns:a16="http://schemas.microsoft.com/office/drawing/2014/main" id="{000F7430-DC02-43E7-AD15-049622FE76D3}"/>
-              </a:ext>
-            </a:extLst>
-          </p:cNvPr>
-          <p:cNvSpPr>
-            <a:spLocks xmlns:a="http://schemas.openxmlformats.org/drawingml/2006/main" noGrp="1"/>
-          </p:cNvSpPr>
-          <p:nvPr/>
-        </p:nvSpPr>
-        <p:spPr>
-          <a:xfrm xmlns:a="http://schemas.openxmlformats.org/drawingml/2006/main">
-            <a:off x="914400" y="5581650"/>
-            <a:ext cx="5905500" cy="533400"/>
+                <a16:creationId xmlns:a16="http://schemas.microsoft.com/office/drawing/2014/main" id="{2583AF4E-A5F1-40EE-94D8-37AAD2F66408}"/>
+              </a:ext>
+            </a:extLst>
+          </p:cNvPr>
+          <p:cNvSpPr>
+            <a:spLocks xmlns:a="http://schemas.openxmlformats.org/drawingml/2006/main" noGrp="1"/>
+          </p:cNvSpPr>
+          <p:nvPr/>
+        </p:nvSpPr>
+        <p:spPr>
+          <a:xfrm xmlns:a="http://schemas.openxmlformats.org/drawingml/2006/main">
+            <a:off x="914400" y="5210175"/>
+            <a:ext cx="6572250" cy="533400"/>
           </a:xfrm>
           <a:prstGeom xmlns:a="http://schemas.openxmlformats.org/drawingml/2006/main" prst="rect">
             <a:avLst/>
@@ -3729,7 +5042,7 @@
               </a:defRPr>
             </a:pPr>
             <a:r>
-              <a:t>Radar for skill balance.</a:t>
+              <a:t>Weakness diagnosis: every drill ranked weakest-first.</a:t>
             </a:r>
           </a:p>
         </p:txBody>
@@ -3739,18 +5052,18 @@
           <p:cNvPr id="8" name="">
             <a:extLst xmlns:a="http://schemas.openxmlformats.org/drawingml/2006/main">
               <a:ext uri="{FF2B5EF4-FFF2-40B4-BE49-F238E27FC236}">
-                <a16:creationId xmlns:a16="http://schemas.microsoft.com/office/drawing/2014/main" id="{B5717299-5C51-4136-81B3-42D10CC4DD94}"/>
-              </a:ext>
-            </a:extLst>
-          </p:cNvPr>
-          <p:cNvSpPr>
-            <a:spLocks xmlns:a="http://schemas.openxmlformats.org/drawingml/2006/main" noGrp="1"/>
-          </p:cNvSpPr>
-          <p:nvPr/>
-        </p:nvSpPr>
-        <p:spPr>
-          <a:xfrm xmlns:a="http://schemas.openxmlformats.org/drawingml/2006/main">
-            <a:off x="609600" y="6229350"/>
+                <a16:creationId xmlns:a16="http://schemas.microsoft.com/office/drawing/2014/main" id="{53707C06-5A1F-4EFE-8C49-71C9BAAD1EA0}"/>
+              </a:ext>
+            </a:extLst>
+          </p:cNvPr>
+          <p:cNvSpPr>
+            <a:spLocks xmlns:a="http://schemas.openxmlformats.org/drawingml/2006/main" noGrp="1"/>
+          </p:cNvSpPr>
+          <p:nvPr/>
+        </p:nvSpPr>
+        <p:spPr>
+          <a:xfrm xmlns:a="http://schemas.openxmlformats.org/drawingml/2006/main">
+            <a:off x="609600" y="5857875"/>
             <a:ext cx="190500" cy="323850"/>
           </a:xfrm>
           <a:prstGeom xmlns:a="http://schemas.openxmlformats.org/drawingml/2006/main" prst="rect">
@@ -3782,19 +5095,19 @@
           <p:cNvPr id="9" name="">
             <a:extLst xmlns:a="http://schemas.openxmlformats.org/drawingml/2006/main">
               <a:ext uri="{FF2B5EF4-FFF2-40B4-BE49-F238E27FC236}">
-                <a16:creationId xmlns:a16="http://schemas.microsoft.com/office/drawing/2014/main" id="{FDA3A2FE-0432-438B-BAB7-FC04F8203EFC}"/>
-              </a:ext>
-            </a:extLst>
-          </p:cNvPr>
-          <p:cNvSpPr>
-            <a:spLocks xmlns:a="http://schemas.openxmlformats.org/drawingml/2006/main" noGrp="1"/>
-          </p:cNvSpPr>
-          <p:nvPr/>
-        </p:nvSpPr>
-        <p:spPr>
-          <a:xfrm xmlns:a="http://schemas.openxmlformats.org/drawingml/2006/main">
-            <a:off x="914400" y="6229350"/>
-            <a:ext cx="5905500" cy="533400"/>
+                <a16:creationId xmlns:a16="http://schemas.microsoft.com/office/drawing/2014/main" id="{20316553-3A8F-492A-99C8-12FDE31CF5D4}"/>
+              </a:ext>
+            </a:extLst>
+          </p:cNvPr>
+          <p:cNvSpPr>
+            <a:spLocks xmlns:a="http://schemas.openxmlformats.org/drawingml/2006/main" noGrp="1"/>
+          </p:cNvSpPr>
+          <p:nvPr/>
+        </p:nvSpPr>
+        <p:spPr>
+          <a:xfrm xmlns:a="http://schemas.openxmlformats.org/drawingml/2006/main">
+            <a:off x="914400" y="5857875"/>
+            <a:ext cx="6572250" cy="533400"/>
           </a:xfrm>
           <a:prstGeom xmlns:a="http://schemas.openxmlformats.org/drawingml/2006/main" prst="rect">
             <a:avLst/>
@@ -3815,27 +5128,135 @@
               </a:defRPr>
             </a:pPr>
             <a:r>
-              <a:t>Filters that keep the weakest-first list scannable.</a:t>
+              <a:t>Personalized roadmap built from real gaps and the tryout date.</a:t>
+            </a:r>
+          </a:p>
+        </p:txBody>
+      </p:sp>
+      <p:sp>
+        <p:nvSpPr>
+          <p:cNvPr id="10" name="">
+            <a:extLst xmlns:a="http://schemas.openxmlformats.org/drawingml/2006/main">
+              <a:ext uri="{FF2B5EF4-FFF2-40B4-BE49-F238E27FC236}">
+                <a16:creationId xmlns:a16="http://schemas.microsoft.com/office/drawing/2014/main" id="{14012B40-6D87-410F-AD15-7F64C41FA6B5}"/>
+              </a:ext>
+            </a:extLst>
+          </p:cNvPr>
+          <p:cNvSpPr>
+            <a:spLocks xmlns:a="http://schemas.openxmlformats.org/drawingml/2006/main" noGrp="1"/>
+          </p:cNvSpPr>
+          <p:nvPr/>
+        </p:nvSpPr>
+        <p:spPr>
+          <a:xfrm xmlns:a="http://schemas.openxmlformats.org/drawingml/2006/main">
+            <a:off x="609600" y="6505575"/>
+            <a:ext cx="190500" cy="323850"/>
+          </a:xfrm>
+          <a:prstGeom xmlns:a="http://schemas.openxmlformats.org/drawingml/2006/main" prst="rect">
+            <a:avLst/>
+          </a:prstGeom>
+        </p:spPr>
+        <p:txBody>
+          <a:bodyPr xmlns:a="http://schemas.openxmlformats.org/drawingml/2006/main" wrap="square" lIns="0" tIns="0" rIns="0" bIns="0"/>
+          <a:lstStyle xmlns:a="http://schemas.openxmlformats.org/drawingml/2006/main"/>
+          <a:p xmlns:a="http://schemas.openxmlformats.org/drawingml/2006/main">
+            <a:pPr>
+              <a:defRPr sz="1875" b="1">
+                <a:solidFill>
+                  <a:srgbClr val="39FF73"/>
+                </a:solidFill>
+                <a:latin typeface="Avenir Next"/>
+                <a:ea typeface="Avenir Next"/>
+                <a:cs typeface="Avenir Next"/>
+              </a:defRPr>
+            </a:pPr>
+            <a:r>
+              <a:t>-</a:t>
+            </a:r>
+          </a:p>
+        </p:txBody>
+      </p:sp>
+      <p:sp>
+        <p:nvSpPr>
+          <p:cNvPr id="11" name="">
+            <a:extLst xmlns:a="http://schemas.openxmlformats.org/drawingml/2006/main">
+              <a:ext uri="{FF2B5EF4-FFF2-40B4-BE49-F238E27FC236}">
+                <a16:creationId xmlns:a16="http://schemas.microsoft.com/office/drawing/2014/main" id="{EEA07AFA-335E-4402-84AC-7DC976D7FC51}"/>
+              </a:ext>
+            </a:extLst>
+          </p:cNvPr>
+          <p:cNvSpPr>
+            <a:spLocks xmlns:a="http://schemas.openxmlformats.org/drawingml/2006/main" noGrp="1"/>
+          </p:cNvSpPr>
+          <p:nvPr/>
+        </p:nvSpPr>
+        <p:spPr>
+          <a:xfrm xmlns:a="http://schemas.openxmlformats.org/drawingml/2006/main">
+            <a:off x="914400" y="6505575"/>
+            <a:ext cx="6572250" cy="533400"/>
+          </a:xfrm>
+          <a:prstGeom xmlns:a="http://schemas.openxmlformats.org/drawingml/2006/main" prst="rect">
+            <a:avLst/>
+          </a:prstGeom>
+        </p:spPr>
+        <p:txBody>
+          <a:bodyPr xmlns:a="http://schemas.openxmlformats.org/drawingml/2006/main" wrap="square" lIns="0" tIns="0" rIns="0" bIns="0"/>
+          <a:lstStyle xmlns:a="http://schemas.openxmlformats.org/drawingml/2006/main"/>
+          <a:p xmlns:a="http://schemas.openxmlformats.org/drawingml/2006/main">
+            <a:pPr>
+              <a:defRPr sz="1800" b="1">
+                <a:solidFill>
+                  <a:srgbClr val="F4F5F6"/>
+                </a:solidFill>
+                <a:latin typeface="Avenir Next"/>
+                <a:ea typeface="Avenir Next"/>
+                <a:cs typeface="Avenir Next"/>
+              </a:defRPr>
+            </a:pPr>
+            <a:r>
+              <a:t>Daily sessions, fuel support, and a grounded AI coach.</a:t>
             </a:r>
           </a:p>
         </p:txBody>
       </p:sp>
       <p:pic>
         <p:nvPicPr>
-          <p:cNvPr id="10" name=""/>
+          <p:cNvPr id="12" name=""/>
           <p:cNvPicPr>
             <a:picLocks xmlns:a="http://schemas.openxmlformats.org/drawingml/2006/main" noChangeAspect="1"/>
           </p:cNvPicPr>
           <p:nvPr/>
         </p:nvPicPr>
         <p:blipFill>
-          <a:blip xmlns:r="http://schemas.openxmlformats.org/officeDocument/2006/relationships" xmlns:a="http://schemas.openxmlformats.org/drawingml/2006/main" r:embed="Rb93e4b3ac3c546c3"/>
+          <a:blip xmlns:r="http://schemas.openxmlformats.org/officeDocument/2006/relationships" xmlns:a="http://schemas.openxmlformats.org/drawingml/2006/main" r:embed="R6eae3653e901484f"/>
           <a:stretch xmlns:a="http://schemas.openxmlformats.org/drawingml/2006/main"/>
         </p:blipFill>
         <p:spPr>
           <a:xfrm xmlns:a="http://schemas.openxmlformats.org/drawingml/2006/main">
-            <a:off x="7953646" y="704850"/>
-            <a:ext cx="3257008" cy="7048500"/>
+            <a:off x="8528441" y="1371600"/>
+            <a:ext cx="2640818" cy="5715000"/>
+          </a:xfrm>
+          <a:prstGeom xmlns:a="http://schemas.openxmlformats.org/drawingml/2006/main" prst="rect">
+            <a:avLst/>
+          </a:prstGeom>
+        </p:spPr>
+      </p:pic>
+      <p:pic>
+        <p:nvPicPr>
+          <p:cNvPr id="13" name=""/>
+          <p:cNvPicPr>
+            <a:picLocks xmlns:a="http://schemas.openxmlformats.org/drawingml/2006/main" noChangeAspect="1"/>
+          </p:cNvPicPr>
+          <p:nvPr/>
+        </p:nvPicPr>
+        <p:blipFill>
+          <a:blip xmlns:r="http://schemas.openxmlformats.org/officeDocument/2006/relationships" xmlns:a="http://schemas.openxmlformats.org/drawingml/2006/main" r:embed="Rc32f5958059e431e"/>
+          <a:stretch xmlns:a="http://schemas.openxmlformats.org/drawingml/2006/main"/>
+        </p:blipFill>
+        <p:spPr>
+          <a:xfrm xmlns:a="http://schemas.openxmlformats.org/drawingml/2006/main">
+            <a:off x="11462141" y="1371600"/>
+            <a:ext cx="2640818" cy="5715000"/>
           </a:xfrm>
           <a:prstGeom xmlns:a="http://schemas.openxmlformats.org/drawingml/2006/main" prst="rect">
             <a:avLst/>
@@ -3845,7 +5266,7 @@
     </p:spTree>
     <p:extLst>
       <p:ext uri="{BB962C8B-B14F-4D97-AF65-F5344CB8AC3E}">
-        <p14:creationId xmlns:p14="http://schemas.microsoft.com/office/powerpoint/2010/main" val="198187190"/>
+        <p14:creationId xmlns:p14="http://schemas.microsoft.com/office/powerpoint/2010/main" val="817555451"/>
       </p:ext>
     </p:extLst>
   </p:cSld>
@@ -3876,18 +5297,18 @@
           <p:cNvPr id="1" name="">
             <a:extLst xmlns:a="http://schemas.openxmlformats.org/drawingml/2006/main">
               <a:ext uri="{FF2B5EF4-FFF2-40B4-BE49-F238E27FC236}">
-                <a16:creationId xmlns:a16="http://schemas.microsoft.com/office/drawing/2014/main" id="{3ACF13E7-04ED-4755-AA38-37A623157FA2}"/>
-              </a:ext>
-            </a:extLst>
-          </p:cNvPr>
-          <p:cNvSpPr>
-            <a:spLocks xmlns:a="http://schemas.openxmlformats.org/drawingml/2006/main" noGrp="1"/>
-          </p:cNvSpPr>
-          <p:nvPr/>
-        </p:nvSpPr>
-        <p:spPr>
-          <a:xfrm xmlns:a="http://schemas.openxmlformats.org/drawingml/2006/main">
-            <a:off x="609600" y="1647825"/>
+                <a16:creationId xmlns:a16="http://schemas.microsoft.com/office/drawing/2014/main" id="{DE05E988-6D29-4D8F-BF89-14FD3D97684C}"/>
+              </a:ext>
+            </a:extLst>
+          </p:cNvPr>
+          <p:cNvSpPr>
+            <a:spLocks xmlns:a="http://schemas.openxmlformats.org/drawingml/2006/main" noGrp="1"/>
+          </p:cNvSpPr>
+          <p:nvPr/>
+        </p:nvSpPr>
+        <p:spPr>
+          <a:xfrm xmlns:a="http://schemas.openxmlformats.org/drawingml/2006/main">
+            <a:off x="609600" y="1419225"/>
             <a:ext cx="9525000" cy="323850"/>
           </a:xfrm>
           <a:prstGeom xmlns:a="http://schemas.openxmlformats.org/drawingml/2006/main" prst="rect">
@@ -3901,15 +5322,15 @@
             <a:pPr>
               <a:defRPr sz="1350" b="1">
                 <a:solidFill>
-                  <a:srgbClr val="FFD23F"/>
-                </a:solidFill>
-                <a:latin typeface="Avenir Next"/>
-                <a:ea typeface="Avenir Next"/>
-                <a:cs typeface="Avenir Next"/>
-              </a:defRPr>
-            </a:pPr>
-            <a:r>
-              <a:t>SAFETY</a:t>
+                  <a:srgbClr val="4DB6FF"/>
+                </a:solidFill>
+                <a:latin typeface="Avenir Next"/>
+                <a:ea typeface="Avenir Next"/>
+                <a:cs typeface="Avenir Next"/>
+              </a:defRPr>
+            </a:pPr>
+            <a:r>
+              <a:t>DEMO FLOW</a:t>
             </a:r>
           </a:p>
         </p:txBody>
@@ -3919,18 +5340,18 @@
           <p:cNvPr id="2" name="">
             <a:extLst xmlns:a="http://schemas.openxmlformats.org/drawingml/2006/main">
               <a:ext uri="{FF2B5EF4-FFF2-40B4-BE49-F238E27FC236}">
-                <a16:creationId xmlns:a16="http://schemas.microsoft.com/office/drawing/2014/main" id="{2945F711-644A-4A23-8EB1-46BA05476DED}"/>
-              </a:ext>
-            </a:extLst>
-          </p:cNvPr>
-          <p:cNvSpPr>
-            <a:spLocks xmlns:a="http://schemas.openxmlformats.org/drawingml/2006/main" noGrp="1"/>
-          </p:cNvSpPr>
-          <p:nvPr/>
-        </p:nvSpPr>
-        <p:spPr>
-          <a:xfrm xmlns:a="http://schemas.openxmlformats.org/drawingml/2006/main">
-            <a:off x="609600" y="2181225"/>
+                <a16:creationId xmlns:a16="http://schemas.microsoft.com/office/drawing/2014/main" id="{E5FD8491-3BA3-4617-AE82-A07844BE793A}"/>
+              </a:ext>
+            </a:extLst>
+          </p:cNvPr>
+          <p:cNvSpPr>
+            <a:spLocks xmlns:a="http://schemas.openxmlformats.org/drawingml/2006/main" noGrp="1"/>
+          </p:cNvSpPr>
+          <p:nvPr/>
+        </p:nvSpPr>
+        <p:spPr>
+          <a:xfrm xmlns:a="http://schemas.openxmlformats.org/drawingml/2006/main">
+            <a:off x="609600" y="1952625"/>
             <a:ext cx="6572250" cy="1143000"/>
           </a:xfrm>
           <a:prstGeom xmlns:a="http://schemas.openxmlformats.org/drawingml/2006/main" prst="rect">
@@ -3952,7 +5373,7 @@
               </a:defRPr>
             </a:pPr>
             <a:r>
-              <a:t>Fueling is useful, but careful because Jordan is a minor.</a:t>
+              <a:t>Click Explore demo athlete — it loads my profile.</a:t>
             </a:r>
           </a:p>
         </p:txBody>
@@ -3962,19 +5383,19 @@
           <p:cNvPr id="3" name="">
             <a:extLst xmlns:a="http://schemas.openxmlformats.org/drawingml/2006/main">
               <a:ext uri="{FF2B5EF4-FFF2-40B4-BE49-F238E27FC236}">
-                <a16:creationId xmlns:a16="http://schemas.microsoft.com/office/drawing/2014/main" id="{87CCBB6A-4DCF-48F2-AD01-55D882503856}"/>
-              </a:ext>
-            </a:extLst>
-          </p:cNvPr>
-          <p:cNvSpPr>
-            <a:spLocks xmlns:a="http://schemas.openxmlformats.org/drawingml/2006/main" noGrp="1"/>
-          </p:cNvSpPr>
-          <p:nvPr/>
-        </p:nvSpPr>
-        <p:spPr>
-          <a:xfrm xmlns:a="http://schemas.openxmlformats.org/drawingml/2006/main">
-            <a:off x="609600" y="3533775"/>
-            <a:ext cx="6381750" cy="1238250"/>
+                <a16:creationId xmlns:a16="http://schemas.microsoft.com/office/drawing/2014/main" id="{F6719AFB-BF5E-40C7-91E2-CA59E17F6AED}"/>
+              </a:ext>
+            </a:extLst>
+          </p:cNvPr>
+          <p:cNvSpPr>
+            <a:spLocks xmlns:a="http://schemas.openxmlformats.org/drawingml/2006/main" noGrp="1"/>
+          </p:cNvSpPr>
+          <p:nvPr/>
+        </p:nvSpPr>
+        <p:spPr>
+          <a:xfrm xmlns:a="http://schemas.openxmlformats.org/drawingml/2006/main">
+            <a:off x="609600" y="3305175"/>
+            <a:ext cx="6381750" cy="1047750"/>
           </a:xfrm>
           <a:prstGeom xmlns:a="http://schemas.openxmlformats.org/drawingml/2006/main" prst="rect">
             <a:avLst/>
@@ -3995,7 +5416,7 @@
               </a:defRPr>
             </a:pPr>
             <a:r>
-              <a:t>The Fuel tab uses USDA FoodData Central for real food data. Targets are planning estimates, not medical prescriptions.</a:t>
+              <a:t>Judges see the app populated as Sansar, an incoming freshman chasing varsity, with no onboarding required.</a:t>
             </a:r>
           </a:p>
         </p:txBody>
@@ -4005,18 +5426,18 @@
           <p:cNvPr id="4" name="">
             <a:extLst xmlns:a="http://schemas.openxmlformats.org/drawingml/2006/main">
               <a:ext uri="{FF2B5EF4-FFF2-40B4-BE49-F238E27FC236}">
-                <a16:creationId xmlns:a16="http://schemas.microsoft.com/office/drawing/2014/main" id="{59042556-3C27-423F-BE79-6C69389B9B8C}"/>
-              </a:ext>
-            </a:extLst>
-          </p:cNvPr>
-          <p:cNvSpPr>
-            <a:spLocks xmlns:a="http://schemas.openxmlformats.org/drawingml/2006/main" noGrp="1"/>
-          </p:cNvSpPr>
-          <p:nvPr/>
-        </p:nvSpPr>
-        <p:spPr>
-          <a:xfrm xmlns:a="http://schemas.openxmlformats.org/drawingml/2006/main">
-            <a:off x="609600" y="4981575"/>
+                <a16:creationId xmlns:a16="http://schemas.microsoft.com/office/drawing/2014/main" id="{F8D81020-F774-458D-8F31-5EE3F4526CA5}"/>
+              </a:ext>
+            </a:extLst>
+          </p:cNvPr>
+          <p:cNvSpPr>
+            <a:spLocks xmlns:a="http://schemas.openxmlformats.org/drawingml/2006/main" noGrp="1"/>
+          </p:cNvSpPr>
+          <p:nvPr/>
+        </p:nvSpPr>
+        <p:spPr>
+          <a:xfrm xmlns:a="http://schemas.openxmlformats.org/drawingml/2006/main">
+            <a:off x="609600" y="4562475"/>
             <a:ext cx="190500" cy="323850"/>
           </a:xfrm>
           <a:prstGeom xmlns:a="http://schemas.openxmlformats.org/drawingml/2006/main" prst="rect">
@@ -4030,7 +5451,7 @@
             <a:pPr>
               <a:defRPr sz="1875" b="1">
                 <a:solidFill>
-                  <a:srgbClr val="FFD23F"/>
+                  <a:srgbClr val="4DB6FF"/>
                 </a:solidFill>
                 <a:latin typeface="Avenir Next"/>
                 <a:ea typeface="Avenir Next"/>
@@ -4048,18 +5469,18 @@
           <p:cNvPr id="5" name="">
             <a:extLst xmlns:a="http://schemas.openxmlformats.org/drawingml/2006/main">
               <a:ext uri="{FF2B5EF4-FFF2-40B4-BE49-F238E27FC236}">
-                <a16:creationId xmlns:a16="http://schemas.microsoft.com/office/drawing/2014/main" id="{F82DF3A3-BE1E-4402-BD0E-E0D96751F04D}"/>
-              </a:ext>
-            </a:extLst>
-          </p:cNvPr>
-          <p:cNvSpPr>
-            <a:spLocks xmlns:a="http://schemas.openxmlformats.org/drawingml/2006/main" noGrp="1"/>
-          </p:cNvSpPr>
-          <p:nvPr/>
-        </p:nvSpPr>
-        <p:spPr>
-          <a:xfrm xmlns:a="http://schemas.openxmlformats.org/drawingml/2006/main">
-            <a:off x="914400" y="4981575"/>
+                <a16:creationId xmlns:a16="http://schemas.microsoft.com/office/drawing/2014/main" id="{C6C65D60-076B-4015-92FB-3A76AED5105A}"/>
+              </a:ext>
+            </a:extLst>
+          </p:cNvPr>
+          <p:cNvSpPr>
+            <a:spLocks xmlns:a="http://schemas.openxmlformats.org/drawingml/2006/main" noGrp="1"/>
+          </p:cNvSpPr>
+          <p:nvPr/>
+        </p:nvSpPr>
+        <p:spPr>
+          <a:xfrm xmlns:a="http://schemas.openxmlformats.org/drawingml/2006/main">
+            <a:off x="914400" y="4562475"/>
             <a:ext cx="6096000" cy="533400"/>
           </a:xfrm>
           <a:prstGeom xmlns:a="http://schemas.openxmlformats.org/drawingml/2006/main" prst="rect">
@@ -4081,7 +5502,7 @@
               </a:defRPr>
             </a:pPr>
             <a:r>
-              <a:t>Protein uses about 1.5 g/kg/day instead of a high calorie percentage.</a:t>
+              <a:t>Onboarding / assessment baseline.</a:t>
             </a:r>
           </a:p>
         </p:txBody>
@@ -4091,18 +5512,18 @@
           <p:cNvPr id="6" name="">
             <a:extLst xmlns:a="http://schemas.openxmlformats.org/drawingml/2006/main">
               <a:ext uri="{FF2B5EF4-FFF2-40B4-BE49-F238E27FC236}">
-                <a16:creationId xmlns:a16="http://schemas.microsoft.com/office/drawing/2014/main" id="{423CEA6B-F89C-43CC-A634-B90EF81A3FDC}"/>
-              </a:ext>
-            </a:extLst>
-          </p:cNvPr>
-          <p:cNvSpPr>
-            <a:spLocks xmlns:a="http://schemas.openxmlformats.org/drawingml/2006/main" noGrp="1"/>
-          </p:cNvSpPr>
-          <p:nvPr/>
-        </p:nvSpPr>
-        <p:spPr>
-          <a:xfrm xmlns:a="http://schemas.openxmlformats.org/drawingml/2006/main">
-            <a:off x="609600" y="5629275"/>
+                <a16:creationId xmlns:a16="http://schemas.microsoft.com/office/drawing/2014/main" id="{8E3B729A-9F6D-4177-A2CB-074FD764A41F}"/>
+              </a:ext>
+            </a:extLst>
+          </p:cNvPr>
+          <p:cNvSpPr>
+            <a:spLocks xmlns:a="http://schemas.openxmlformats.org/drawingml/2006/main" noGrp="1"/>
+          </p:cNvSpPr>
+          <p:nvPr/>
+        </p:nvSpPr>
+        <p:spPr>
+          <a:xfrm xmlns:a="http://schemas.openxmlformats.org/drawingml/2006/main">
+            <a:off x="609600" y="5210175"/>
             <a:ext cx="190500" cy="323850"/>
           </a:xfrm>
           <a:prstGeom xmlns:a="http://schemas.openxmlformats.org/drawingml/2006/main" prst="rect">
@@ -4116,7 +5537,7 @@
             <a:pPr>
               <a:defRPr sz="1875" b="1">
                 <a:solidFill>
-                  <a:srgbClr val="FFD23F"/>
+                  <a:srgbClr val="4DB6FF"/>
                 </a:solidFill>
                 <a:latin typeface="Avenir Next"/>
                 <a:ea typeface="Avenir Next"/>
@@ -4134,18 +5555,18 @@
           <p:cNvPr id="7" name="">
             <a:extLst xmlns:a="http://schemas.openxmlformats.org/drawingml/2006/main">
               <a:ext uri="{FF2B5EF4-FFF2-40B4-BE49-F238E27FC236}">
-                <a16:creationId xmlns:a16="http://schemas.microsoft.com/office/drawing/2014/main" id="{44E37BBE-250B-41C6-A42C-C765014A9360}"/>
-              </a:ext>
-            </a:extLst>
-          </p:cNvPr>
-          <p:cNvSpPr>
-            <a:spLocks xmlns:a="http://schemas.openxmlformats.org/drawingml/2006/main" noGrp="1"/>
-          </p:cNvSpPr>
-          <p:nvPr/>
-        </p:nvSpPr>
-        <p:spPr>
-          <a:xfrm xmlns:a="http://schemas.openxmlformats.org/drawingml/2006/main">
-            <a:off x="914400" y="5629275"/>
+                <a16:creationId xmlns:a16="http://schemas.microsoft.com/office/drawing/2014/main" id="{FD3A2943-C0AD-45F1-AFD5-073AA7414E55}"/>
+              </a:ext>
+            </a:extLst>
+          </p:cNvPr>
+          <p:cNvSpPr>
+            <a:spLocks xmlns:a="http://schemas.openxmlformats.org/drawingml/2006/main" noGrp="1"/>
+          </p:cNvSpPr>
+          <p:nvPr/>
+        </p:nvSpPr>
+        <p:spPr>
+          <a:xfrm xmlns:a="http://schemas.openxmlformats.org/drawingml/2006/main">
+            <a:off x="914400" y="5210175"/>
             <a:ext cx="6096000" cy="533400"/>
           </a:xfrm>
           <a:prstGeom xmlns:a="http://schemas.openxmlformats.org/drawingml/2006/main" prst="rect">
@@ -4167,7 +5588,7 @@
               </a:defRPr>
             </a:pPr>
             <a:r>
-              <a:t>Calories use a sex-neutral estimate because the app does not collect sex.</a:t>
+              <a:t>Personalized plan and a training session.</a:t>
             </a:r>
           </a:p>
         </p:txBody>
@@ -4177,18 +5598,18 @@
           <p:cNvPr id="8" name="">
             <a:extLst xmlns:a="http://schemas.openxmlformats.org/drawingml/2006/main">
               <a:ext uri="{FF2B5EF4-FFF2-40B4-BE49-F238E27FC236}">
-                <a16:creationId xmlns:a16="http://schemas.microsoft.com/office/drawing/2014/main" id="{661AC21C-FF16-474D-8758-2197CF1FE173}"/>
-              </a:ext>
-            </a:extLst>
-          </p:cNvPr>
-          <p:cNvSpPr>
-            <a:spLocks xmlns:a="http://schemas.openxmlformats.org/drawingml/2006/main" noGrp="1"/>
-          </p:cNvSpPr>
-          <p:nvPr/>
-        </p:nvSpPr>
-        <p:spPr>
-          <a:xfrm xmlns:a="http://schemas.openxmlformats.org/drawingml/2006/main">
-            <a:off x="609600" y="6276975"/>
+                <a16:creationId xmlns:a16="http://schemas.microsoft.com/office/drawing/2014/main" id="{979AE979-332D-47C4-AE71-98AA8925A9FB}"/>
+              </a:ext>
+            </a:extLst>
+          </p:cNvPr>
+          <p:cNvSpPr>
+            <a:spLocks xmlns:a="http://schemas.openxmlformats.org/drawingml/2006/main" noGrp="1"/>
+          </p:cNvSpPr>
+          <p:nvPr/>
+        </p:nvSpPr>
+        <p:spPr>
+          <a:xfrm xmlns:a="http://schemas.openxmlformats.org/drawingml/2006/main">
+            <a:off x="609600" y="5857875"/>
             <a:ext cx="190500" cy="323850"/>
           </a:xfrm>
           <a:prstGeom xmlns:a="http://schemas.openxmlformats.org/drawingml/2006/main" prst="rect">
@@ -4202,7 +5623,7 @@
             <a:pPr>
               <a:defRPr sz="1875" b="1">
                 <a:solidFill>
-                  <a:srgbClr val="FFD23F"/>
+                  <a:srgbClr val="4DB6FF"/>
                 </a:solidFill>
                 <a:latin typeface="Avenir Next"/>
                 <a:ea typeface="Avenir Next"/>
@@ -4220,18 +5641,18 @@
           <p:cNvPr id="9" name="">
             <a:extLst xmlns:a="http://schemas.openxmlformats.org/drawingml/2006/main">
               <a:ext uri="{FF2B5EF4-FFF2-40B4-BE49-F238E27FC236}">
-                <a16:creationId xmlns:a16="http://schemas.microsoft.com/office/drawing/2014/main" id="{6677F8F3-D3FF-4B55-9728-77C616651FF9}"/>
-              </a:ext>
-            </a:extLst>
-          </p:cNvPr>
-          <p:cNvSpPr>
-            <a:spLocks xmlns:a="http://schemas.openxmlformats.org/drawingml/2006/main" noGrp="1"/>
-          </p:cNvSpPr>
-          <p:nvPr/>
-        </p:nvSpPr>
-        <p:spPr>
-          <a:xfrm xmlns:a="http://schemas.openxmlformats.org/drawingml/2006/main">
-            <a:off x="914400" y="6276975"/>
+                <a16:creationId xmlns:a16="http://schemas.microsoft.com/office/drawing/2014/main" id="{2E69E0EA-CBC9-4EA0-A3AC-1CAB217A483C}"/>
+              </a:ext>
+            </a:extLst>
+          </p:cNvPr>
+          <p:cNvSpPr>
+            <a:spLocks xmlns:a="http://schemas.openxmlformats.org/drawingml/2006/main" noGrp="1"/>
+          </p:cNvSpPr>
+          <p:nvPr/>
+        </p:nvSpPr>
+        <p:spPr>
+          <a:xfrm xmlns:a="http://schemas.openxmlformats.org/drawingml/2006/main">
+            <a:off x="914400" y="5857875"/>
             <a:ext cx="6096000" cy="533400"/>
           </a:xfrm>
           <a:prstGeom xmlns:a="http://schemas.openxmlformats.org/drawingml/2006/main" prst="rect">
@@ -4253,27 +5674,157 @@
               </a:defRPr>
             </a:pPr>
             <a:r>
-              <a:t>Coach language points to balanced meals, hydration, and adult support.</a:t>
+              <a:t>Drill guidance with diagrams.</a:t>
+            </a:r>
+          </a:p>
+        </p:txBody>
+      </p:sp>
+      <p:sp>
+        <p:nvSpPr>
+          <p:cNvPr id="10" name="">
+            <a:extLst xmlns:a="http://schemas.openxmlformats.org/drawingml/2006/main">
+              <a:ext uri="{FF2B5EF4-FFF2-40B4-BE49-F238E27FC236}">
+                <a16:creationId xmlns:a16="http://schemas.microsoft.com/office/drawing/2014/main" id="{94D49AEA-EE25-4406-9B61-E111F392447C}"/>
+              </a:ext>
+            </a:extLst>
+          </p:cNvPr>
+          <p:cNvSpPr>
+            <a:spLocks xmlns:a="http://schemas.openxmlformats.org/drawingml/2006/main" noGrp="1"/>
+          </p:cNvSpPr>
+          <p:nvPr/>
+        </p:nvSpPr>
+        <p:spPr>
+          <a:xfrm xmlns:a="http://schemas.openxmlformats.org/drawingml/2006/main">
+            <a:off x="609600" y="6505575"/>
+            <a:ext cx="190500" cy="323850"/>
+          </a:xfrm>
+          <a:prstGeom xmlns:a="http://schemas.openxmlformats.org/drawingml/2006/main" prst="rect">
+            <a:avLst/>
+          </a:prstGeom>
+        </p:spPr>
+        <p:txBody>
+          <a:bodyPr xmlns:a="http://schemas.openxmlformats.org/drawingml/2006/main" wrap="square" lIns="0" tIns="0" rIns="0" bIns="0"/>
+          <a:lstStyle xmlns:a="http://schemas.openxmlformats.org/drawingml/2006/main"/>
+          <a:p xmlns:a="http://schemas.openxmlformats.org/drawingml/2006/main">
+            <a:pPr>
+              <a:defRPr sz="1875" b="1">
+                <a:solidFill>
+                  <a:srgbClr val="4DB6FF"/>
+                </a:solidFill>
+                <a:latin typeface="Avenir Next"/>
+                <a:ea typeface="Avenir Next"/>
+                <a:cs typeface="Avenir Next"/>
+              </a:defRPr>
+            </a:pPr>
+            <a:r>
+              <a:t>-</a:t>
+            </a:r>
+          </a:p>
+        </p:txBody>
+      </p:sp>
+      <p:sp>
+        <p:nvSpPr>
+          <p:cNvPr id="11" name="">
+            <a:extLst xmlns:a="http://schemas.openxmlformats.org/drawingml/2006/main">
+              <a:ext uri="{FF2B5EF4-FFF2-40B4-BE49-F238E27FC236}">
+                <a16:creationId xmlns:a16="http://schemas.microsoft.com/office/drawing/2014/main" id="{25575005-B61F-48A6-B91F-33E6009270A4}"/>
+              </a:ext>
+            </a:extLst>
+          </p:cNvPr>
+          <p:cNvSpPr>
+            <a:spLocks xmlns:a="http://schemas.openxmlformats.org/drawingml/2006/main" noGrp="1"/>
+          </p:cNvSpPr>
+          <p:nvPr/>
+        </p:nvSpPr>
+        <p:spPr>
+          <a:xfrm xmlns:a="http://schemas.openxmlformats.org/drawingml/2006/main">
+            <a:off x="914400" y="6505575"/>
+            <a:ext cx="6096000" cy="533400"/>
+          </a:xfrm>
+          <a:prstGeom xmlns:a="http://schemas.openxmlformats.org/drawingml/2006/main" prst="rect">
+            <a:avLst/>
+          </a:prstGeom>
+        </p:spPr>
+        <p:txBody>
+          <a:bodyPr xmlns:a="http://schemas.openxmlformats.org/drawingml/2006/main" wrap="square" lIns="0" tIns="0" rIns="0" bIns="0"/>
+          <a:lstStyle xmlns:a="http://schemas.openxmlformats.org/drawingml/2006/main"/>
+          <a:p xmlns:a="http://schemas.openxmlformats.org/drawingml/2006/main">
+            <a:pPr>
+              <a:defRPr sz="1800" b="1">
+                <a:solidFill>
+                  <a:srgbClr val="F4F5F6"/>
+                </a:solidFill>
+                <a:latin typeface="Avenir Next"/>
+                <a:ea typeface="Avenir Next"/>
+                <a:cs typeface="Avenir Next"/>
+              </a:defRPr>
+            </a:pPr>
+            <a:r>
+              <a:t>Fuel tab and the AI coach.</a:t>
             </a:r>
           </a:p>
         </p:txBody>
       </p:sp>
       <p:pic>
         <p:nvPicPr>
-          <p:cNvPr id="10" name=""/>
+          <p:cNvPr id="12" name=""/>
           <p:cNvPicPr>
             <a:picLocks xmlns:a="http://schemas.openxmlformats.org/drawingml/2006/main" noChangeAspect="1"/>
           </p:cNvPicPr>
           <p:nvPr/>
         </p:nvPicPr>
         <p:blipFill>
-          <a:blip xmlns:r="http://schemas.openxmlformats.org/officeDocument/2006/relationships" xmlns:a="http://schemas.openxmlformats.org/drawingml/2006/main" r:embed="R22b8eff3235a486a"/>
+          <a:blip xmlns:r="http://schemas.openxmlformats.org/officeDocument/2006/relationships" xmlns:a="http://schemas.openxmlformats.org/drawingml/2006/main" r:embed="R0bfeb197e11a421c"/>
           <a:stretch xmlns:a="http://schemas.openxmlformats.org/drawingml/2006/main"/>
         </p:blipFill>
         <p:spPr>
           <a:xfrm xmlns:a="http://schemas.openxmlformats.org/drawingml/2006/main">
-            <a:off x="8048896" y="704850"/>
-            <a:ext cx="3257008" cy="7048500"/>
+            <a:off x="7819596" y="2105025"/>
+            <a:ext cx="1963008" cy="4248150"/>
+          </a:xfrm>
+          <a:prstGeom xmlns:a="http://schemas.openxmlformats.org/drawingml/2006/main" prst="rect">
+            <a:avLst/>
+          </a:prstGeom>
+        </p:spPr>
+      </p:pic>
+      <p:pic>
+        <p:nvPicPr>
+          <p:cNvPr id="13" name=""/>
+          <p:cNvPicPr>
+            <a:picLocks xmlns:a="http://schemas.openxmlformats.org/drawingml/2006/main" noChangeAspect="1"/>
+          </p:cNvPicPr>
+          <p:nvPr/>
+        </p:nvPicPr>
+        <p:blipFill>
+          <a:blip xmlns:r="http://schemas.openxmlformats.org/officeDocument/2006/relationships" xmlns:a="http://schemas.openxmlformats.org/drawingml/2006/main" r:embed="R4a7ab983f8ab43b8"/>
+          <a:stretch xmlns:a="http://schemas.openxmlformats.org/drawingml/2006/main"/>
+        </p:blipFill>
+        <p:spPr>
+          <a:xfrm xmlns:a="http://schemas.openxmlformats.org/drawingml/2006/main">
+            <a:off x="9991296" y="2105025"/>
+            <a:ext cx="1963008" cy="4248150"/>
+          </a:xfrm>
+          <a:prstGeom xmlns:a="http://schemas.openxmlformats.org/drawingml/2006/main" prst="rect">
+            <a:avLst/>
+          </a:prstGeom>
+        </p:spPr>
+      </p:pic>
+      <p:pic>
+        <p:nvPicPr>
+          <p:cNvPr id="14" name=""/>
+          <p:cNvPicPr>
+            <a:picLocks xmlns:a="http://schemas.openxmlformats.org/drawingml/2006/main" noChangeAspect="1"/>
+          </p:cNvPicPr>
+          <p:nvPr/>
+        </p:nvPicPr>
+        <p:blipFill>
+          <a:blip xmlns:r="http://schemas.openxmlformats.org/officeDocument/2006/relationships" xmlns:a="http://schemas.openxmlformats.org/drawingml/2006/main" r:embed="Rcbe63c97a0a542f8"/>
+          <a:stretch xmlns:a="http://schemas.openxmlformats.org/drawingml/2006/main"/>
+        </p:blipFill>
+        <p:spPr>
+          <a:xfrm xmlns:a="http://schemas.openxmlformats.org/drawingml/2006/main">
+            <a:off x="12162996" y="2105025"/>
+            <a:ext cx="1963008" cy="4248150"/>
           </a:xfrm>
           <a:prstGeom xmlns:a="http://schemas.openxmlformats.org/drawingml/2006/main" prst="rect">
             <a:avLst/>
@@ -4283,7 +5834,7 @@
     </p:spTree>
     <p:extLst>
       <p:ext uri="{BB962C8B-B14F-4D97-AF65-F5344CB8AC3E}">
-        <p14:creationId xmlns:p14="http://schemas.microsoft.com/office/powerpoint/2010/main" val="928655784"/>
+        <p14:creationId xmlns:p14="http://schemas.microsoft.com/office/powerpoint/2010/main" val="195644696"/>
       </p:ext>
     </p:extLst>
   </p:cSld>
@@ -4314,18 +5865,18 @@
           <p:cNvPr id="1" name="">
             <a:extLst xmlns:a="http://schemas.openxmlformats.org/drawingml/2006/main">
               <a:ext uri="{FF2B5EF4-FFF2-40B4-BE49-F238E27FC236}">
-                <a16:creationId xmlns:a16="http://schemas.microsoft.com/office/drawing/2014/main" id="{DAE67E14-E5C0-4C94-93FC-1CCFEA3E32A4}"/>
-              </a:ext>
-            </a:extLst>
-          </p:cNvPr>
-          <p:cNvSpPr>
-            <a:spLocks xmlns:a="http://schemas.openxmlformats.org/drawingml/2006/main" noGrp="1"/>
-          </p:cNvSpPr>
-          <p:nvPr/>
-        </p:nvSpPr>
-        <p:spPr>
-          <a:xfrm xmlns:a="http://schemas.openxmlformats.org/drawingml/2006/main">
-            <a:off x="609600" y="1647825"/>
+                <a16:creationId xmlns:a16="http://schemas.microsoft.com/office/drawing/2014/main" id="{FDA999D5-FEED-4258-B9D2-25F890000B0E}"/>
+              </a:ext>
+            </a:extLst>
+          </p:cNvPr>
+          <p:cNvSpPr>
+            <a:spLocks xmlns:a="http://schemas.openxmlformats.org/drawingml/2006/main" noGrp="1"/>
+          </p:cNvSpPr>
+          <p:nvPr/>
+        </p:nvSpPr>
+        <p:spPr>
+          <a:xfrm xmlns:a="http://schemas.openxmlformats.org/drawingml/2006/main">
+            <a:off x="609600" y="609600"/>
             <a:ext cx="9525000" cy="323850"/>
           </a:xfrm>
           <a:prstGeom xmlns:a="http://schemas.openxmlformats.org/drawingml/2006/main" prst="rect">
@@ -4347,7 +5898,7 @@
               </a:defRPr>
             </a:pPr>
             <a:r>
-              <a:t>AI COACH</a:t>
+              <a:t>TECHNICAL EXECUTION</a:t>
             </a:r>
           </a:p>
         </p:txBody>
@@ -4357,19 +5908,19 @@
           <p:cNvPr id="2" name="">
             <a:extLst xmlns:a="http://schemas.openxmlformats.org/drawingml/2006/main">
               <a:ext uri="{FF2B5EF4-FFF2-40B4-BE49-F238E27FC236}">
-                <a16:creationId xmlns:a16="http://schemas.microsoft.com/office/drawing/2014/main" id="{0AB52B36-5BDC-46C2-8D00-A2E6E3335E1F}"/>
-              </a:ext>
-            </a:extLst>
-          </p:cNvPr>
-          <p:cNvSpPr>
-            <a:spLocks xmlns:a="http://schemas.openxmlformats.org/drawingml/2006/main" noGrp="1"/>
-          </p:cNvSpPr>
-          <p:nvPr/>
-        </p:nvSpPr>
-        <p:spPr>
-          <a:xfrm xmlns:a="http://schemas.openxmlformats.org/drawingml/2006/main">
-            <a:off x="609600" y="2181225"/>
-            <a:ext cx="6572250" cy="1143000"/>
+                <a16:creationId xmlns:a16="http://schemas.microsoft.com/office/drawing/2014/main" id="{09FE8252-5DD8-4947-93C2-EB4B78CDC231}"/>
+              </a:ext>
+            </a:extLst>
+          </p:cNvPr>
+          <p:cNvSpPr>
+            <a:spLocks xmlns:a="http://schemas.openxmlformats.org/drawingml/2006/main" noGrp="1"/>
+          </p:cNvSpPr>
+          <p:nvPr/>
+        </p:nvSpPr>
+        <p:spPr>
+          <a:xfrm xmlns:a="http://schemas.openxmlformats.org/drawingml/2006/main">
+            <a:off x="609600" y="1123950"/>
+            <a:ext cx="11239500" cy="1143000"/>
           </a:xfrm>
           <a:prstGeom xmlns:a="http://schemas.openxmlformats.org/drawingml/2006/main" prst="rect">
             <a:avLst/>
@@ -4390,7 +5941,7 @@
               </a:defRPr>
             </a:pPr>
             <a:r>
-              <a:t>The coach is grounded in Jordan's actual state.</a:t>
+              <a:t>A real working app, not a mockup.</a:t>
             </a:r>
           </a:p>
         </p:txBody>
@@ -4400,30 +5951,73 @@
           <p:cNvPr id="3" name="">
             <a:extLst xmlns:a="http://schemas.openxmlformats.org/drawingml/2006/main">
               <a:ext uri="{FF2B5EF4-FFF2-40B4-BE49-F238E27FC236}">
-                <a16:creationId xmlns:a16="http://schemas.microsoft.com/office/drawing/2014/main" id="{4176F1A5-CA4D-4B0B-BC69-01ADF1D47D47}"/>
-              </a:ext>
-            </a:extLst>
-          </p:cNvPr>
-          <p:cNvSpPr>
-            <a:spLocks xmlns:a="http://schemas.openxmlformats.org/drawingml/2006/main" noGrp="1"/>
-          </p:cNvSpPr>
-          <p:nvPr/>
-        </p:nvSpPr>
-        <p:spPr>
-          <a:xfrm xmlns:a="http://schemas.openxmlformats.org/drawingml/2006/main">
-            <a:off x="609600" y="3533775"/>
-            <a:ext cx="6381750" cy="1238250"/>
-          </a:xfrm>
-          <a:prstGeom xmlns:a="http://schemas.openxmlformats.org/drawingml/2006/main" prst="rect">
-            <a:avLst/>
-          </a:prstGeom>
-        </p:spPr>
-        <p:txBody>
-          <a:bodyPr xmlns:a="http://schemas.openxmlformats.org/drawingml/2006/main" wrap="square" lIns="0" tIns="0" rIns="0" bIns="0"/>
-          <a:lstStyle xmlns:a="http://schemas.openxmlformats.org/drawingml/2006/main"/>
-          <a:p xmlns:a="http://schemas.openxmlformats.org/drawingml/2006/main">
-            <a:pPr>
-              <a:defRPr sz="1875" b="0">
+                <a16:creationId xmlns:a16="http://schemas.microsoft.com/office/drawing/2014/main" id="{D88F8DB0-1659-48C4-8EA7-E4E90B53BB41}"/>
+              </a:ext>
+            </a:extLst>
+          </p:cNvPr>
+          <p:cNvSpPr>
+            <a:spLocks xmlns:a="http://schemas.openxmlformats.org/drawingml/2006/main" noGrp="1"/>
+          </p:cNvSpPr>
+          <p:nvPr/>
+        </p:nvSpPr>
+        <p:spPr>
+          <a:xfrm xmlns:a="http://schemas.openxmlformats.org/drawingml/2006/main">
+            <a:off x="762000" y="2609850"/>
+            <a:ext cx="1809750" cy="552450"/>
+          </a:xfrm>
+          <a:prstGeom xmlns:a="http://schemas.openxmlformats.org/drawingml/2006/main" prst="rect">
+            <a:avLst/>
+          </a:prstGeom>
+        </p:spPr>
+        <p:txBody>
+          <a:bodyPr xmlns:a="http://schemas.openxmlformats.org/drawingml/2006/main" wrap="square" lIns="0" tIns="0" rIns="0" bIns="0"/>
+          <a:lstStyle xmlns:a="http://schemas.openxmlformats.org/drawingml/2006/main"/>
+          <a:p xmlns:a="http://schemas.openxmlformats.org/drawingml/2006/main">
+            <a:pPr>
+              <a:defRPr sz="3600" b="1">
+                <a:solidFill>
+                  <a:srgbClr val="39FF73"/>
+                </a:solidFill>
+                <a:latin typeface="SF Mono"/>
+                <a:ea typeface="SF Mono"/>
+                <a:cs typeface="SF Mono"/>
+              </a:defRPr>
+            </a:pPr>
+            <a:r>
+              <a:t>50</a:t>
+            </a:r>
+          </a:p>
+        </p:txBody>
+      </p:sp>
+      <p:sp>
+        <p:nvSpPr>
+          <p:cNvPr id="4" name="">
+            <a:extLst xmlns:a="http://schemas.openxmlformats.org/drawingml/2006/main">
+              <a:ext uri="{FF2B5EF4-FFF2-40B4-BE49-F238E27FC236}">
+                <a16:creationId xmlns:a16="http://schemas.microsoft.com/office/drawing/2014/main" id="{2649EC9B-BF4A-4C9C-878C-BB3F27C33001}"/>
+              </a:ext>
+            </a:extLst>
+          </p:cNvPr>
+          <p:cNvSpPr>
+            <a:spLocks xmlns:a="http://schemas.openxmlformats.org/drawingml/2006/main" noGrp="1"/>
+          </p:cNvSpPr>
+          <p:nvPr/>
+        </p:nvSpPr>
+        <p:spPr>
+          <a:xfrm xmlns:a="http://schemas.openxmlformats.org/drawingml/2006/main">
+            <a:off x="762000" y="3181350"/>
+            <a:ext cx="1714500" cy="381000"/>
+          </a:xfrm>
+          <a:prstGeom xmlns:a="http://schemas.openxmlformats.org/drawingml/2006/main" prst="rect">
+            <a:avLst/>
+          </a:prstGeom>
+        </p:spPr>
+        <p:txBody>
+          <a:bodyPr xmlns:a="http://schemas.openxmlformats.org/drawingml/2006/main" wrap="square" lIns="0" tIns="0" rIns="0" bIns="0"/>
+          <a:lstStyle xmlns:a="http://schemas.openxmlformats.org/drawingml/2006/main"/>
+          <a:p xmlns:a="http://schemas.openxmlformats.org/drawingml/2006/main">
+            <a:pPr>
+              <a:defRPr sz="1425" b="1">
                 <a:solidFill>
                   <a:srgbClr val="9AA1A9"/>
                 </a:solidFill>
@@ -4433,28 +6027,286 @@
               </a:defRPr>
             </a:pPr>
             <a:r>
-              <a:t>Gemini receives readiness, top gaps, today's roadmap session, recent history, and today's meals. It is not a generic soccer chatbot.</a:t>
-            </a:r>
-          </a:p>
-        </p:txBody>
-      </p:sp>
-      <p:sp>
-        <p:nvSpPr>
-          <p:cNvPr id="4" name="">
-            <a:extLst xmlns:a="http://schemas.openxmlformats.org/drawingml/2006/main">
-              <a:ext uri="{FF2B5EF4-FFF2-40B4-BE49-F238E27FC236}">
-                <a16:creationId xmlns:a16="http://schemas.microsoft.com/office/drawing/2014/main" id="{E1A819BF-015C-41BD-8C15-79CC68E44745}"/>
-              </a:ext>
-            </a:extLst>
-          </p:cNvPr>
-          <p:cNvSpPr>
-            <a:spLocks xmlns:a="http://schemas.openxmlformats.org/drawingml/2006/main" noGrp="1"/>
-          </p:cNvSpPr>
-          <p:nvPr/>
-        </p:nvSpPr>
-        <p:spPr>
-          <a:xfrm xmlns:a="http://schemas.openxmlformats.org/drawingml/2006/main">
-            <a:off x="609600" y="4981575"/>
+              <a:t>drill catalog</a:t>
+            </a:r>
+          </a:p>
+        </p:txBody>
+      </p:sp>
+      <p:sp>
+        <p:nvSpPr>
+          <p:cNvPr id="5" name="">
+            <a:extLst xmlns:a="http://schemas.openxmlformats.org/drawingml/2006/main">
+              <a:ext uri="{FF2B5EF4-FFF2-40B4-BE49-F238E27FC236}">
+                <a16:creationId xmlns:a16="http://schemas.microsoft.com/office/drawing/2014/main" id="{4375C072-47FE-48E9-AFF0-139A9AA9596E}"/>
+              </a:ext>
+            </a:extLst>
+          </p:cNvPr>
+          <p:cNvSpPr>
+            <a:spLocks xmlns:a="http://schemas.openxmlformats.org/drawingml/2006/main" noGrp="1"/>
+          </p:cNvSpPr>
+          <p:nvPr/>
+        </p:nvSpPr>
+        <p:spPr>
+          <a:xfrm xmlns:a="http://schemas.openxmlformats.org/drawingml/2006/main">
+            <a:off x="2990850" y="2609850"/>
+            <a:ext cx="1809750" cy="552450"/>
+          </a:xfrm>
+          <a:prstGeom xmlns:a="http://schemas.openxmlformats.org/drawingml/2006/main" prst="rect">
+            <a:avLst/>
+          </a:prstGeom>
+        </p:spPr>
+        <p:txBody>
+          <a:bodyPr xmlns:a="http://schemas.openxmlformats.org/drawingml/2006/main" wrap="square" lIns="0" tIns="0" rIns="0" bIns="0"/>
+          <a:lstStyle xmlns:a="http://schemas.openxmlformats.org/drawingml/2006/main"/>
+          <a:p xmlns:a="http://schemas.openxmlformats.org/drawingml/2006/main">
+            <a:pPr>
+              <a:defRPr sz="3600" b="1">
+                <a:solidFill>
+                  <a:srgbClr val="4DB6FF"/>
+                </a:solidFill>
+                <a:latin typeface="SF Mono"/>
+                <a:ea typeface="SF Mono"/>
+                <a:cs typeface="SF Mono"/>
+              </a:defRPr>
+            </a:pPr>
+            <a:r>
+              <a:t>0-100</a:t>
+            </a:r>
+          </a:p>
+        </p:txBody>
+      </p:sp>
+      <p:sp>
+        <p:nvSpPr>
+          <p:cNvPr id="6" name="">
+            <a:extLst xmlns:a="http://schemas.openxmlformats.org/drawingml/2006/main">
+              <a:ext uri="{FF2B5EF4-FFF2-40B4-BE49-F238E27FC236}">
+                <a16:creationId xmlns:a16="http://schemas.microsoft.com/office/drawing/2014/main" id="{6067E1EB-E1AE-4F61-8AB8-D9E4AC8459B6}"/>
+              </a:ext>
+            </a:extLst>
+          </p:cNvPr>
+          <p:cNvSpPr>
+            <a:spLocks xmlns:a="http://schemas.openxmlformats.org/drawingml/2006/main" noGrp="1"/>
+          </p:cNvSpPr>
+          <p:nvPr/>
+        </p:nvSpPr>
+        <p:spPr>
+          <a:xfrm xmlns:a="http://schemas.openxmlformats.org/drawingml/2006/main">
+            <a:off x="2990850" y="3181350"/>
+            <a:ext cx="1714500" cy="381000"/>
+          </a:xfrm>
+          <a:prstGeom xmlns:a="http://schemas.openxmlformats.org/drawingml/2006/main" prst="rect">
+            <a:avLst/>
+          </a:prstGeom>
+        </p:spPr>
+        <p:txBody>
+          <a:bodyPr xmlns:a="http://schemas.openxmlformats.org/drawingml/2006/main" wrap="square" lIns="0" tIns="0" rIns="0" bIns="0"/>
+          <a:lstStyle xmlns:a="http://schemas.openxmlformats.org/drawingml/2006/main"/>
+          <a:p xmlns:a="http://schemas.openxmlformats.org/drawingml/2006/main">
+            <a:pPr>
+              <a:defRPr sz="1425" b="1">
+                <a:solidFill>
+                  <a:srgbClr val="9AA1A9"/>
+                </a:solidFill>
+                <a:latin typeface="Avenir Next"/>
+                <a:ea typeface="Avenir Next"/>
+                <a:cs typeface="Avenir Next"/>
+              </a:defRPr>
+            </a:pPr>
+            <a:r>
+              <a:t>readiness model</a:t>
+            </a:r>
+          </a:p>
+        </p:txBody>
+      </p:sp>
+      <p:sp>
+        <p:nvSpPr>
+          <p:cNvPr id="7" name="">
+            <a:extLst xmlns:a="http://schemas.openxmlformats.org/drawingml/2006/main">
+              <a:ext uri="{FF2B5EF4-FFF2-40B4-BE49-F238E27FC236}">
+                <a16:creationId xmlns:a16="http://schemas.microsoft.com/office/drawing/2014/main" id="{85ADDC01-1B89-4437-AE01-0F97DDA67DBC}"/>
+              </a:ext>
+            </a:extLst>
+          </p:cNvPr>
+          <p:cNvSpPr>
+            <a:spLocks xmlns:a="http://schemas.openxmlformats.org/drawingml/2006/main" noGrp="1"/>
+          </p:cNvSpPr>
+          <p:nvPr/>
+        </p:nvSpPr>
+        <p:spPr>
+          <a:xfrm xmlns:a="http://schemas.openxmlformats.org/drawingml/2006/main">
+            <a:off x="5219700" y="2609850"/>
+            <a:ext cx="1809750" cy="552450"/>
+          </a:xfrm>
+          <a:prstGeom xmlns:a="http://schemas.openxmlformats.org/drawingml/2006/main" prst="rect">
+            <a:avLst/>
+          </a:prstGeom>
+        </p:spPr>
+        <p:txBody>
+          <a:bodyPr xmlns:a="http://schemas.openxmlformats.org/drawingml/2006/main" wrap="square" lIns="0" tIns="0" rIns="0" bIns="0"/>
+          <a:lstStyle xmlns:a="http://schemas.openxmlformats.org/drawingml/2006/main"/>
+          <a:p xmlns:a="http://schemas.openxmlformats.org/drawingml/2006/main">
+            <a:pPr>
+              <a:defRPr sz="3600" b="1">
+                <a:solidFill>
+                  <a:srgbClr val="FFD23F"/>
+                </a:solidFill>
+                <a:latin typeface="SF Mono"/>
+                <a:ea typeface="SF Mono"/>
+                <a:cs typeface="SF Mono"/>
+              </a:defRPr>
+            </a:pPr>
+            <a:r>
+              <a:t>USDA</a:t>
+            </a:r>
+          </a:p>
+        </p:txBody>
+      </p:sp>
+      <p:sp>
+        <p:nvSpPr>
+          <p:cNvPr id="8" name="">
+            <a:extLst xmlns:a="http://schemas.openxmlformats.org/drawingml/2006/main">
+              <a:ext uri="{FF2B5EF4-FFF2-40B4-BE49-F238E27FC236}">
+                <a16:creationId xmlns:a16="http://schemas.microsoft.com/office/drawing/2014/main" id="{05140966-1DA2-404C-90C1-565F4A2653FE}"/>
+              </a:ext>
+            </a:extLst>
+          </p:cNvPr>
+          <p:cNvSpPr>
+            <a:spLocks xmlns:a="http://schemas.openxmlformats.org/drawingml/2006/main" noGrp="1"/>
+          </p:cNvSpPr>
+          <p:nvPr/>
+        </p:nvSpPr>
+        <p:spPr>
+          <a:xfrm xmlns:a="http://schemas.openxmlformats.org/drawingml/2006/main">
+            <a:off x="5219700" y="3181350"/>
+            <a:ext cx="1714500" cy="381000"/>
+          </a:xfrm>
+          <a:prstGeom xmlns:a="http://schemas.openxmlformats.org/drawingml/2006/main" prst="rect">
+            <a:avLst/>
+          </a:prstGeom>
+        </p:spPr>
+        <p:txBody>
+          <a:bodyPr xmlns:a="http://schemas.openxmlformats.org/drawingml/2006/main" wrap="square" lIns="0" tIns="0" rIns="0" bIns="0"/>
+          <a:lstStyle xmlns:a="http://schemas.openxmlformats.org/drawingml/2006/main"/>
+          <a:p xmlns:a="http://schemas.openxmlformats.org/drawingml/2006/main">
+            <a:pPr>
+              <a:defRPr sz="1425" b="1">
+                <a:solidFill>
+                  <a:srgbClr val="9AA1A9"/>
+                </a:solidFill>
+                <a:latin typeface="Avenir Next"/>
+                <a:ea typeface="Avenir Next"/>
+                <a:cs typeface="Avenir Next"/>
+              </a:defRPr>
+            </a:pPr>
+            <a:r>
+              <a:t>live food data</a:t>
+            </a:r>
+          </a:p>
+        </p:txBody>
+      </p:sp>
+      <p:sp>
+        <p:nvSpPr>
+          <p:cNvPr id="9" name="">
+            <a:extLst xmlns:a="http://schemas.openxmlformats.org/drawingml/2006/main">
+              <a:ext uri="{FF2B5EF4-FFF2-40B4-BE49-F238E27FC236}">
+                <a16:creationId xmlns:a16="http://schemas.microsoft.com/office/drawing/2014/main" id="{0D095101-B4DE-42F9-B4F8-F42A110CE29F}"/>
+              </a:ext>
+            </a:extLst>
+          </p:cNvPr>
+          <p:cNvSpPr>
+            <a:spLocks xmlns:a="http://schemas.openxmlformats.org/drawingml/2006/main" noGrp="1"/>
+          </p:cNvSpPr>
+          <p:nvPr/>
+        </p:nvSpPr>
+        <p:spPr>
+          <a:xfrm xmlns:a="http://schemas.openxmlformats.org/drawingml/2006/main">
+            <a:off x="7448550" y="2609850"/>
+            <a:ext cx="1809750" cy="552450"/>
+          </a:xfrm>
+          <a:prstGeom xmlns:a="http://schemas.openxmlformats.org/drawingml/2006/main" prst="rect">
+            <a:avLst/>
+          </a:prstGeom>
+        </p:spPr>
+        <p:txBody>
+          <a:bodyPr xmlns:a="http://schemas.openxmlformats.org/drawingml/2006/main" wrap="square" lIns="0" tIns="0" rIns="0" bIns="0"/>
+          <a:lstStyle xmlns:a="http://schemas.openxmlformats.org/drawingml/2006/main"/>
+          <a:p xmlns:a="http://schemas.openxmlformats.org/drawingml/2006/main">
+            <a:pPr>
+              <a:defRPr sz="3600" b="1">
+                <a:solidFill>
+                  <a:srgbClr val="39FF73"/>
+                </a:solidFill>
+                <a:latin typeface="SF Mono"/>
+                <a:ea typeface="SF Mono"/>
+                <a:cs typeface="SF Mono"/>
+              </a:defRPr>
+            </a:pPr>
+            <a:r>
+              <a:t>35/35</a:t>
+            </a:r>
+          </a:p>
+        </p:txBody>
+      </p:sp>
+      <p:sp>
+        <p:nvSpPr>
+          <p:cNvPr id="10" name="">
+            <a:extLst xmlns:a="http://schemas.openxmlformats.org/drawingml/2006/main">
+              <a:ext uri="{FF2B5EF4-FFF2-40B4-BE49-F238E27FC236}">
+                <a16:creationId xmlns:a16="http://schemas.microsoft.com/office/drawing/2014/main" id="{82C96270-76F8-41B9-B5DB-5070B5E55B81}"/>
+              </a:ext>
+            </a:extLst>
+          </p:cNvPr>
+          <p:cNvSpPr>
+            <a:spLocks xmlns:a="http://schemas.openxmlformats.org/drawingml/2006/main" noGrp="1"/>
+          </p:cNvSpPr>
+          <p:nvPr/>
+        </p:nvSpPr>
+        <p:spPr>
+          <a:xfrm xmlns:a="http://schemas.openxmlformats.org/drawingml/2006/main">
+            <a:off x="7448550" y="3181350"/>
+            <a:ext cx="1714500" cy="381000"/>
+          </a:xfrm>
+          <a:prstGeom xmlns:a="http://schemas.openxmlformats.org/drawingml/2006/main" prst="rect">
+            <a:avLst/>
+          </a:prstGeom>
+        </p:spPr>
+        <p:txBody>
+          <a:bodyPr xmlns:a="http://schemas.openxmlformats.org/drawingml/2006/main" wrap="square" lIns="0" tIns="0" rIns="0" bIns="0"/>
+          <a:lstStyle xmlns:a="http://schemas.openxmlformats.org/drawingml/2006/main"/>
+          <a:p xmlns:a="http://schemas.openxmlformats.org/drawingml/2006/main">
+            <a:pPr>
+              <a:defRPr sz="1425" b="1">
+                <a:solidFill>
+                  <a:srgbClr val="9AA1A9"/>
+                </a:solidFill>
+                <a:latin typeface="Avenir Next"/>
+                <a:ea typeface="Avenir Next"/>
+                <a:cs typeface="Avenir Next"/>
+              </a:defRPr>
+            </a:pPr>
+            <a:r>
+              <a:t>tests passing</a:t>
+            </a:r>
+          </a:p>
+        </p:txBody>
+      </p:sp>
+      <p:sp>
+        <p:nvSpPr>
+          <p:cNvPr id="11" name="">
+            <a:extLst xmlns:a="http://schemas.openxmlformats.org/drawingml/2006/main">
+              <a:ext uri="{FF2B5EF4-FFF2-40B4-BE49-F238E27FC236}">
+                <a16:creationId xmlns:a16="http://schemas.microsoft.com/office/drawing/2014/main" id="{EE53D9E0-5B45-45CD-A901-A89396E902E3}"/>
+              </a:ext>
+            </a:extLst>
+          </p:cNvPr>
+          <p:cNvSpPr>
+            <a:spLocks xmlns:a="http://schemas.openxmlformats.org/drawingml/2006/main" noGrp="1"/>
+          </p:cNvSpPr>
+          <p:nvPr/>
+        </p:nvSpPr>
+        <p:spPr>
+          <a:xfrm xmlns:a="http://schemas.openxmlformats.org/drawingml/2006/main">
+            <a:off x="609600" y="3790950"/>
             <a:ext cx="190500" cy="323850"/>
           </a:xfrm>
           <a:prstGeom xmlns:a="http://schemas.openxmlformats.org/drawingml/2006/main" prst="rect">
@@ -4483,22 +6335,22 @@
       </p:sp>
       <p:sp>
         <p:nvSpPr>
-          <p:cNvPr id="5" name="">
-            <a:extLst xmlns:a="http://schemas.openxmlformats.org/drawingml/2006/main">
-              <a:ext uri="{FF2B5EF4-FFF2-40B4-BE49-F238E27FC236}">
-                <a16:creationId xmlns:a16="http://schemas.microsoft.com/office/drawing/2014/main" id="{E6CD1E55-0B09-4EC4-9561-7C674569960D}"/>
-              </a:ext>
-            </a:extLst>
-          </p:cNvPr>
-          <p:cNvSpPr>
-            <a:spLocks xmlns:a="http://schemas.openxmlformats.org/drawingml/2006/main" noGrp="1"/>
-          </p:cNvSpPr>
-          <p:nvPr/>
-        </p:nvSpPr>
-        <p:spPr>
-          <a:xfrm xmlns:a="http://schemas.openxmlformats.org/drawingml/2006/main">
-            <a:off x="914400" y="4981575"/>
-            <a:ext cx="6096000" cy="533400"/>
+          <p:cNvPr id="12" name="">
+            <a:extLst xmlns:a="http://schemas.openxmlformats.org/drawingml/2006/main">
+              <a:ext uri="{FF2B5EF4-FFF2-40B4-BE49-F238E27FC236}">
+                <a16:creationId xmlns:a16="http://schemas.microsoft.com/office/drawing/2014/main" id="{5F3DABEF-1573-4632-A4E8-A2094E6F296E}"/>
+              </a:ext>
+            </a:extLst>
+          </p:cNvPr>
+          <p:cNvSpPr>
+            <a:spLocks xmlns:a="http://schemas.openxmlformats.org/drawingml/2006/main" noGrp="1"/>
+          </p:cNvSpPr>
+          <p:nvPr/>
+        </p:nvSpPr>
+        <p:spPr>
+          <a:xfrm xmlns:a="http://schemas.openxmlformats.org/drawingml/2006/main">
+            <a:off x="914400" y="3790950"/>
+            <a:ext cx="6191250" cy="533400"/>
           </a:xfrm>
           <a:prstGeom xmlns:a="http://schemas.openxmlformats.org/drawingml/2006/main" prst="rect">
             <a:avLst/>
@@ -4519,28 +6371,28 @@
               </a:defRPr>
             </a:pPr>
             <a:r>
-              <a:t>Streaming response feels live in the demo.</a:t>
-            </a:r>
-          </a:p>
-        </p:txBody>
-      </p:sp>
-      <p:sp>
-        <p:nvSpPr>
-          <p:cNvPr id="6" name="">
-            <a:extLst xmlns:a="http://schemas.openxmlformats.org/drawingml/2006/main">
-              <a:ext uri="{FF2B5EF4-FFF2-40B4-BE49-F238E27FC236}">
-                <a16:creationId xmlns:a16="http://schemas.microsoft.com/office/drawing/2014/main" id="{FC2FECF4-BC31-4B42-BAF0-B6516F03F7FA}"/>
-              </a:ext>
-            </a:extLst>
-          </p:cNvPr>
-          <p:cNvSpPr>
-            <a:spLocks xmlns:a="http://schemas.openxmlformats.org/drawingml/2006/main" noGrp="1"/>
-          </p:cNvSpPr>
-          <p:nvPr/>
-        </p:nvSpPr>
-        <p:spPr>
-          <a:xfrm xmlns:a="http://schemas.openxmlformats.org/drawingml/2006/main">
-            <a:off x="609600" y="5629275"/>
+              <a:t>Next.js 16 + React 19 + TypeScript, installable as a PWA.</a:t>
+            </a:r>
+          </a:p>
+        </p:txBody>
+      </p:sp>
+      <p:sp>
+        <p:nvSpPr>
+          <p:cNvPr id="13" name="">
+            <a:extLst xmlns:a="http://schemas.openxmlformats.org/drawingml/2006/main">
+              <a:ext uri="{FF2B5EF4-FFF2-40B4-BE49-F238E27FC236}">
+                <a16:creationId xmlns:a16="http://schemas.microsoft.com/office/drawing/2014/main" id="{A4162F40-C87D-4418-B987-EB0B9E1F723C}"/>
+              </a:ext>
+            </a:extLst>
+          </p:cNvPr>
+          <p:cNvSpPr>
+            <a:spLocks xmlns:a="http://schemas.openxmlformats.org/drawingml/2006/main" noGrp="1"/>
+          </p:cNvSpPr>
+          <p:nvPr/>
+        </p:nvSpPr>
+        <p:spPr>
+          <a:xfrm xmlns:a="http://schemas.openxmlformats.org/drawingml/2006/main">
+            <a:off x="609600" y="4438650"/>
             <a:ext cx="190500" cy="323850"/>
           </a:xfrm>
           <a:prstGeom xmlns:a="http://schemas.openxmlformats.org/drawingml/2006/main" prst="rect">
@@ -4569,22 +6421,22 @@
       </p:sp>
       <p:sp>
         <p:nvSpPr>
-          <p:cNvPr id="7" name="">
-            <a:extLst xmlns:a="http://schemas.openxmlformats.org/drawingml/2006/main">
-              <a:ext uri="{FF2B5EF4-FFF2-40B4-BE49-F238E27FC236}">
-                <a16:creationId xmlns:a16="http://schemas.microsoft.com/office/drawing/2014/main" id="{C7483C4D-D034-4484-8CEE-432E2CBE2B3E}"/>
-              </a:ext>
-            </a:extLst>
-          </p:cNvPr>
-          <p:cNvSpPr>
-            <a:spLocks xmlns:a="http://schemas.openxmlformats.org/drawingml/2006/main" noGrp="1"/>
-          </p:cNvSpPr>
-          <p:nvPr/>
-        </p:nvSpPr>
-        <p:spPr>
-          <a:xfrm xmlns:a="http://schemas.openxmlformats.org/drawingml/2006/main">
-            <a:off x="914400" y="5629275"/>
-            <a:ext cx="6096000" cy="533400"/>
+          <p:cNvPr id="14" name="">
+            <a:extLst xmlns:a="http://schemas.openxmlformats.org/drawingml/2006/main">
+              <a:ext uri="{FF2B5EF4-FFF2-40B4-BE49-F238E27FC236}">
+                <a16:creationId xmlns:a16="http://schemas.microsoft.com/office/drawing/2014/main" id="{54FC17ED-C140-4187-8DB2-897E42E426BF}"/>
+              </a:ext>
+            </a:extLst>
+          </p:cNvPr>
+          <p:cNvSpPr>
+            <a:spLocks xmlns:a="http://schemas.openxmlformats.org/drawingml/2006/main" noGrp="1"/>
+          </p:cNvSpPr>
+          <p:nvPr/>
+        </p:nvSpPr>
+        <p:spPr>
+          <a:xfrm xmlns:a="http://schemas.openxmlformats.org/drawingml/2006/main">
+            <a:off x="914400" y="4438650"/>
+            <a:ext cx="6191250" cy="533400"/>
           </a:xfrm>
           <a:prstGeom xmlns:a="http://schemas.openxmlformats.org/drawingml/2006/main" prst="rect">
             <a:avLst/>
@@ -4605,28 +6457,28 @@
               </a:defRPr>
             </a:pPr>
             <a:r>
-              <a:t>Context includes score, gaps, plan, and food log.</a:t>
-            </a:r>
-          </a:p>
-        </p:txBody>
-      </p:sp>
-      <p:sp>
-        <p:nvSpPr>
-          <p:cNvPr id="8" name="">
-            <a:extLst xmlns:a="http://schemas.openxmlformats.org/drawingml/2006/main">
-              <a:ext uri="{FF2B5EF4-FFF2-40B4-BE49-F238E27FC236}">
-                <a16:creationId xmlns:a16="http://schemas.microsoft.com/office/drawing/2014/main" id="{47C2FD37-3DF2-4191-B51A-7694429FA11D}"/>
-              </a:ext>
-            </a:extLst>
-          </p:cNvPr>
-          <p:cNvSpPr>
-            <a:spLocks xmlns:a="http://schemas.openxmlformats.org/drawingml/2006/main" noGrp="1"/>
-          </p:cNvSpPr>
-          <p:nvPr/>
-        </p:nvSpPr>
-        <p:spPr>
-          <a:xfrm xmlns:a="http://schemas.openxmlformats.org/drawingml/2006/main">
-            <a:off x="609600" y="6276975"/>
+              <a:t>Supabase auth + PostgreSQL with row-level security for sync.</a:t>
+            </a:r>
+          </a:p>
+        </p:txBody>
+      </p:sp>
+      <p:sp>
+        <p:nvSpPr>
+          <p:cNvPr id="15" name="">
+            <a:extLst xmlns:a="http://schemas.openxmlformats.org/drawingml/2006/main">
+              <a:ext uri="{FF2B5EF4-FFF2-40B4-BE49-F238E27FC236}">
+                <a16:creationId xmlns:a16="http://schemas.microsoft.com/office/drawing/2014/main" id="{13D7803D-C240-4A8E-A5E7-49C23056C8CB}"/>
+              </a:ext>
+            </a:extLst>
+          </p:cNvPr>
+          <p:cNvSpPr>
+            <a:spLocks xmlns:a="http://schemas.openxmlformats.org/drawingml/2006/main" noGrp="1"/>
+          </p:cNvSpPr>
+          <p:nvPr/>
+        </p:nvSpPr>
+        <p:spPr>
+          <a:xfrm xmlns:a="http://schemas.openxmlformats.org/drawingml/2006/main">
+            <a:off x="609600" y="5086350"/>
             <a:ext cx="190500" cy="323850"/>
           </a:xfrm>
           <a:prstGeom xmlns:a="http://schemas.openxmlformats.org/drawingml/2006/main" prst="rect">
@@ -4655,22 +6507,22 @@
       </p:sp>
       <p:sp>
         <p:nvSpPr>
-          <p:cNvPr id="9" name="">
-            <a:extLst xmlns:a="http://schemas.openxmlformats.org/drawingml/2006/main">
-              <a:ext uri="{FF2B5EF4-FFF2-40B4-BE49-F238E27FC236}">
-                <a16:creationId xmlns:a16="http://schemas.microsoft.com/office/drawing/2014/main" id="{C33005DD-2315-46F2-805B-FC8DFF09AFEE}"/>
-              </a:ext>
-            </a:extLst>
-          </p:cNvPr>
-          <p:cNvSpPr>
-            <a:spLocks xmlns:a="http://schemas.openxmlformats.org/drawingml/2006/main" noGrp="1"/>
-          </p:cNvSpPr>
-          <p:nvPr/>
-        </p:nvSpPr>
-        <p:spPr>
-          <a:xfrm xmlns:a="http://schemas.openxmlformats.org/drawingml/2006/main">
-            <a:off x="914400" y="6276975"/>
-            <a:ext cx="6096000" cy="533400"/>
+          <p:cNvPr id="16" name="">
+            <a:extLst xmlns:a="http://schemas.openxmlformats.org/drawingml/2006/main">
+              <a:ext uri="{FF2B5EF4-FFF2-40B4-BE49-F238E27FC236}">
+                <a16:creationId xmlns:a16="http://schemas.microsoft.com/office/drawing/2014/main" id="{34789CEB-F4F5-4F4A-A6C9-072BCFD87239}"/>
+              </a:ext>
+            </a:extLst>
+          </p:cNvPr>
+          <p:cNvSpPr>
+            <a:spLocks xmlns:a="http://schemas.openxmlformats.org/drawingml/2006/main" noGrp="1"/>
+          </p:cNvSpPr>
+          <p:nvPr/>
+        </p:nvSpPr>
+        <p:spPr>
+          <a:xfrm xmlns:a="http://schemas.openxmlformats.org/drawingml/2006/main">
+            <a:off x="914400" y="5086350"/>
+            <a:ext cx="6191250" cy="533400"/>
           </a:xfrm>
           <a:prstGeom xmlns:a="http://schemas.openxmlformats.org/drawingml/2006/main" prst="rect">
             <a:avLst/>
@@ -4691,37 +6543,273 @@
               </a:defRPr>
             </a:pPr>
             <a:r>
-              <a:t>Prompt includes teen nutrition safety constraints.</a:t>
-            </a:r>
-          </a:p>
-        </p:txBody>
-      </p:sp>
-      <p:pic>
-        <p:nvPicPr>
-          <p:cNvPr id="10" name=""/>
-          <p:cNvPicPr>
-            <a:picLocks xmlns:a="http://schemas.openxmlformats.org/drawingml/2006/main" noChangeAspect="1"/>
-          </p:cNvPicPr>
-          <p:nvPr/>
-        </p:nvPicPr>
-        <p:blipFill>
-          <a:blip xmlns:r="http://schemas.openxmlformats.org/officeDocument/2006/relationships" xmlns:a="http://schemas.openxmlformats.org/drawingml/2006/main" r:embed="Ree724a4b35a74a77"/>
-          <a:stretch xmlns:a="http://schemas.openxmlformats.org/drawingml/2006/main"/>
-        </p:blipFill>
-        <p:spPr>
-          <a:xfrm xmlns:a="http://schemas.openxmlformats.org/drawingml/2006/main">
-            <a:off x="8048896" y="704850"/>
-            <a:ext cx="3257008" cy="7048500"/>
-          </a:xfrm>
-          <a:prstGeom xmlns:a="http://schemas.openxmlformats.org/drawingml/2006/main" prst="rect">
-            <a:avLst/>
-          </a:prstGeom>
-        </p:spPr>
-      </p:pic>
+              <a:t>Deterministic, unit-tested scoring and roadmap engine.</a:t>
+            </a:r>
+          </a:p>
+        </p:txBody>
+      </p:sp>
+      <p:sp>
+        <p:nvSpPr>
+          <p:cNvPr id="17" name="">
+            <a:extLst xmlns:a="http://schemas.openxmlformats.org/drawingml/2006/main">
+              <a:ext uri="{FF2B5EF4-FFF2-40B4-BE49-F238E27FC236}">
+                <a16:creationId xmlns:a16="http://schemas.microsoft.com/office/drawing/2014/main" id="{94063938-6734-4104-AAA0-980354E1BD06}"/>
+              </a:ext>
+            </a:extLst>
+          </p:cNvPr>
+          <p:cNvSpPr>
+            <a:spLocks xmlns:a="http://schemas.openxmlformats.org/drawingml/2006/main" noGrp="1"/>
+          </p:cNvSpPr>
+          <p:nvPr/>
+        </p:nvSpPr>
+        <p:spPr>
+          <a:xfrm xmlns:a="http://schemas.openxmlformats.org/drawingml/2006/main">
+            <a:off x="7562850" y="3790950"/>
+            <a:ext cx="190500" cy="323850"/>
+          </a:xfrm>
+          <a:prstGeom xmlns:a="http://schemas.openxmlformats.org/drawingml/2006/main" prst="rect">
+            <a:avLst/>
+          </a:prstGeom>
+        </p:spPr>
+        <p:txBody>
+          <a:bodyPr xmlns:a="http://schemas.openxmlformats.org/drawingml/2006/main" wrap="square" lIns="0" tIns="0" rIns="0" bIns="0"/>
+          <a:lstStyle xmlns:a="http://schemas.openxmlformats.org/drawingml/2006/main"/>
+          <a:p xmlns:a="http://schemas.openxmlformats.org/drawingml/2006/main">
+            <a:pPr>
+              <a:defRPr sz="1875" b="1">
+                <a:solidFill>
+                  <a:srgbClr val="4DB6FF"/>
+                </a:solidFill>
+                <a:latin typeface="Avenir Next"/>
+                <a:ea typeface="Avenir Next"/>
+                <a:cs typeface="Avenir Next"/>
+              </a:defRPr>
+            </a:pPr>
+            <a:r>
+              <a:t>-</a:t>
+            </a:r>
+          </a:p>
+        </p:txBody>
+      </p:sp>
+      <p:sp>
+        <p:nvSpPr>
+          <p:cNvPr id="18" name="">
+            <a:extLst xmlns:a="http://schemas.openxmlformats.org/drawingml/2006/main">
+              <a:ext uri="{FF2B5EF4-FFF2-40B4-BE49-F238E27FC236}">
+                <a16:creationId xmlns:a16="http://schemas.microsoft.com/office/drawing/2014/main" id="{80992C3E-57F3-4B43-A585-BB813259F4EC}"/>
+              </a:ext>
+            </a:extLst>
+          </p:cNvPr>
+          <p:cNvSpPr>
+            <a:spLocks xmlns:a="http://schemas.openxmlformats.org/drawingml/2006/main" noGrp="1"/>
+          </p:cNvSpPr>
+          <p:nvPr/>
+        </p:nvSpPr>
+        <p:spPr>
+          <a:xfrm xmlns:a="http://schemas.openxmlformats.org/drawingml/2006/main">
+            <a:off x="7867650" y="3790950"/>
+            <a:ext cx="6191250" cy="533400"/>
+          </a:xfrm>
+          <a:prstGeom xmlns:a="http://schemas.openxmlformats.org/drawingml/2006/main" prst="rect">
+            <a:avLst/>
+          </a:prstGeom>
+        </p:spPr>
+        <p:txBody>
+          <a:bodyPr xmlns:a="http://schemas.openxmlformats.org/drawingml/2006/main" wrap="square" lIns="0" tIns="0" rIns="0" bIns="0"/>
+          <a:lstStyle xmlns:a="http://schemas.openxmlformats.org/drawingml/2006/main"/>
+          <a:p xmlns:a="http://schemas.openxmlformats.org/drawingml/2006/main">
+            <a:pPr>
+              <a:defRPr sz="1800" b="1">
+                <a:solidFill>
+                  <a:srgbClr val="F4F5F6"/>
+                </a:solidFill>
+                <a:latin typeface="Avenir Next"/>
+                <a:ea typeface="Avenir Next"/>
+                <a:cs typeface="Avenir Next"/>
+              </a:defRPr>
+            </a:pPr>
+            <a:r>
+              <a:t>Gemini 3.1 Flash Lite streaming AI coach + roadmap summaries.</a:t>
+            </a:r>
+          </a:p>
+        </p:txBody>
+      </p:sp>
+      <p:sp>
+        <p:nvSpPr>
+          <p:cNvPr id="19" name="">
+            <a:extLst xmlns:a="http://schemas.openxmlformats.org/drawingml/2006/main">
+              <a:ext uri="{FF2B5EF4-FFF2-40B4-BE49-F238E27FC236}">
+                <a16:creationId xmlns:a16="http://schemas.microsoft.com/office/drawing/2014/main" id="{D5DC9BBC-898D-4D55-8DCB-56D7D372C1DB}"/>
+              </a:ext>
+            </a:extLst>
+          </p:cNvPr>
+          <p:cNvSpPr>
+            <a:spLocks xmlns:a="http://schemas.openxmlformats.org/drawingml/2006/main" noGrp="1"/>
+          </p:cNvSpPr>
+          <p:nvPr/>
+        </p:nvSpPr>
+        <p:spPr>
+          <a:xfrm xmlns:a="http://schemas.openxmlformats.org/drawingml/2006/main">
+            <a:off x="7562850" y="4438650"/>
+            <a:ext cx="190500" cy="323850"/>
+          </a:xfrm>
+          <a:prstGeom xmlns:a="http://schemas.openxmlformats.org/drawingml/2006/main" prst="rect">
+            <a:avLst/>
+          </a:prstGeom>
+        </p:spPr>
+        <p:txBody>
+          <a:bodyPr xmlns:a="http://schemas.openxmlformats.org/drawingml/2006/main" wrap="square" lIns="0" tIns="0" rIns="0" bIns="0"/>
+          <a:lstStyle xmlns:a="http://schemas.openxmlformats.org/drawingml/2006/main"/>
+          <a:p xmlns:a="http://schemas.openxmlformats.org/drawingml/2006/main">
+            <a:pPr>
+              <a:defRPr sz="1875" b="1">
+                <a:solidFill>
+                  <a:srgbClr val="4DB6FF"/>
+                </a:solidFill>
+                <a:latin typeface="Avenir Next"/>
+                <a:ea typeface="Avenir Next"/>
+                <a:cs typeface="Avenir Next"/>
+              </a:defRPr>
+            </a:pPr>
+            <a:r>
+              <a:t>-</a:t>
+            </a:r>
+          </a:p>
+        </p:txBody>
+      </p:sp>
+      <p:sp>
+        <p:nvSpPr>
+          <p:cNvPr id="20" name="">
+            <a:extLst xmlns:a="http://schemas.openxmlformats.org/drawingml/2006/main">
+              <a:ext uri="{FF2B5EF4-FFF2-40B4-BE49-F238E27FC236}">
+                <a16:creationId xmlns:a16="http://schemas.microsoft.com/office/drawing/2014/main" id="{AFCEB1F1-500F-48B5-B425-E01DACDF3D6B}"/>
+              </a:ext>
+            </a:extLst>
+          </p:cNvPr>
+          <p:cNvSpPr>
+            <a:spLocks xmlns:a="http://schemas.openxmlformats.org/drawingml/2006/main" noGrp="1"/>
+          </p:cNvSpPr>
+          <p:nvPr/>
+        </p:nvSpPr>
+        <p:spPr>
+          <a:xfrm xmlns:a="http://schemas.openxmlformats.org/drawingml/2006/main">
+            <a:off x="7867650" y="4438650"/>
+            <a:ext cx="6191250" cy="533400"/>
+          </a:xfrm>
+          <a:prstGeom xmlns:a="http://schemas.openxmlformats.org/drawingml/2006/main" prst="rect">
+            <a:avLst/>
+          </a:prstGeom>
+        </p:spPr>
+        <p:txBody>
+          <a:bodyPr xmlns:a="http://schemas.openxmlformats.org/drawingml/2006/main" wrap="square" lIns="0" tIns="0" rIns="0" bIns="0"/>
+          <a:lstStyle xmlns:a="http://schemas.openxmlformats.org/drawingml/2006/main"/>
+          <a:p xmlns:a="http://schemas.openxmlformats.org/drawingml/2006/main">
+            <a:pPr>
+              <a:defRPr sz="1800" b="1">
+                <a:solidFill>
+                  <a:srgbClr val="F4F5F6"/>
+                </a:solidFill>
+                <a:latin typeface="Avenir Next"/>
+                <a:ea typeface="Avenir Next"/>
+                <a:cs typeface="Avenir Next"/>
+              </a:defRPr>
+            </a:pPr>
+            <a:r>
+              <a:t>USDA FoodData Central API for real macro math.</a:t>
+            </a:r>
+          </a:p>
+        </p:txBody>
+      </p:sp>
+      <p:sp>
+        <p:nvSpPr>
+          <p:cNvPr id="21" name="">
+            <a:extLst xmlns:a="http://schemas.openxmlformats.org/drawingml/2006/main">
+              <a:ext uri="{FF2B5EF4-FFF2-40B4-BE49-F238E27FC236}">
+                <a16:creationId xmlns:a16="http://schemas.microsoft.com/office/drawing/2014/main" id="{EDACEED9-6AF1-4374-8A86-80789B0A8A5C}"/>
+              </a:ext>
+            </a:extLst>
+          </p:cNvPr>
+          <p:cNvSpPr>
+            <a:spLocks xmlns:a="http://schemas.openxmlformats.org/drawingml/2006/main" noGrp="1"/>
+          </p:cNvSpPr>
+          <p:nvPr/>
+        </p:nvSpPr>
+        <p:spPr>
+          <a:xfrm xmlns:a="http://schemas.openxmlformats.org/drawingml/2006/main">
+            <a:off x="7562850" y="5086350"/>
+            <a:ext cx="190500" cy="323850"/>
+          </a:xfrm>
+          <a:prstGeom xmlns:a="http://schemas.openxmlformats.org/drawingml/2006/main" prst="rect">
+            <a:avLst/>
+          </a:prstGeom>
+        </p:spPr>
+        <p:txBody>
+          <a:bodyPr xmlns:a="http://schemas.openxmlformats.org/drawingml/2006/main" wrap="square" lIns="0" tIns="0" rIns="0" bIns="0"/>
+          <a:lstStyle xmlns:a="http://schemas.openxmlformats.org/drawingml/2006/main"/>
+          <a:p xmlns:a="http://schemas.openxmlformats.org/drawingml/2006/main">
+            <a:pPr>
+              <a:defRPr sz="1875" b="1">
+                <a:solidFill>
+                  <a:srgbClr val="4DB6FF"/>
+                </a:solidFill>
+                <a:latin typeface="Avenir Next"/>
+                <a:ea typeface="Avenir Next"/>
+                <a:cs typeface="Avenir Next"/>
+              </a:defRPr>
+            </a:pPr>
+            <a:r>
+              <a:t>-</a:t>
+            </a:r>
+          </a:p>
+        </p:txBody>
+      </p:sp>
+      <p:sp>
+        <p:nvSpPr>
+          <p:cNvPr id="22" name="">
+            <a:extLst xmlns:a="http://schemas.openxmlformats.org/drawingml/2006/main">
+              <a:ext uri="{FF2B5EF4-FFF2-40B4-BE49-F238E27FC236}">
+                <a16:creationId xmlns:a16="http://schemas.microsoft.com/office/drawing/2014/main" id="{F65CE75E-9D10-4D93-B432-21C5DEE02E86}"/>
+              </a:ext>
+            </a:extLst>
+          </p:cNvPr>
+          <p:cNvSpPr>
+            <a:spLocks xmlns:a="http://schemas.openxmlformats.org/drawingml/2006/main" noGrp="1"/>
+          </p:cNvSpPr>
+          <p:nvPr/>
+        </p:nvSpPr>
+        <p:spPr>
+          <a:xfrm xmlns:a="http://schemas.openxmlformats.org/drawingml/2006/main">
+            <a:off x="7867650" y="5086350"/>
+            <a:ext cx="6191250" cy="533400"/>
+          </a:xfrm>
+          <a:prstGeom xmlns:a="http://schemas.openxmlformats.org/drawingml/2006/main" prst="rect">
+            <a:avLst/>
+          </a:prstGeom>
+        </p:spPr>
+        <p:txBody>
+          <a:bodyPr xmlns:a="http://schemas.openxmlformats.org/drawingml/2006/main" wrap="square" lIns="0" tIns="0" rIns="0" bIns="0"/>
+          <a:lstStyle xmlns:a="http://schemas.openxmlformats.org/drawingml/2006/main"/>
+          <a:p xmlns:a="http://schemas.openxmlformats.org/drawingml/2006/main">
+            <a:pPr>
+              <a:defRPr sz="1800" b="1">
+                <a:solidFill>
+                  <a:srgbClr val="F4F5F6"/>
+                </a:solidFill>
+                <a:latin typeface="Avenir Next"/>
+                <a:ea typeface="Avenir Next"/>
+                <a:cs typeface="Avenir Next"/>
+              </a:defRPr>
+            </a:pPr>
+            <a:r>
+              <a:t>Teen-safe nutrition guardrails; deployed on Vercel.</a:t>
+            </a:r>
+          </a:p>
+        </p:txBody>
+      </p:sp>
     </p:spTree>
     <p:extLst>
       <p:ext uri="{BB962C8B-B14F-4D97-AF65-F5344CB8AC3E}">
-        <p14:creationId xmlns:p14="http://schemas.microsoft.com/office/powerpoint/2010/main" val="1052823812"/>
+        <p14:creationId xmlns:p14="http://schemas.microsoft.com/office/powerpoint/2010/main" val="1710880445"/>
       </p:ext>
     </p:extLst>
   </p:cSld>
@@ -4752,18 +6840,18 @@
           <p:cNvPr id="1" name="">
             <a:extLst xmlns:a="http://schemas.openxmlformats.org/drawingml/2006/main">
               <a:ext uri="{FF2B5EF4-FFF2-40B4-BE49-F238E27FC236}">
-                <a16:creationId xmlns:a16="http://schemas.microsoft.com/office/drawing/2014/main" id="{FFF41321-C035-4144-9C49-292B8E038000}"/>
-              </a:ext>
-            </a:extLst>
-          </p:cNvPr>
-          <p:cNvSpPr>
-            <a:spLocks xmlns:a="http://schemas.openxmlformats.org/drawingml/2006/main" noGrp="1"/>
-          </p:cNvSpPr>
-          <p:nvPr/>
-        </p:nvSpPr>
-        <p:spPr>
-          <a:xfrm xmlns:a="http://schemas.openxmlformats.org/drawingml/2006/main">
-            <a:off x="609600" y="609600"/>
+                <a16:creationId xmlns:a16="http://schemas.microsoft.com/office/drawing/2014/main" id="{49165F4F-0980-4EC2-A6B3-0D8F1BF5653F}"/>
+              </a:ext>
+            </a:extLst>
+          </p:cNvPr>
+          <p:cNvSpPr>
+            <a:spLocks xmlns:a="http://schemas.openxmlformats.org/drawingml/2006/main" noGrp="1"/>
+          </p:cNvSpPr>
+          <p:nvPr/>
+        </p:nvSpPr>
+        <p:spPr>
+          <a:xfrm xmlns:a="http://schemas.openxmlformats.org/drawingml/2006/main">
+            <a:off x="609600" y="1476375"/>
             <a:ext cx="9525000" cy="323850"/>
           </a:xfrm>
           <a:prstGeom xmlns:a="http://schemas.openxmlformats.org/drawingml/2006/main" prst="rect">
@@ -4785,7 +6873,7 @@
               </a:defRPr>
             </a:pPr>
             <a:r>
-              <a:t>CLINICAL GRADE</a:t>
+              <a:t>IMPACT</a:t>
             </a:r>
           </a:p>
         </p:txBody>
@@ -4795,19 +6883,19 @@
           <p:cNvPr id="2" name="">
             <a:extLst xmlns:a="http://schemas.openxmlformats.org/drawingml/2006/main">
               <a:ext uri="{FF2B5EF4-FFF2-40B4-BE49-F238E27FC236}">
-                <a16:creationId xmlns:a16="http://schemas.microsoft.com/office/drawing/2014/main" id="{41DFEAEF-A95B-4B34-BD15-4A4142D6A196}"/>
-              </a:ext>
-            </a:extLst>
-          </p:cNvPr>
-          <p:cNvSpPr>
-            <a:spLocks xmlns:a="http://schemas.openxmlformats.org/drawingml/2006/main" noGrp="1"/>
-          </p:cNvSpPr>
-          <p:nvPr/>
-        </p:nvSpPr>
-        <p:spPr>
-          <a:xfrm xmlns:a="http://schemas.openxmlformats.org/drawingml/2006/main">
-            <a:off x="609600" y="1257300"/>
-            <a:ext cx="11239500" cy="1428750"/>
+                <a16:creationId xmlns:a16="http://schemas.microsoft.com/office/drawing/2014/main" id="{68C29B71-1D4D-49B0-BDA4-FD2BF648EF2A}"/>
+              </a:ext>
+            </a:extLst>
+          </p:cNvPr>
+          <p:cNvSpPr>
+            <a:spLocks xmlns:a="http://schemas.openxmlformats.org/drawingml/2006/main" noGrp="1"/>
+          </p:cNvSpPr>
+          <p:nvPr/>
+        </p:nvSpPr>
+        <p:spPr>
+          <a:xfrm xmlns:a="http://schemas.openxmlformats.org/drawingml/2006/main">
+            <a:off x="609600" y="2028825"/>
+            <a:ext cx="7715250" cy="1428750"/>
           </a:xfrm>
           <a:prstGeom xmlns:a="http://schemas.openxmlformats.org/drawingml/2006/main" prst="rect">
             <a:avLst/>
@@ -4828,7 +6916,7 @@
               </a:defRPr>
             </a:pPr>
             <a:r>
-              <a:t>88-91 / 100 if the final deployment and hosted video land.</a:t>
+              <a:t>It turns a vague dream into a daily plan.</a:t>
             </a:r>
           </a:p>
         </p:txBody>
@@ -4838,83 +6926,83 @@
           <p:cNvPr id="3" name="">
             <a:extLst xmlns:a="http://schemas.openxmlformats.org/drawingml/2006/main">
               <a:ext uri="{FF2B5EF4-FFF2-40B4-BE49-F238E27FC236}">
-                <a16:creationId xmlns:a16="http://schemas.microsoft.com/office/drawing/2014/main" id="{2962F651-920F-4C9D-80EC-81944658EF83}"/>
-              </a:ext>
-            </a:extLst>
-          </p:cNvPr>
-          <p:cNvSpPr>
-            <a:spLocks xmlns:a="http://schemas.openxmlformats.org/drawingml/2006/main" noGrp="1"/>
-          </p:cNvSpPr>
-          <p:nvPr/>
-        </p:nvSpPr>
-        <p:spPr>
-          <a:xfrm xmlns:a="http://schemas.openxmlformats.org/drawingml/2006/main">
-            <a:off x="762000" y="3162300"/>
-            <a:ext cx="1809750" cy="552450"/>
-          </a:xfrm>
-          <a:prstGeom xmlns:a="http://schemas.openxmlformats.org/drawingml/2006/main" prst="rect">
-            <a:avLst/>
-          </a:prstGeom>
-        </p:spPr>
-        <p:txBody>
-          <a:bodyPr xmlns:a="http://schemas.openxmlformats.org/drawingml/2006/main" wrap="square" lIns="0" tIns="0" rIns="0" bIns="0"/>
-          <a:lstStyle xmlns:a="http://schemas.openxmlformats.org/drawingml/2006/main"/>
-          <a:p xmlns:a="http://schemas.openxmlformats.org/drawingml/2006/main">
-            <a:pPr>
-              <a:defRPr sz="3600" b="1">
+                <a16:creationId xmlns:a16="http://schemas.microsoft.com/office/drawing/2014/main" id="{EBE45A1C-402C-4007-84C5-CC6640E65BBA}"/>
+              </a:ext>
+            </a:extLst>
+          </p:cNvPr>
+          <p:cNvSpPr>
+            <a:spLocks xmlns:a="http://schemas.openxmlformats.org/drawingml/2006/main" noGrp="1"/>
+          </p:cNvSpPr>
+          <p:nvPr/>
+        </p:nvSpPr>
+        <p:spPr>
+          <a:xfrm xmlns:a="http://schemas.openxmlformats.org/drawingml/2006/main">
+            <a:off x="609600" y="3686175"/>
+            <a:ext cx="7524750" cy="1238250"/>
+          </a:xfrm>
+          <a:prstGeom xmlns:a="http://schemas.openxmlformats.org/drawingml/2006/main" prst="rect">
+            <a:avLst/>
+          </a:prstGeom>
+        </p:spPr>
+        <p:txBody>
+          <a:bodyPr xmlns:a="http://schemas.openxmlformats.org/drawingml/2006/main" wrap="square" lIns="0" tIns="0" rIns="0" bIns="0"/>
+          <a:lstStyle xmlns:a="http://schemas.openxmlformats.org/drawingml/2006/main"/>
+          <a:p xmlns:a="http://schemas.openxmlformats.org/drawingml/2006/main">
+            <a:pPr>
+              <a:defRPr sz="1875" b="0">
+                <a:solidFill>
+                  <a:srgbClr val="9AA1A9"/>
+                </a:solidFill>
+                <a:latin typeface="Avenir Next"/>
+                <a:ea typeface="Avenir Next"/>
+                <a:cs typeface="Avenir Next"/>
+              </a:defRPr>
+            </a:pPr>
+            <a:r>
+              <a:t>VarFoot helps an athlete like me know what to do, why it matters, and how today's session connects to the tryout goal.</a:t>
+            </a:r>
+          </a:p>
+        </p:txBody>
+      </p:sp>
+      <p:sp>
+        <p:nvSpPr>
+          <p:cNvPr id="4" name="">
+            <a:extLst xmlns:a="http://schemas.openxmlformats.org/drawingml/2006/main">
+              <a:ext uri="{FF2B5EF4-FFF2-40B4-BE49-F238E27FC236}">
+                <a16:creationId xmlns:a16="http://schemas.microsoft.com/office/drawing/2014/main" id="{7811D72D-4328-4A39-B02A-0B1B8F98A406}"/>
+              </a:ext>
+            </a:extLst>
+          </p:cNvPr>
+          <p:cNvSpPr>
+            <a:spLocks xmlns:a="http://schemas.openxmlformats.org/drawingml/2006/main" noGrp="1"/>
+          </p:cNvSpPr>
+          <p:nvPr/>
+        </p:nvSpPr>
+        <p:spPr>
+          <a:xfrm xmlns:a="http://schemas.openxmlformats.org/drawingml/2006/main">
+            <a:off x="609600" y="5153025"/>
+            <a:ext cx="190500" cy="323850"/>
+          </a:xfrm>
+          <a:prstGeom xmlns:a="http://schemas.openxmlformats.org/drawingml/2006/main" prst="rect">
+            <a:avLst/>
+          </a:prstGeom>
+        </p:spPr>
+        <p:txBody>
+          <a:bodyPr xmlns:a="http://schemas.openxmlformats.org/drawingml/2006/main" wrap="square" lIns="0" tIns="0" rIns="0" bIns="0"/>
+          <a:lstStyle xmlns:a="http://schemas.openxmlformats.org/drawingml/2006/main"/>
+          <a:p xmlns:a="http://schemas.openxmlformats.org/drawingml/2006/main">
+            <a:pPr>
+              <a:defRPr sz="1875" b="1">
                 <a:solidFill>
                   <a:srgbClr val="39FF73"/>
                 </a:solidFill>
-                <a:latin typeface="SF Mono"/>
-                <a:ea typeface="SF Mono"/>
-                <a:cs typeface="SF Mono"/>
-              </a:defRPr>
-            </a:pPr>
-            <a:r>
-              <a:t>36-38</a:t>
-            </a:r>
-          </a:p>
-        </p:txBody>
-      </p:sp>
-      <p:sp>
-        <p:nvSpPr>
-          <p:cNvPr id="4" name="">
-            <a:extLst xmlns:a="http://schemas.openxmlformats.org/drawingml/2006/main">
-              <a:ext uri="{FF2B5EF4-FFF2-40B4-BE49-F238E27FC236}">
-                <a16:creationId xmlns:a16="http://schemas.microsoft.com/office/drawing/2014/main" id="{E6BE88B5-EADD-4539-B040-0977F1E3CC24}"/>
-              </a:ext>
-            </a:extLst>
-          </p:cNvPr>
-          <p:cNvSpPr>
-            <a:spLocks xmlns:a="http://schemas.openxmlformats.org/drawingml/2006/main" noGrp="1"/>
-          </p:cNvSpPr>
-          <p:nvPr/>
-        </p:nvSpPr>
-        <p:spPr>
-          <a:xfrm xmlns:a="http://schemas.openxmlformats.org/drawingml/2006/main">
-            <a:off x="762000" y="3733800"/>
-            <a:ext cx="1714500" cy="381000"/>
-          </a:xfrm>
-          <a:prstGeom xmlns:a="http://schemas.openxmlformats.org/drawingml/2006/main" prst="rect">
-            <a:avLst/>
-          </a:prstGeom>
-        </p:spPr>
-        <p:txBody>
-          <a:bodyPr xmlns:a="http://schemas.openxmlformats.org/drawingml/2006/main" wrap="square" lIns="0" tIns="0" rIns="0" bIns="0"/>
-          <a:lstStyle xmlns:a="http://schemas.openxmlformats.org/drawingml/2006/main"/>
-          <a:p xmlns:a="http://schemas.openxmlformats.org/drawingml/2006/main">
-            <a:pPr>
-              <a:defRPr sz="1425" b="1">
-                <a:solidFill>
-                  <a:srgbClr val="9AA1A9"/>
-                </a:solidFill>
-                <a:latin typeface="Avenir Next"/>
-                <a:ea typeface="Avenir Next"/>
-                <a:cs typeface="Avenir Next"/>
-              </a:defRPr>
-            </a:pPr>
-            <a:r>
-              <a:t>impact / 40</a:t>
+                <a:latin typeface="Avenir Next"/>
+                <a:ea typeface="Avenir Next"/>
+                <a:cs typeface="Avenir Next"/>
+              </a:defRPr>
+            </a:pPr>
+            <a:r>
+              <a:t>-</a:t>
             </a:r>
           </a:p>
         </p:txBody>
@@ -4924,40 +7012,40 @@
           <p:cNvPr id="5" name="">
             <a:extLst xmlns:a="http://schemas.openxmlformats.org/drawingml/2006/main">
               <a:ext uri="{FF2B5EF4-FFF2-40B4-BE49-F238E27FC236}">
-                <a16:creationId xmlns:a16="http://schemas.microsoft.com/office/drawing/2014/main" id="{06E8CB8B-412E-4760-844D-9FFBEADC407D}"/>
-              </a:ext>
-            </a:extLst>
-          </p:cNvPr>
-          <p:cNvSpPr>
-            <a:spLocks xmlns:a="http://schemas.openxmlformats.org/drawingml/2006/main" noGrp="1"/>
-          </p:cNvSpPr>
-          <p:nvPr/>
-        </p:nvSpPr>
-        <p:spPr>
-          <a:xfrm xmlns:a="http://schemas.openxmlformats.org/drawingml/2006/main">
-            <a:off x="2990850" y="3162300"/>
-            <a:ext cx="1809750" cy="552450"/>
-          </a:xfrm>
-          <a:prstGeom xmlns:a="http://schemas.openxmlformats.org/drawingml/2006/main" prst="rect">
-            <a:avLst/>
-          </a:prstGeom>
-        </p:spPr>
-        <p:txBody>
-          <a:bodyPr xmlns:a="http://schemas.openxmlformats.org/drawingml/2006/main" wrap="square" lIns="0" tIns="0" rIns="0" bIns="0"/>
-          <a:lstStyle xmlns:a="http://schemas.openxmlformats.org/drawingml/2006/main"/>
-          <a:p xmlns:a="http://schemas.openxmlformats.org/drawingml/2006/main">
-            <a:pPr>
-              <a:defRPr sz="3600" b="1">
-                <a:solidFill>
-                  <a:srgbClr val="4DB6FF"/>
-                </a:solidFill>
-                <a:latin typeface="SF Mono"/>
-                <a:ea typeface="SF Mono"/>
-                <a:cs typeface="SF Mono"/>
-              </a:defRPr>
-            </a:pPr>
-            <a:r>
-              <a:t>26-28</a:t>
+                <a16:creationId xmlns:a16="http://schemas.microsoft.com/office/drawing/2014/main" id="{5737C462-25DE-4594-BA33-2E0A9024A997}"/>
+              </a:ext>
+            </a:extLst>
+          </p:cNvPr>
+          <p:cNvSpPr>
+            <a:spLocks xmlns:a="http://schemas.openxmlformats.org/drawingml/2006/main" noGrp="1"/>
+          </p:cNvSpPr>
+          <p:nvPr/>
+        </p:nvSpPr>
+        <p:spPr>
+          <a:xfrm xmlns:a="http://schemas.openxmlformats.org/drawingml/2006/main">
+            <a:off x="914400" y="5153025"/>
+            <a:ext cx="7048500" cy="533400"/>
+          </a:xfrm>
+          <a:prstGeom xmlns:a="http://schemas.openxmlformats.org/drawingml/2006/main" prst="rect">
+            <a:avLst/>
+          </a:prstGeom>
+        </p:spPr>
+        <p:txBody>
+          <a:bodyPr xmlns:a="http://schemas.openxmlformats.org/drawingml/2006/main" wrap="square" lIns="0" tIns="0" rIns="0" bIns="0"/>
+          <a:lstStyle xmlns:a="http://schemas.openxmlformats.org/drawingml/2006/main"/>
+          <a:p xmlns:a="http://schemas.openxmlformats.org/drawingml/2006/main">
+            <a:pPr>
+              <a:defRPr sz="1800" b="1">
+                <a:solidFill>
+                  <a:srgbClr val="F4F5F6"/>
+                </a:solidFill>
+                <a:latin typeface="Avenir Next"/>
+                <a:ea typeface="Avenir Next"/>
+                <a:cs typeface="Avenir Next"/>
+              </a:defRPr>
+            </a:pPr>
+            <a:r>
+              <a:t>Every session traces back to a measured weakness.</a:t>
             </a:r>
           </a:p>
         </p:txBody>
@@ -4967,40 +7055,40 @@
           <p:cNvPr id="6" name="">
             <a:extLst xmlns:a="http://schemas.openxmlformats.org/drawingml/2006/main">
               <a:ext uri="{FF2B5EF4-FFF2-40B4-BE49-F238E27FC236}">
-                <a16:creationId xmlns:a16="http://schemas.microsoft.com/office/drawing/2014/main" id="{2A9B2033-81ED-4D42-9B50-FC6DB9B336D9}"/>
-              </a:ext>
-            </a:extLst>
-          </p:cNvPr>
-          <p:cNvSpPr>
-            <a:spLocks xmlns:a="http://schemas.openxmlformats.org/drawingml/2006/main" noGrp="1"/>
-          </p:cNvSpPr>
-          <p:nvPr/>
-        </p:nvSpPr>
-        <p:spPr>
-          <a:xfrm xmlns:a="http://schemas.openxmlformats.org/drawingml/2006/main">
-            <a:off x="2990850" y="3733800"/>
-            <a:ext cx="1714500" cy="381000"/>
-          </a:xfrm>
-          <a:prstGeom xmlns:a="http://schemas.openxmlformats.org/drawingml/2006/main" prst="rect">
-            <a:avLst/>
-          </a:prstGeom>
-        </p:spPr>
-        <p:txBody>
-          <a:bodyPr xmlns:a="http://schemas.openxmlformats.org/drawingml/2006/main" wrap="square" lIns="0" tIns="0" rIns="0" bIns="0"/>
-          <a:lstStyle xmlns:a="http://schemas.openxmlformats.org/drawingml/2006/main"/>
-          <a:p xmlns:a="http://schemas.openxmlformats.org/drawingml/2006/main">
-            <a:pPr>
-              <a:defRPr sz="1425" b="1">
-                <a:solidFill>
-                  <a:srgbClr val="9AA1A9"/>
-                </a:solidFill>
-                <a:latin typeface="Avenir Next"/>
-                <a:ea typeface="Avenir Next"/>
-                <a:cs typeface="Avenir Next"/>
-              </a:defRPr>
-            </a:pPr>
-            <a:r>
-              <a:t>tech / 30</a:t>
+                <a16:creationId xmlns:a16="http://schemas.microsoft.com/office/drawing/2014/main" id="{4F9BDC85-E9AB-4B01-87AE-ADE64C594105}"/>
+              </a:ext>
+            </a:extLst>
+          </p:cNvPr>
+          <p:cNvSpPr>
+            <a:spLocks xmlns:a="http://schemas.openxmlformats.org/drawingml/2006/main" noGrp="1"/>
+          </p:cNvSpPr>
+          <p:nvPr/>
+        </p:nvSpPr>
+        <p:spPr>
+          <a:xfrm xmlns:a="http://schemas.openxmlformats.org/drawingml/2006/main">
+            <a:off x="609600" y="5800725"/>
+            <a:ext cx="190500" cy="323850"/>
+          </a:xfrm>
+          <a:prstGeom xmlns:a="http://schemas.openxmlformats.org/drawingml/2006/main" prst="rect">
+            <a:avLst/>
+          </a:prstGeom>
+        </p:spPr>
+        <p:txBody>
+          <a:bodyPr xmlns:a="http://schemas.openxmlformats.org/drawingml/2006/main" wrap="square" lIns="0" tIns="0" rIns="0" bIns="0"/>
+          <a:lstStyle xmlns:a="http://schemas.openxmlformats.org/drawingml/2006/main"/>
+          <a:p xmlns:a="http://schemas.openxmlformats.org/drawingml/2006/main">
+            <a:pPr>
+              <a:defRPr sz="1875" b="1">
+                <a:solidFill>
+                  <a:srgbClr val="39FF73"/>
+                </a:solidFill>
+                <a:latin typeface="Avenir Next"/>
+                <a:ea typeface="Avenir Next"/>
+                <a:cs typeface="Avenir Next"/>
+              </a:defRPr>
+            </a:pPr>
+            <a:r>
+              <a:t>-</a:t>
             </a:r>
           </a:p>
         </p:txBody>
@@ -5010,40 +7098,40 @@
           <p:cNvPr id="7" name="">
             <a:extLst xmlns:a="http://schemas.openxmlformats.org/drawingml/2006/main">
               <a:ext uri="{FF2B5EF4-FFF2-40B4-BE49-F238E27FC236}">
-                <a16:creationId xmlns:a16="http://schemas.microsoft.com/office/drawing/2014/main" id="{826F0E87-51F2-43B5-9158-7AAA7DFBA0AD}"/>
-              </a:ext>
-            </a:extLst>
-          </p:cNvPr>
-          <p:cNvSpPr>
-            <a:spLocks xmlns:a="http://schemas.openxmlformats.org/drawingml/2006/main" noGrp="1"/>
-          </p:cNvSpPr>
-          <p:nvPr/>
-        </p:nvSpPr>
-        <p:spPr>
-          <a:xfrm xmlns:a="http://schemas.openxmlformats.org/drawingml/2006/main">
-            <a:off x="5219700" y="3162300"/>
-            <a:ext cx="1809750" cy="552450"/>
-          </a:xfrm>
-          <a:prstGeom xmlns:a="http://schemas.openxmlformats.org/drawingml/2006/main" prst="rect">
-            <a:avLst/>
-          </a:prstGeom>
-        </p:spPr>
-        <p:txBody>
-          <a:bodyPr xmlns:a="http://schemas.openxmlformats.org/drawingml/2006/main" wrap="square" lIns="0" tIns="0" rIns="0" bIns="0"/>
-          <a:lstStyle xmlns:a="http://schemas.openxmlformats.org/drawingml/2006/main"/>
-          <a:p xmlns:a="http://schemas.openxmlformats.org/drawingml/2006/main">
-            <a:pPr>
-              <a:defRPr sz="3600" b="1">
-                <a:solidFill>
-                  <a:srgbClr val="FFD23F"/>
-                </a:solidFill>
-                <a:latin typeface="SF Mono"/>
-                <a:ea typeface="SF Mono"/>
-                <a:cs typeface="SF Mono"/>
-              </a:defRPr>
-            </a:pPr>
-            <a:r>
-              <a:t>17-18</a:t>
+                <a16:creationId xmlns:a16="http://schemas.microsoft.com/office/drawing/2014/main" id="{EEF4D0AB-946F-4475-B548-F3EF1BBC43BD}"/>
+              </a:ext>
+            </a:extLst>
+          </p:cNvPr>
+          <p:cNvSpPr>
+            <a:spLocks xmlns:a="http://schemas.openxmlformats.org/drawingml/2006/main" noGrp="1"/>
+          </p:cNvSpPr>
+          <p:nvPr/>
+        </p:nvSpPr>
+        <p:spPr>
+          <a:xfrm xmlns:a="http://schemas.openxmlformats.org/drawingml/2006/main">
+            <a:off x="914400" y="5800725"/>
+            <a:ext cx="7048500" cy="533400"/>
+          </a:xfrm>
+          <a:prstGeom xmlns:a="http://schemas.openxmlformats.org/drawingml/2006/main" prst="rect">
+            <a:avLst/>
+          </a:prstGeom>
+        </p:spPr>
+        <p:txBody>
+          <a:bodyPr xmlns:a="http://schemas.openxmlformats.org/drawingml/2006/main" wrap="square" lIns="0" tIns="0" rIns="0" bIns="0"/>
+          <a:lstStyle xmlns:a="http://schemas.openxmlformats.org/drawingml/2006/main"/>
+          <a:p xmlns:a="http://schemas.openxmlformats.org/drawingml/2006/main">
+            <a:pPr>
+              <a:defRPr sz="1800" b="1">
+                <a:solidFill>
+                  <a:srgbClr val="F4F5F6"/>
+                </a:solidFill>
+                <a:latin typeface="Avenir Next"/>
+                <a:ea typeface="Avenir Next"/>
+                <a:cs typeface="Avenir Next"/>
+              </a:defRPr>
+            </a:pPr>
+            <a:r>
+              <a:t>Progress is checked against varsity, not vibes.</a:t>
             </a:r>
           </a:p>
         </p:txBody>
@@ -5053,40 +7141,40 @@
           <p:cNvPr id="8" name="">
             <a:extLst xmlns:a="http://schemas.openxmlformats.org/drawingml/2006/main">
               <a:ext uri="{FF2B5EF4-FFF2-40B4-BE49-F238E27FC236}">
-                <a16:creationId xmlns:a16="http://schemas.microsoft.com/office/drawing/2014/main" id="{214EAF0B-B299-487B-86B6-4EB8426F7DB7}"/>
-              </a:ext>
-            </a:extLst>
-          </p:cNvPr>
-          <p:cNvSpPr>
-            <a:spLocks xmlns:a="http://schemas.openxmlformats.org/drawingml/2006/main" noGrp="1"/>
-          </p:cNvSpPr>
-          <p:nvPr/>
-        </p:nvSpPr>
-        <p:spPr>
-          <a:xfrm xmlns:a="http://schemas.openxmlformats.org/drawingml/2006/main">
-            <a:off x="5219700" y="3733800"/>
-            <a:ext cx="1714500" cy="381000"/>
-          </a:xfrm>
-          <a:prstGeom xmlns:a="http://schemas.openxmlformats.org/drawingml/2006/main" prst="rect">
-            <a:avLst/>
-          </a:prstGeom>
-        </p:spPr>
-        <p:txBody>
-          <a:bodyPr xmlns:a="http://schemas.openxmlformats.org/drawingml/2006/main" wrap="square" lIns="0" tIns="0" rIns="0" bIns="0"/>
-          <a:lstStyle xmlns:a="http://schemas.openxmlformats.org/drawingml/2006/main"/>
-          <a:p xmlns:a="http://schemas.openxmlformats.org/drawingml/2006/main">
-            <a:pPr>
-              <a:defRPr sz="1425" b="1">
-                <a:solidFill>
-                  <a:srgbClr val="9AA1A9"/>
-                </a:solidFill>
-                <a:latin typeface="Avenir Next"/>
-                <a:ea typeface="Avenir Next"/>
-                <a:cs typeface="Avenir Next"/>
-              </a:defRPr>
-            </a:pPr>
-            <a:r>
-              <a:t>design / 20</a:t>
+                <a16:creationId xmlns:a16="http://schemas.microsoft.com/office/drawing/2014/main" id="{AC57A5D3-16D8-48DE-BFC2-7998E9BCA3DE}"/>
+              </a:ext>
+            </a:extLst>
+          </p:cNvPr>
+          <p:cNvSpPr>
+            <a:spLocks xmlns:a="http://schemas.openxmlformats.org/drawingml/2006/main" noGrp="1"/>
+          </p:cNvSpPr>
+          <p:nvPr/>
+        </p:nvSpPr>
+        <p:spPr>
+          <a:xfrm xmlns:a="http://schemas.openxmlformats.org/drawingml/2006/main">
+            <a:off x="609600" y="6448425"/>
+            <a:ext cx="190500" cy="323850"/>
+          </a:xfrm>
+          <a:prstGeom xmlns:a="http://schemas.openxmlformats.org/drawingml/2006/main" prst="rect">
+            <a:avLst/>
+          </a:prstGeom>
+        </p:spPr>
+        <p:txBody>
+          <a:bodyPr xmlns:a="http://schemas.openxmlformats.org/drawingml/2006/main" wrap="square" lIns="0" tIns="0" rIns="0" bIns="0"/>
+          <a:lstStyle xmlns:a="http://schemas.openxmlformats.org/drawingml/2006/main"/>
+          <a:p xmlns:a="http://schemas.openxmlformats.org/drawingml/2006/main">
+            <a:pPr>
+              <a:defRPr sz="1875" b="1">
+                <a:solidFill>
+                  <a:srgbClr val="39FF73"/>
+                </a:solidFill>
+                <a:latin typeface="Avenir Next"/>
+                <a:ea typeface="Avenir Next"/>
+                <a:cs typeface="Avenir Next"/>
+              </a:defRPr>
+            </a:pPr>
+            <a:r>
+              <a:t>-</a:t>
             </a:r>
           </a:p>
         </p:txBody>
@@ -5096,191 +7184,19 @@
           <p:cNvPr id="9" name="">
             <a:extLst xmlns:a="http://schemas.openxmlformats.org/drawingml/2006/main">
               <a:ext uri="{FF2B5EF4-FFF2-40B4-BE49-F238E27FC236}">
-                <a16:creationId xmlns:a16="http://schemas.microsoft.com/office/drawing/2014/main" id="{25E4DE27-D5C3-4CC1-A783-6A0545EA884C}"/>
-              </a:ext>
-            </a:extLst>
-          </p:cNvPr>
-          <p:cNvSpPr>
-            <a:spLocks xmlns:a="http://schemas.openxmlformats.org/drawingml/2006/main" noGrp="1"/>
-          </p:cNvSpPr>
-          <p:nvPr/>
-        </p:nvSpPr>
-        <p:spPr>
-          <a:xfrm xmlns:a="http://schemas.openxmlformats.org/drawingml/2006/main">
-            <a:off x="7448550" y="3162300"/>
-            <a:ext cx="1809750" cy="552450"/>
-          </a:xfrm>
-          <a:prstGeom xmlns:a="http://schemas.openxmlformats.org/drawingml/2006/main" prst="rect">
-            <a:avLst/>
-          </a:prstGeom>
-        </p:spPr>
-        <p:txBody>
-          <a:bodyPr xmlns:a="http://schemas.openxmlformats.org/drawingml/2006/main" wrap="square" lIns="0" tIns="0" rIns="0" bIns="0"/>
-          <a:lstStyle xmlns:a="http://schemas.openxmlformats.org/drawingml/2006/main"/>
-          <a:p xmlns:a="http://schemas.openxmlformats.org/drawingml/2006/main">
-            <a:pPr>
-              <a:defRPr sz="3600" b="1">
-                <a:solidFill>
-                  <a:srgbClr val="39FF73"/>
-                </a:solidFill>
-                <a:latin typeface="SF Mono"/>
-                <a:ea typeface="SF Mono"/>
-                <a:cs typeface="SF Mono"/>
-              </a:defRPr>
-            </a:pPr>
-            <a:r>
-              <a:t>9</a:t>
-            </a:r>
-          </a:p>
-        </p:txBody>
-      </p:sp>
-      <p:sp>
-        <p:nvSpPr>
-          <p:cNvPr id="10" name="">
-            <a:extLst xmlns:a="http://schemas.openxmlformats.org/drawingml/2006/main">
-              <a:ext uri="{FF2B5EF4-FFF2-40B4-BE49-F238E27FC236}">
-                <a16:creationId xmlns:a16="http://schemas.microsoft.com/office/drawing/2014/main" id="{C3C68338-85BA-452A-B8E3-6DA2CB2BF1D6}"/>
-              </a:ext>
-            </a:extLst>
-          </p:cNvPr>
-          <p:cNvSpPr>
-            <a:spLocks xmlns:a="http://schemas.openxmlformats.org/drawingml/2006/main" noGrp="1"/>
-          </p:cNvSpPr>
-          <p:nvPr/>
-        </p:nvSpPr>
-        <p:spPr>
-          <a:xfrm xmlns:a="http://schemas.openxmlformats.org/drawingml/2006/main">
-            <a:off x="7448550" y="3733800"/>
-            <a:ext cx="1714500" cy="381000"/>
-          </a:xfrm>
-          <a:prstGeom xmlns:a="http://schemas.openxmlformats.org/drawingml/2006/main" prst="rect">
-            <a:avLst/>
-          </a:prstGeom>
-        </p:spPr>
-        <p:txBody>
-          <a:bodyPr xmlns:a="http://schemas.openxmlformats.org/drawingml/2006/main" wrap="square" lIns="0" tIns="0" rIns="0" bIns="0"/>
-          <a:lstStyle xmlns:a="http://schemas.openxmlformats.org/drawingml/2006/main"/>
-          <a:p xmlns:a="http://schemas.openxmlformats.org/drawingml/2006/main">
-            <a:pPr>
-              <a:defRPr sz="1425" b="1">
-                <a:solidFill>
-                  <a:srgbClr val="9AA1A9"/>
-                </a:solidFill>
-                <a:latin typeface="Avenir Next"/>
-                <a:ea typeface="Avenir Next"/>
-                <a:cs typeface="Avenir Next"/>
-              </a:defRPr>
-            </a:pPr>
-            <a:r>
-              <a:t>presentation / 10</a:t>
-            </a:r>
-          </a:p>
-        </p:txBody>
-      </p:sp>
-      <p:sp>
-        <p:nvSpPr>
-          <p:cNvPr id="11" name="">
-            <a:extLst xmlns:a="http://schemas.openxmlformats.org/drawingml/2006/main">
-              <a:ext uri="{FF2B5EF4-FFF2-40B4-BE49-F238E27FC236}">
-                <a16:creationId xmlns:a16="http://schemas.microsoft.com/office/drawing/2014/main" id="{2964463E-21FF-43E4-82DF-9B25850B22FB}"/>
-              </a:ext>
-            </a:extLst>
-          </p:cNvPr>
-          <p:cNvSpPr>
-            <a:spLocks xmlns:a="http://schemas.openxmlformats.org/drawingml/2006/main" noGrp="1"/>
-          </p:cNvSpPr>
-          <p:nvPr/>
-        </p:nvSpPr>
-        <p:spPr>
-          <a:xfrm xmlns:a="http://schemas.openxmlformats.org/drawingml/2006/main">
-            <a:off x="609600" y="4476750"/>
-            <a:ext cx="11525250" cy="952500"/>
-          </a:xfrm>
-          <a:prstGeom xmlns:a="http://schemas.openxmlformats.org/drawingml/2006/main" prst="rect">
-            <a:avLst/>
-          </a:prstGeom>
-        </p:spPr>
-        <p:txBody>
-          <a:bodyPr xmlns:a="http://schemas.openxmlformats.org/drawingml/2006/main" wrap="square" lIns="0" tIns="0" rIns="0" bIns="0"/>
-          <a:lstStyle xmlns:a="http://schemas.openxmlformats.org/drawingml/2006/main"/>
-          <a:p xmlns:a="http://schemas.openxmlformats.org/drawingml/2006/main">
-            <a:pPr>
-              <a:defRPr sz="1875" b="0">
-                <a:solidFill>
-                  <a:srgbClr val="9AA1A9"/>
-                </a:solidFill>
-                <a:latin typeface="Avenir Next"/>
-                <a:ea typeface="Avenir Next"/>
-                <a:cs typeface="Avenir Next"/>
-              </a:defRPr>
-            </a:pPr>
-            <a:r>
-              <a:t>The project is prize-contending because it has one clear person, a real problem, a working end-to-end app, and a demo path judges can understand quickly.</a:t>
-            </a:r>
-          </a:p>
-        </p:txBody>
-      </p:sp>
-      <p:sp>
-        <p:nvSpPr>
-          <p:cNvPr id="12" name="">
-            <a:extLst xmlns:a="http://schemas.openxmlformats.org/drawingml/2006/main">
-              <a:ext uri="{FF2B5EF4-FFF2-40B4-BE49-F238E27FC236}">
-                <a16:creationId xmlns:a16="http://schemas.microsoft.com/office/drawing/2014/main" id="{E69BFAE5-A493-4457-B45A-4FAE2588574B}"/>
-              </a:ext>
-            </a:extLst>
-          </p:cNvPr>
-          <p:cNvSpPr>
-            <a:spLocks xmlns:a="http://schemas.openxmlformats.org/drawingml/2006/main" noGrp="1"/>
-          </p:cNvSpPr>
-          <p:nvPr/>
-        </p:nvSpPr>
-        <p:spPr>
-          <a:xfrm xmlns:a="http://schemas.openxmlformats.org/drawingml/2006/main">
-            <a:off x="609600" y="5753100"/>
-            <a:ext cx="190500" cy="323850"/>
-          </a:xfrm>
-          <a:prstGeom xmlns:a="http://schemas.openxmlformats.org/drawingml/2006/main" prst="rect">
-            <a:avLst/>
-          </a:prstGeom>
-        </p:spPr>
-        <p:txBody>
-          <a:bodyPr xmlns:a="http://schemas.openxmlformats.org/drawingml/2006/main" wrap="square" lIns="0" tIns="0" rIns="0" bIns="0"/>
-          <a:lstStyle xmlns:a="http://schemas.openxmlformats.org/drawingml/2006/main"/>
-          <a:p xmlns:a="http://schemas.openxmlformats.org/drawingml/2006/main">
-            <a:pPr>
-              <a:defRPr sz="1875" b="1">
-                <a:solidFill>
-                  <a:srgbClr val="39FF73"/>
-                </a:solidFill>
-                <a:latin typeface="Avenir Next"/>
-                <a:ea typeface="Avenir Next"/>
-                <a:cs typeface="Avenir Next"/>
-              </a:defRPr>
-            </a:pPr>
-            <a:r>
-              <a:t>-</a:t>
-            </a:r>
-          </a:p>
-        </p:txBody>
-      </p:sp>
-      <p:sp>
-        <p:nvSpPr>
-          <p:cNvPr id="13" name="">
-            <a:extLst xmlns:a="http://schemas.openxmlformats.org/drawingml/2006/main">
-              <a:ext uri="{FF2B5EF4-FFF2-40B4-BE49-F238E27FC236}">
-                <a16:creationId xmlns:a16="http://schemas.microsoft.com/office/drawing/2014/main" id="{BBB9AF6B-3158-479F-ADF8-9233E91EF9ED}"/>
-              </a:ext>
-            </a:extLst>
-          </p:cNvPr>
-          <p:cNvSpPr>
-            <a:spLocks xmlns:a="http://schemas.openxmlformats.org/drawingml/2006/main" noGrp="1"/>
-          </p:cNvSpPr>
-          <p:nvPr/>
-        </p:nvSpPr>
-        <p:spPr>
-          <a:xfrm xmlns:a="http://schemas.openxmlformats.org/drawingml/2006/main">
-            <a:off x="914400" y="5753100"/>
-            <a:ext cx="11049000" cy="533400"/>
+                <a16:creationId xmlns:a16="http://schemas.microsoft.com/office/drawing/2014/main" id="{E6442A5F-2944-4FF4-85A0-96C7754BA4F0}"/>
+              </a:ext>
+            </a:extLst>
+          </p:cNvPr>
+          <p:cNvSpPr>
+            <a:spLocks xmlns:a="http://schemas.openxmlformats.org/drawingml/2006/main" noGrp="1"/>
+          </p:cNvSpPr>
+          <p:nvPr/>
+        </p:nvSpPr>
+        <p:spPr>
+          <a:xfrm xmlns:a="http://schemas.openxmlformats.org/drawingml/2006/main">
+            <a:off x="914400" y="6448425"/>
+            <a:ext cx="7048500" cy="533400"/>
           </a:xfrm>
           <a:prstGeom xmlns:a="http://schemas.openxmlformats.org/drawingml/2006/main" prst="rect">
             <a:avLst/>
@@ -5301,187 +7217,37 @@
               </a:defRPr>
             </a:pPr>
             <a:r>
-              <a:t>Lead with Jordan's uncertainty, then show how each screen removes it.</a:t>
-            </a:r>
-          </a:p>
-        </p:txBody>
-      </p:sp>
-      <p:sp>
-        <p:nvSpPr>
-          <p:cNvPr id="14" name="">
-            <a:extLst xmlns:a="http://schemas.openxmlformats.org/drawingml/2006/main">
-              <a:ext uri="{FF2B5EF4-FFF2-40B4-BE49-F238E27FC236}">
-                <a16:creationId xmlns:a16="http://schemas.microsoft.com/office/drawing/2014/main" id="{53B695DD-9D69-46C9-97D3-76D9D4C4ECD7}"/>
-              </a:ext>
-            </a:extLst>
-          </p:cNvPr>
-          <p:cNvSpPr>
-            <a:spLocks xmlns:a="http://schemas.openxmlformats.org/drawingml/2006/main" noGrp="1"/>
-          </p:cNvSpPr>
-          <p:nvPr/>
-        </p:nvSpPr>
-        <p:spPr>
-          <a:xfrm xmlns:a="http://schemas.openxmlformats.org/drawingml/2006/main">
-            <a:off x="609600" y="6400800"/>
-            <a:ext cx="190500" cy="323850"/>
-          </a:xfrm>
-          <a:prstGeom xmlns:a="http://schemas.openxmlformats.org/drawingml/2006/main" prst="rect">
-            <a:avLst/>
-          </a:prstGeom>
-        </p:spPr>
-        <p:txBody>
-          <a:bodyPr xmlns:a="http://schemas.openxmlformats.org/drawingml/2006/main" wrap="square" lIns="0" tIns="0" rIns="0" bIns="0"/>
-          <a:lstStyle xmlns:a="http://schemas.openxmlformats.org/drawingml/2006/main"/>
-          <a:p xmlns:a="http://schemas.openxmlformats.org/drawingml/2006/main">
-            <a:pPr>
-              <a:defRPr sz="1875" b="1">
-                <a:solidFill>
-                  <a:srgbClr val="39FF73"/>
-                </a:solidFill>
-                <a:latin typeface="Avenir Next"/>
-                <a:ea typeface="Avenir Next"/>
-                <a:cs typeface="Avenir Next"/>
-              </a:defRPr>
-            </a:pPr>
-            <a:r>
-              <a:t>-</a:t>
-            </a:r>
-          </a:p>
-        </p:txBody>
-      </p:sp>
-      <p:sp>
-        <p:nvSpPr>
-          <p:cNvPr id="15" name="">
-            <a:extLst xmlns:a="http://schemas.openxmlformats.org/drawingml/2006/main">
-              <a:ext uri="{FF2B5EF4-FFF2-40B4-BE49-F238E27FC236}">
-                <a16:creationId xmlns:a16="http://schemas.microsoft.com/office/drawing/2014/main" id="{0ADB01EA-0646-4925-AB96-33E89CEAF3CE}"/>
-              </a:ext>
-            </a:extLst>
-          </p:cNvPr>
-          <p:cNvSpPr>
-            <a:spLocks xmlns:a="http://schemas.openxmlformats.org/drawingml/2006/main" noGrp="1"/>
-          </p:cNvSpPr>
-          <p:nvPr/>
-        </p:nvSpPr>
-        <p:spPr>
-          <a:xfrm xmlns:a="http://schemas.openxmlformats.org/drawingml/2006/main">
-            <a:off x="914400" y="6400800"/>
-            <a:ext cx="11049000" cy="533400"/>
-          </a:xfrm>
-          <a:prstGeom xmlns:a="http://schemas.openxmlformats.org/drawingml/2006/main" prst="rect">
-            <a:avLst/>
-          </a:prstGeom>
-        </p:spPr>
-        <p:txBody>
-          <a:bodyPr xmlns:a="http://schemas.openxmlformats.org/drawingml/2006/main" wrap="square" lIns="0" tIns="0" rIns="0" bIns="0"/>
-          <a:lstStyle xmlns:a="http://schemas.openxmlformats.org/drawingml/2006/main"/>
-          <a:p xmlns:a="http://schemas.openxmlformats.org/drawingml/2006/main">
-            <a:pPr>
-              <a:defRPr sz="1800" b="1">
-                <a:solidFill>
-                  <a:srgbClr val="F4F5F6"/>
-                </a:solidFill>
-                <a:latin typeface="Avenir Next"/>
-                <a:ea typeface="Avenir Next"/>
-                <a:cs typeface="Avenir Next"/>
-              </a:defRPr>
-            </a:pPr>
-            <a:r>
-              <a:t>Use the demo athlete live; mention the full assessment, do not perform all 19 drills.</a:t>
-            </a:r>
-          </a:p>
-        </p:txBody>
-      </p:sp>
-      <p:sp>
-        <p:nvSpPr>
-          <p:cNvPr id="16" name="">
-            <a:extLst xmlns:a="http://schemas.openxmlformats.org/drawingml/2006/main">
-              <a:ext uri="{FF2B5EF4-FFF2-40B4-BE49-F238E27FC236}">
-                <a16:creationId xmlns:a16="http://schemas.microsoft.com/office/drawing/2014/main" id="{77BA4850-BCA3-4EFF-88F2-E8D9295E85D4}"/>
-              </a:ext>
-            </a:extLst>
-          </p:cNvPr>
-          <p:cNvSpPr>
-            <a:spLocks xmlns:a="http://schemas.openxmlformats.org/drawingml/2006/main" noGrp="1"/>
-          </p:cNvSpPr>
-          <p:nvPr/>
-        </p:nvSpPr>
-        <p:spPr>
-          <a:xfrm xmlns:a="http://schemas.openxmlformats.org/drawingml/2006/main">
-            <a:off x="609600" y="7048500"/>
-            <a:ext cx="190500" cy="323850"/>
-          </a:xfrm>
-          <a:prstGeom xmlns:a="http://schemas.openxmlformats.org/drawingml/2006/main" prst="rect">
-            <a:avLst/>
-          </a:prstGeom>
-        </p:spPr>
-        <p:txBody>
-          <a:bodyPr xmlns:a="http://schemas.openxmlformats.org/drawingml/2006/main" wrap="square" lIns="0" tIns="0" rIns="0" bIns="0"/>
-          <a:lstStyle xmlns:a="http://schemas.openxmlformats.org/drawingml/2006/main"/>
-          <a:p xmlns:a="http://schemas.openxmlformats.org/drawingml/2006/main">
-            <a:pPr>
-              <a:defRPr sz="1875" b="1">
-                <a:solidFill>
-                  <a:srgbClr val="39FF73"/>
-                </a:solidFill>
-                <a:latin typeface="Avenir Next"/>
-                <a:ea typeface="Avenir Next"/>
-                <a:cs typeface="Avenir Next"/>
-              </a:defRPr>
-            </a:pPr>
-            <a:r>
-              <a:t>-</a:t>
-            </a:r>
-          </a:p>
-        </p:txBody>
-      </p:sp>
-      <p:sp>
-        <p:nvSpPr>
-          <p:cNvPr id="17" name="">
-            <a:extLst xmlns:a="http://schemas.openxmlformats.org/drawingml/2006/main">
-              <a:ext uri="{FF2B5EF4-FFF2-40B4-BE49-F238E27FC236}">
-                <a16:creationId xmlns:a16="http://schemas.microsoft.com/office/drawing/2014/main" id="{789CF34C-69BD-4661-9DD7-6FA76CAC821D}"/>
-              </a:ext>
-            </a:extLst>
-          </p:cNvPr>
-          <p:cNvSpPr>
-            <a:spLocks xmlns:a="http://schemas.openxmlformats.org/drawingml/2006/main" noGrp="1"/>
-          </p:cNvSpPr>
-          <p:nvPr/>
-        </p:nvSpPr>
-        <p:spPr>
-          <a:xfrm xmlns:a="http://schemas.openxmlformats.org/drawingml/2006/main">
-            <a:off x="914400" y="7048500"/>
-            <a:ext cx="11049000" cy="533400"/>
-          </a:xfrm>
-          <a:prstGeom xmlns:a="http://schemas.openxmlformats.org/drawingml/2006/main" prst="rect">
-            <a:avLst/>
-          </a:prstGeom>
-        </p:spPr>
-        <p:txBody>
-          <a:bodyPr xmlns:a="http://schemas.openxmlformats.org/drawingml/2006/main" wrap="square" lIns="0" tIns="0" rIns="0" bIns="0"/>
-          <a:lstStyle xmlns:a="http://schemas.openxmlformats.org/drawingml/2006/main"/>
-          <a:p xmlns:a="http://schemas.openxmlformats.org/drawingml/2006/main">
-            <a:pPr>
-              <a:defRPr sz="1800" b="1">
-                <a:solidFill>
-                  <a:srgbClr val="F4F5F6"/>
-                </a:solidFill>
-                <a:latin typeface="Avenir Next"/>
-                <a:ea typeface="Avenir Next"/>
-                <a:cs typeface="Avenir Next"/>
-              </a:defRPr>
-            </a:pPr>
-            <a:r>
-              <a:t>Upload the generated 2:08 walkthrough to YouTube or Vimeo before Devpost submission.</a:t>
-            </a:r>
-          </a:p>
-        </p:txBody>
-      </p:sp>
+              <a:t>The same problem belongs to thousands of players with no plan.</a:t>
+            </a:r>
+          </a:p>
+        </p:txBody>
+      </p:sp>
+      <p:pic>
+        <p:nvPicPr>
+          <p:cNvPr id="10" name=""/>
+          <p:cNvPicPr>
+            <a:picLocks xmlns:a="http://schemas.openxmlformats.org/drawingml/2006/main" noChangeAspect="1"/>
+          </p:cNvPicPr>
+          <p:nvPr/>
+        </p:nvPicPr>
+        <p:blipFill>
+          <a:blip xmlns:r="http://schemas.openxmlformats.org/officeDocument/2006/relationships" xmlns:a="http://schemas.openxmlformats.org/drawingml/2006/main" r:embed="Re6d1d7e5f7df4510"/>
+          <a:stretch xmlns:a="http://schemas.openxmlformats.org/drawingml/2006/main"/>
+        </p:blipFill>
+        <p:spPr>
+          <a:xfrm xmlns:a="http://schemas.openxmlformats.org/drawingml/2006/main">
+            <a:off x="9172846" y="704850"/>
+            <a:ext cx="3257008" cy="7048500"/>
+          </a:xfrm>
+          <a:prstGeom xmlns:a="http://schemas.openxmlformats.org/drawingml/2006/main" prst="rect">
+            <a:avLst/>
+          </a:prstGeom>
+        </p:spPr>
+      </p:pic>
     </p:spTree>
     <p:extLst>
       <p:ext uri="{BB962C8B-B14F-4D97-AF65-F5344CB8AC3E}">
-        <p14:creationId xmlns:p14="http://schemas.microsoft.com/office/powerpoint/2010/main" val="1031475049"/>
+        <p14:creationId xmlns:p14="http://schemas.microsoft.com/office/powerpoint/2010/main" val="843092151"/>
       </p:ext>
     </p:extLst>
   </p:cSld>
@@ -5512,18 +7278,18 @@
           <p:cNvPr id="1" name="">
             <a:extLst xmlns:a="http://schemas.openxmlformats.org/drawingml/2006/main">
               <a:ext uri="{FF2B5EF4-FFF2-40B4-BE49-F238E27FC236}">
-                <a16:creationId xmlns:a16="http://schemas.microsoft.com/office/drawing/2014/main" id="{D0BEDE90-D5CC-4786-B2C0-65E55C2DF8CB}"/>
-              </a:ext>
-            </a:extLst>
-          </p:cNvPr>
-          <p:cNvSpPr>
-            <a:spLocks xmlns:a="http://schemas.openxmlformats.org/drawingml/2006/main" noGrp="1"/>
-          </p:cNvSpPr>
-          <p:nvPr/>
-        </p:nvSpPr>
-        <p:spPr>
-          <a:xfrm xmlns:a="http://schemas.openxmlformats.org/drawingml/2006/main">
-            <a:off x="609600" y="1524000"/>
+                <a16:creationId xmlns:a16="http://schemas.microsoft.com/office/drawing/2014/main" id="{8F9CEFC6-6F9D-4C5A-8AF1-CDE13D7B17F1}"/>
+              </a:ext>
+            </a:extLst>
+          </p:cNvPr>
+          <p:cNvSpPr>
+            <a:spLocks xmlns:a="http://schemas.openxmlformats.org/drawingml/2006/main" noGrp="1"/>
+          </p:cNvSpPr>
+          <p:nvPr/>
+        </p:nvSpPr>
+        <p:spPr>
+          <a:xfrm xmlns:a="http://schemas.openxmlformats.org/drawingml/2006/main">
+            <a:off x="609600" y="609600"/>
             <a:ext cx="9525000" cy="323850"/>
           </a:xfrm>
           <a:prstGeom xmlns:a="http://schemas.openxmlformats.org/drawingml/2006/main" prst="rect">
@@ -5545,7 +7311,7 @@
               </a:defRPr>
             </a:pPr>
             <a:r>
-              <a:t>DEMO CLOSE</a:t>
+              <a:t>WHAT CHANGED BECAUSE OF VARFOOT</a:t>
             </a:r>
           </a:p>
         </p:txBody>
@@ -5555,30 +7321,30 @@
           <p:cNvPr id="2" name="">
             <a:extLst xmlns:a="http://schemas.openxmlformats.org/drawingml/2006/main">
               <a:ext uri="{FF2B5EF4-FFF2-40B4-BE49-F238E27FC236}">
-                <a16:creationId xmlns:a16="http://schemas.microsoft.com/office/drawing/2014/main" id="{7C0DAA44-C1C6-4CE9-8739-C340ADBB5139}"/>
-              </a:ext>
-            </a:extLst>
-          </p:cNvPr>
-          <p:cNvSpPr>
-            <a:spLocks xmlns:a="http://schemas.openxmlformats.org/drawingml/2006/main" noGrp="1"/>
-          </p:cNvSpPr>
-          <p:nvPr/>
-        </p:nvSpPr>
-        <p:spPr>
-          <a:xfrm xmlns:a="http://schemas.openxmlformats.org/drawingml/2006/main">
-            <a:off x="609600" y="2076450"/>
-            <a:ext cx="7810500" cy="1428750"/>
-          </a:xfrm>
-          <a:prstGeom xmlns:a="http://schemas.openxmlformats.org/drawingml/2006/main" prst="rect">
-            <a:avLst/>
-          </a:prstGeom>
-        </p:spPr>
-        <p:txBody>
-          <a:bodyPr xmlns:a="http://schemas.openxmlformats.org/drawingml/2006/main" wrap="square" lIns="0" tIns="0" rIns="0" bIns="0"/>
-          <a:lstStyle xmlns:a="http://schemas.openxmlformats.org/drawingml/2006/main"/>
-          <a:p xmlns:a="http://schemas.openxmlformats.org/drawingml/2006/main">
-            <a:pPr>
-              <a:defRPr sz="4350" b="1">
+                <a16:creationId xmlns:a16="http://schemas.microsoft.com/office/drawing/2014/main" id="{560F79D0-9AB3-432F-97FA-54B61B1B2548}"/>
+              </a:ext>
+            </a:extLst>
+          </p:cNvPr>
+          <p:cNvSpPr>
+            <a:spLocks xmlns:a="http://schemas.openxmlformats.org/drawingml/2006/main" noGrp="1"/>
+          </p:cNvSpPr>
+          <p:nvPr/>
+        </p:nvSpPr>
+        <p:spPr>
+          <a:xfrm xmlns:a="http://schemas.openxmlformats.org/drawingml/2006/main">
+            <a:off x="609600" y="1219200"/>
+            <a:ext cx="11239500" cy="1143000"/>
+          </a:xfrm>
+          <a:prstGeom xmlns:a="http://schemas.openxmlformats.org/drawingml/2006/main" prst="rect">
+            <a:avLst/>
+          </a:prstGeom>
+        </p:spPr>
+        <p:txBody>
+          <a:bodyPr xmlns:a="http://schemas.openxmlformats.org/drawingml/2006/main" wrap="square" lIns="0" tIns="0" rIns="0" bIns="0"/>
+          <a:lstStyle xmlns:a="http://schemas.openxmlformats.org/drawingml/2006/main"/>
+          <a:p xmlns:a="http://schemas.openxmlformats.org/drawingml/2006/main">
+            <a:pPr>
+              <a:defRPr sz="3300" b="1">
                 <a:solidFill>
                   <a:srgbClr val="F4F5F6"/>
                 </a:solidFill>
@@ -5588,7 +7354,7 @@
               </a:defRPr>
             </a:pPr>
             <a:r>
-              <a:t>VarFoot is not motivation. It is the next right step.</a:t>
+              <a:t>Before and after.</a:t>
             </a:r>
           </a:p>
         </p:txBody>
@@ -5598,40 +7364,40 @@
           <p:cNvPr id="3" name="">
             <a:extLst xmlns:a="http://schemas.openxmlformats.org/drawingml/2006/main">
               <a:ext uri="{FF2B5EF4-FFF2-40B4-BE49-F238E27FC236}">
-                <a16:creationId xmlns:a16="http://schemas.microsoft.com/office/drawing/2014/main" id="{DEDD8BF4-D1DC-44E2-BD3B-0D11F4E27BB8}"/>
-              </a:ext>
-            </a:extLst>
-          </p:cNvPr>
-          <p:cNvSpPr>
-            <a:spLocks xmlns:a="http://schemas.openxmlformats.org/drawingml/2006/main" noGrp="1"/>
-          </p:cNvSpPr>
-          <p:nvPr/>
-        </p:nvSpPr>
-        <p:spPr>
-          <a:xfrm xmlns:a="http://schemas.openxmlformats.org/drawingml/2006/main">
-            <a:off x="609600" y="3733800"/>
-            <a:ext cx="7429500" cy="1143000"/>
-          </a:xfrm>
-          <a:prstGeom xmlns:a="http://schemas.openxmlformats.org/drawingml/2006/main" prst="rect">
-            <a:avLst/>
-          </a:prstGeom>
-        </p:spPr>
-        <p:txBody>
-          <a:bodyPr xmlns:a="http://schemas.openxmlformats.org/drawingml/2006/main" wrap="square" lIns="0" tIns="0" rIns="0" bIns="0"/>
-          <a:lstStyle xmlns:a="http://schemas.openxmlformats.org/drawingml/2006/main"/>
-          <a:p xmlns:a="http://schemas.openxmlformats.org/drawingml/2006/main">
-            <a:pPr>
-              <a:defRPr sz="1875" b="0">
-                <a:solidFill>
-                  <a:srgbClr val="9AA1A9"/>
-                </a:solidFill>
-                <a:latin typeface="Avenir Next"/>
-                <a:ea typeface="Avenir Next"/>
-                <a:cs typeface="Avenir Next"/>
-              </a:defRPr>
-            </a:pPr>
-            <a:r>
-              <a:t>For Jordan, the app answers the question that matters: what should I do today to become varsity-ready?</a:t>
+                <a16:creationId xmlns:a16="http://schemas.microsoft.com/office/drawing/2014/main" id="{25EEFDD4-DAF8-4BCF-AD97-2757B094D203}"/>
+              </a:ext>
+            </a:extLst>
+          </p:cNvPr>
+          <p:cNvSpPr>
+            <a:spLocks xmlns:a="http://schemas.openxmlformats.org/drawingml/2006/main" noGrp="1"/>
+          </p:cNvSpPr>
+          <p:nvPr/>
+        </p:nvSpPr>
+        <p:spPr>
+          <a:xfrm xmlns:a="http://schemas.openxmlformats.org/drawingml/2006/main">
+            <a:off x="609600" y="2647950"/>
+            <a:ext cx="6572250" cy="381000"/>
+          </a:xfrm>
+          <a:prstGeom xmlns:a="http://schemas.openxmlformats.org/drawingml/2006/main" prst="rect">
+            <a:avLst/>
+          </a:prstGeom>
+        </p:spPr>
+        <p:txBody>
+          <a:bodyPr xmlns:a="http://schemas.openxmlformats.org/drawingml/2006/main" wrap="square" lIns="0" tIns="0" rIns="0" bIns="0"/>
+          <a:lstStyle xmlns:a="http://schemas.openxmlformats.org/drawingml/2006/main"/>
+          <a:p xmlns:a="http://schemas.openxmlformats.org/drawingml/2006/main">
+            <a:pPr>
+              <a:defRPr sz="1650" b="1">
+                <a:solidFill>
+                  <a:srgbClr val="FF6B5E"/>
+                </a:solidFill>
+                <a:latin typeface="Avenir Next"/>
+                <a:ea typeface="Avenir Next"/>
+                <a:cs typeface="Avenir Next"/>
+              </a:defRPr>
+            </a:pPr>
+            <a:r>
+              <a:t>BEFORE</a:t>
             </a:r>
           </a:p>
         </p:txBody>
@@ -5641,18 +7407,18 @@
           <p:cNvPr id="4" name="">
             <a:extLst xmlns:a="http://schemas.openxmlformats.org/drawingml/2006/main">
               <a:ext uri="{FF2B5EF4-FFF2-40B4-BE49-F238E27FC236}">
-                <a16:creationId xmlns:a16="http://schemas.microsoft.com/office/drawing/2014/main" id="{54EB5ED3-48F4-4DA6-9336-9CE08B9B534A}"/>
-              </a:ext>
-            </a:extLst>
-          </p:cNvPr>
-          <p:cNvSpPr>
-            <a:spLocks xmlns:a="http://schemas.openxmlformats.org/drawingml/2006/main" noGrp="1"/>
-          </p:cNvSpPr>
-          <p:nvPr/>
-        </p:nvSpPr>
-        <p:spPr>
-          <a:xfrm xmlns:a="http://schemas.openxmlformats.org/drawingml/2006/main">
-            <a:off x="609600" y="5105400"/>
+                <a16:creationId xmlns:a16="http://schemas.microsoft.com/office/drawing/2014/main" id="{84C4CDF3-35EA-426E-9F09-C7EF0C90D79F}"/>
+              </a:ext>
+            </a:extLst>
+          </p:cNvPr>
+          <p:cNvSpPr>
+            <a:spLocks xmlns:a="http://schemas.openxmlformats.org/drawingml/2006/main" noGrp="1"/>
+          </p:cNvSpPr>
+          <p:nvPr/>
+        </p:nvSpPr>
+        <p:spPr>
+          <a:xfrm xmlns:a="http://schemas.openxmlformats.org/drawingml/2006/main">
+            <a:off x="609600" y="3181350"/>
             <a:ext cx="190500" cy="323850"/>
           </a:xfrm>
           <a:prstGeom xmlns:a="http://schemas.openxmlformats.org/drawingml/2006/main" prst="rect">
@@ -5666,7 +7432,7 @@
             <a:pPr>
               <a:defRPr sz="1875" b="1">
                 <a:solidFill>
-                  <a:srgbClr val="4DB6FF"/>
+                  <a:srgbClr val="FF6B5E"/>
                 </a:solidFill>
                 <a:latin typeface="Avenir Next"/>
                 <a:ea typeface="Avenir Next"/>
@@ -5684,19 +7450,19 @@
           <p:cNvPr id="5" name="">
             <a:extLst xmlns:a="http://schemas.openxmlformats.org/drawingml/2006/main">
               <a:ext uri="{FF2B5EF4-FFF2-40B4-BE49-F238E27FC236}">
-                <a16:creationId xmlns:a16="http://schemas.microsoft.com/office/drawing/2014/main" id="{D57CA7B2-84E4-476A-80E0-700121006A21}"/>
-              </a:ext>
-            </a:extLst>
-          </p:cNvPr>
-          <p:cNvSpPr>
-            <a:spLocks xmlns:a="http://schemas.openxmlformats.org/drawingml/2006/main" noGrp="1"/>
-          </p:cNvSpPr>
-          <p:nvPr/>
-        </p:nvSpPr>
-        <p:spPr>
-          <a:xfrm xmlns:a="http://schemas.openxmlformats.org/drawingml/2006/main">
-            <a:off x="914400" y="5105400"/>
-            <a:ext cx="6858000" cy="533400"/>
+                <a16:creationId xmlns:a16="http://schemas.microsoft.com/office/drawing/2014/main" id="{35E987C0-BEB9-461E-AB05-C4C002A35F97}"/>
+              </a:ext>
+            </a:extLst>
+          </p:cNvPr>
+          <p:cNvSpPr>
+            <a:spLocks xmlns:a="http://schemas.openxmlformats.org/drawingml/2006/main" noGrp="1"/>
+          </p:cNvSpPr>
+          <p:nvPr/>
+        </p:nvSpPr>
+        <p:spPr>
+          <a:xfrm xmlns:a="http://schemas.openxmlformats.org/drawingml/2006/main">
+            <a:off x="914400" y="3181350"/>
+            <a:ext cx="6191250" cy="533400"/>
           </a:xfrm>
           <a:prstGeom xmlns:a="http://schemas.openxmlformats.org/drawingml/2006/main" prst="rect">
             <a:avLst/>
@@ -5717,7 +7483,7 @@
               </a:defRPr>
             </a:pPr>
             <a:r>
-              <a:t>Live app: varfoot.vercel.app</a:t>
+              <a:t>Random training, unclear priorities.</a:t>
             </a:r>
           </a:p>
         </p:txBody>
@@ -5727,18 +7493,18 @@
           <p:cNvPr id="6" name="">
             <a:extLst xmlns:a="http://schemas.openxmlformats.org/drawingml/2006/main">
               <a:ext uri="{FF2B5EF4-FFF2-40B4-BE49-F238E27FC236}">
-                <a16:creationId xmlns:a16="http://schemas.microsoft.com/office/drawing/2014/main" id="{7832EA03-120A-470F-AC59-5F3F72937F68}"/>
-              </a:ext>
-            </a:extLst>
-          </p:cNvPr>
-          <p:cNvSpPr>
-            <a:spLocks xmlns:a="http://schemas.openxmlformats.org/drawingml/2006/main" noGrp="1"/>
-          </p:cNvSpPr>
-          <p:nvPr/>
-        </p:nvSpPr>
-        <p:spPr>
-          <a:xfrm xmlns:a="http://schemas.openxmlformats.org/drawingml/2006/main">
-            <a:off x="609600" y="5753100"/>
+                <a16:creationId xmlns:a16="http://schemas.microsoft.com/office/drawing/2014/main" id="{F81AE166-FFE3-4C4C-A4C1-19FA3C74483A}"/>
+              </a:ext>
+            </a:extLst>
+          </p:cNvPr>
+          <p:cNvSpPr>
+            <a:spLocks xmlns:a="http://schemas.openxmlformats.org/drawingml/2006/main" noGrp="1"/>
+          </p:cNvSpPr>
+          <p:nvPr/>
+        </p:nvSpPr>
+        <p:spPr>
+          <a:xfrm xmlns:a="http://schemas.openxmlformats.org/drawingml/2006/main">
+            <a:off x="609600" y="3829050"/>
             <a:ext cx="190500" cy="323850"/>
           </a:xfrm>
           <a:prstGeom xmlns:a="http://schemas.openxmlformats.org/drawingml/2006/main" prst="rect">
@@ -5752,7 +7518,7 @@
             <a:pPr>
               <a:defRPr sz="1875" b="1">
                 <a:solidFill>
-                  <a:srgbClr val="4DB6FF"/>
+                  <a:srgbClr val="FF6B5E"/>
                 </a:solidFill>
                 <a:latin typeface="Avenir Next"/>
                 <a:ea typeface="Avenir Next"/>
@@ -5770,19 +7536,19 @@
           <p:cNvPr id="7" name="">
             <a:extLst xmlns:a="http://schemas.openxmlformats.org/drawingml/2006/main">
               <a:ext uri="{FF2B5EF4-FFF2-40B4-BE49-F238E27FC236}">
-                <a16:creationId xmlns:a16="http://schemas.microsoft.com/office/drawing/2014/main" id="{DC2BAE72-AEA5-4E3A-8DA9-F2FE1DA34EAD}"/>
-              </a:ext>
-            </a:extLst>
-          </p:cNvPr>
-          <p:cNvSpPr>
-            <a:spLocks xmlns:a="http://schemas.openxmlformats.org/drawingml/2006/main" noGrp="1"/>
-          </p:cNvSpPr>
-          <p:nvPr/>
-        </p:nvSpPr>
-        <p:spPr>
-          <a:xfrm xmlns:a="http://schemas.openxmlformats.org/drawingml/2006/main">
-            <a:off x="914400" y="5753100"/>
-            <a:ext cx="6858000" cy="533400"/>
+                <a16:creationId xmlns:a16="http://schemas.microsoft.com/office/drawing/2014/main" id="{B884D31B-97D9-4C1A-B656-5EE94160E707}"/>
+              </a:ext>
+            </a:extLst>
+          </p:cNvPr>
+          <p:cNvSpPr>
+            <a:spLocks xmlns:a="http://schemas.openxmlformats.org/drawingml/2006/main" noGrp="1"/>
+          </p:cNvSpPr>
+          <p:nvPr/>
+        </p:nvSpPr>
+        <p:spPr>
+          <a:xfrm xmlns:a="http://schemas.openxmlformats.org/drawingml/2006/main">
+            <a:off x="914400" y="3829050"/>
+            <a:ext cx="6191250" cy="533400"/>
           </a:xfrm>
           <a:prstGeom xmlns:a="http://schemas.openxmlformats.org/drawingml/2006/main" prst="rect">
             <a:avLst/>
@@ -5803,7 +7569,7 @@
               </a:defRPr>
             </a:pPr>
             <a:r>
-              <a:t>Demo button: Explore demo athlete</a:t>
+              <a:t>No way to know if the work matched the varsity goal.</a:t>
             </a:r>
           </a:p>
         </p:txBody>
@@ -5813,18 +7579,18 @@
           <p:cNvPr id="8" name="">
             <a:extLst xmlns:a="http://schemas.openxmlformats.org/drawingml/2006/main">
               <a:ext uri="{FF2B5EF4-FFF2-40B4-BE49-F238E27FC236}">
-                <a16:creationId xmlns:a16="http://schemas.microsoft.com/office/drawing/2014/main" id="{B3686404-6A1B-4C24-B0CF-30F9B63DD312}"/>
-              </a:ext>
-            </a:extLst>
-          </p:cNvPr>
-          <p:cNvSpPr>
-            <a:spLocks xmlns:a="http://schemas.openxmlformats.org/drawingml/2006/main" noGrp="1"/>
-          </p:cNvSpPr>
-          <p:nvPr/>
-        </p:nvSpPr>
-        <p:spPr>
-          <a:xfrm xmlns:a="http://schemas.openxmlformats.org/drawingml/2006/main">
-            <a:off x="609600" y="6400800"/>
+                <a16:creationId xmlns:a16="http://schemas.microsoft.com/office/drawing/2014/main" id="{DE911872-B35A-485B-9346-FD87793E747B}"/>
+              </a:ext>
+            </a:extLst>
+          </p:cNvPr>
+          <p:cNvSpPr>
+            <a:spLocks xmlns:a="http://schemas.openxmlformats.org/drawingml/2006/main" noGrp="1"/>
+          </p:cNvSpPr>
+          <p:nvPr/>
+        </p:nvSpPr>
+        <p:spPr>
+          <a:xfrm xmlns:a="http://schemas.openxmlformats.org/drawingml/2006/main">
+            <a:off x="609600" y="4476750"/>
             <a:ext cx="190500" cy="323850"/>
           </a:xfrm>
           <a:prstGeom xmlns:a="http://schemas.openxmlformats.org/drawingml/2006/main" prst="rect">
@@ -5838,7 +7604,7 @@
             <a:pPr>
               <a:defRPr sz="1875" b="1">
                 <a:solidFill>
-                  <a:srgbClr val="4DB6FF"/>
+                  <a:srgbClr val="FF6B5E"/>
                 </a:solidFill>
                 <a:latin typeface="Avenir Next"/>
                 <a:ea typeface="Avenir Next"/>
@@ -5856,19 +7622,19 @@
           <p:cNvPr id="9" name="">
             <a:extLst xmlns:a="http://schemas.openxmlformats.org/drawingml/2006/main">
               <a:ext uri="{FF2B5EF4-FFF2-40B4-BE49-F238E27FC236}">
-                <a16:creationId xmlns:a16="http://schemas.microsoft.com/office/drawing/2014/main" id="{A69A0049-4FB7-49BA-B641-A0FEE14E0F35}"/>
-              </a:ext>
-            </a:extLst>
-          </p:cNvPr>
-          <p:cNvSpPr>
-            <a:spLocks xmlns:a="http://schemas.openxmlformats.org/drawingml/2006/main" noGrp="1"/>
-          </p:cNvSpPr>
-          <p:nvPr/>
-        </p:nvSpPr>
-        <p:spPr>
-          <a:xfrm xmlns:a="http://schemas.openxmlformats.org/drawingml/2006/main">
-            <a:off x="914400" y="6400800"/>
-            <a:ext cx="6858000" cy="533400"/>
+                <a16:creationId xmlns:a16="http://schemas.microsoft.com/office/drawing/2014/main" id="{3E39138D-8827-4134-A5B8-D3D86AF599AC}"/>
+              </a:ext>
+            </a:extLst>
+          </p:cNvPr>
+          <p:cNvSpPr>
+            <a:spLocks xmlns:a="http://schemas.openxmlformats.org/drawingml/2006/main" noGrp="1"/>
+          </p:cNvSpPr>
+          <p:nvPr/>
+        </p:nvSpPr>
+        <p:spPr>
+          <a:xfrm xmlns:a="http://schemas.openxmlformats.org/drawingml/2006/main">
+            <a:off x="914400" y="4476750"/>
+            <a:ext cx="6191250" cy="533400"/>
           </a:xfrm>
           <a:prstGeom xmlns:a="http://schemas.openxmlformats.org/drawingml/2006/main" prst="rect">
             <a:avLst/>
@@ -5889,37 +7655,316 @@
               </a:defRPr>
             </a:pPr>
             <a:r>
-              <a:t>Submission video: demo/varfoot-demo-2min.mp4</a:t>
-            </a:r>
-          </a:p>
-        </p:txBody>
-      </p:sp>
-      <p:pic>
-        <p:nvPicPr>
-          <p:cNvPr id="10" name=""/>
-          <p:cNvPicPr>
-            <a:picLocks xmlns:a="http://schemas.openxmlformats.org/drawingml/2006/main" noChangeAspect="1"/>
-          </p:cNvPicPr>
-          <p:nvPr/>
-        </p:nvPicPr>
-        <p:blipFill>
-          <a:blip xmlns:r="http://schemas.openxmlformats.org/officeDocument/2006/relationships" xmlns:a="http://schemas.openxmlformats.org/drawingml/2006/main" r:embed="Rfbf85066974f4091"/>
-          <a:stretch xmlns:a="http://schemas.openxmlformats.org/drawingml/2006/main"/>
-        </p:blipFill>
-        <p:spPr>
-          <a:xfrm xmlns:a="http://schemas.openxmlformats.org/drawingml/2006/main">
-            <a:off x="9172846" y="704850"/>
-            <a:ext cx="3257008" cy="7048500"/>
-          </a:xfrm>
-          <a:prstGeom xmlns:a="http://schemas.openxmlformats.org/drawingml/2006/main" prst="rect">
-            <a:avLst/>
-          </a:prstGeom>
-        </p:spPr>
-      </p:pic>
+              <a:t>Effort without a system.</a:t>
+            </a:r>
+          </a:p>
+        </p:txBody>
+      </p:sp>
+      <p:sp>
+        <p:nvSpPr>
+          <p:cNvPr id="10" name="">
+            <a:extLst xmlns:a="http://schemas.openxmlformats.org/drawingml/2006/main">
+              <a:ext uri="{FF2B5EF4-FFF2-40B4-BE49-F238E27FC236}">
+                <a16:creationId xmlns:a16="http://schemas.microsoft.com/office/drawing/2014/main" id="{08601B0E-1E97-455A-BBB1-1B914117C006}"/>
+              </a:ext>
+            </a:extLst>
+          </p:cNvPr>
+          <p:cNvSpPr>
+            <a:spLocks xmlns:a="http://schemas.openxmlformats.org/drawingml/2006/main" noGrp="1"/>
+          </p:cNvSpPr>
+          <p:nvPr/>
+        </p:nvSpPr>
+        <p:spPr>
+          <a:xfrm xmlns:a="http://schemas.openxmlformats.org/drawingml/2006/main">
+            <a:off x="7639050" y="2647950"/>
+            <a:ext cx="6572250" cy="381000"/>
+          </a:xfrm>
+          <a:prstGeom xmlns:a="http://schemas.openxmlformats.org/drawingml/2006/main" prst="rect">
+            <a:avLst/>
+          </a:prstGeom>
+        </p:spPr>
+        <p:txBody>
+          <a:bodyPr xmlns:a="http://schemas.openxmlformats.org/drawingml/2006/main" wrap="square" lIns="0" tIns="0" rIns="0" bIns="0"/>
+          <a:lstStyle xmlns:a="http://schemas.openxmlformats.org/drawingml/2006/main"/>
+          <a:p xmlns:a="http://schemas.openxmlformats.org/drawingml/2006/main">
+            <a:pPr>
+              <a:defRPr sz="1650" b="1">
+                <a:solidFill>
+                  <a:srgbClr val="39FF73"/>
+                </a:solidFill>
+                <a:latin typeface="Avenir Next"/>
+                <a:ea typeface="Avenir Next"/>
+                <a:cs typeface="Avenir Next"/>
+              </a:defRPr>
+            </a:pPr>
+            <a:r>
+              <a:t>AFTER</a:t>
+            </a:r>
+          </a:p>
+        </p:txBody>
+      </p:sp>
+      <p:sp>
+        <p:nvSpPr>
+          <p:cNvPr id="11" name="">
+            <a:extLst xmlns:a="http://schemas.openxmlformats.org/drawingml/2006/main">
+              <a:ext uri="{FF2B5EF4-FFF2-40B4-BE49-F238E27FC236}">
+                <a16:creationId xmlns:a16="http://schemas.microsoft.com/office/drawing/2014/main" id="{BF213AA7-4574-401E-9F1D-C00AABEBB964}"/>
+              </a:ext>
+            </a:extLst>
+          </p:cNvPr>
+          <p:cNvSpPr>
+            <a:spLocks xmlns:a="http://schemas.openxmlformats.org/drawingml/2006/main" noGrp="1"/>
+          </p:cNvSpPr>
+          <p:nvPr/>
+        </p:nvSpPr>
+        <p:spPr>
+          <a:xfrm xmlns:a="http://schemas.openxmlformats.org/drawingml/2006/main">
+            <a:off x="7639050" y="3181350"/>
+            <a:ext cx="190500" cy="323850"/>
+          </a:xfrm>
+          <a:prstGeom xmlns:a="http://schemas.openxmlformats.org/drawingml/2006/main" prst="rect">
+            <a:avLst/>
+          </a:prstGeom>
+        </p:spPr>
+        <p:txBody>
+          <a:bodyPr xmlns:a="http://schemas.openxmlformats.org/drawingml/2006/main" wrap="square" lIns="0" tIns="0" rIns="0" bIns="0"/>
+          <a:lstStyle xmlns:a="http://schemas.openxmlformats.org/drawingml/2006/main"/>
+          <a:p xmlns:a="http://schemas.openxmlformats.org/drawingml/2006/main">
+            <a:pPr>
+              <a:defRPr sz="1875" b="1">
+                <a:solidFill>
+                  <a:srgbClr val="39FF73"/>
+                </a:solidFill>
+                <a:latin typeface="Avenir Next"/>
+                <a:ea typeface="Avenir Next"/>
+                <a:cs typeface="Avenir Next"/>
+              </a:defRPr>
+            </a:pPr>
+            <a:r>
+              <a:t>-</a:t>
+            </a:r>
+          </a:p>
+        </p:txBody>
+      </p:sp>
+      <p:sp>
+        <p:nvSpPr>
+          <p:cNvPr id="12" name="">
+            <a:extLst xmlns:a="http://schemas.openxmlformats.org/drawingml/2006/main">
+              <a:ext uri="{FF2B5EF4-FFF2-40B4-BE49-F238E27FC236}">
+                <a16:creationId xmlns:a16="http://schemas.microsoft.com/office/drawing/2014/main" id="{9FE5EE02-E422-4A9A-9781-703CC4EDE590}"/>
+              </a:ext>
+            </a:extLst>
+          </p:cNvPr>
+          <p:cNvSpPr>
+            <a:spLocks xmlns:a="http://schemas.openxmlformats.org/drawingml/2006/main" noGrp="1"/>
+          </p:cNvSpPr>
+          <p:nvPr/>
+        </p:nvSpPr>
+        <p:spPr>
+          <a:xfrm xmlns:a="http://schemas.openxmlformats.org/drawingml/2006/main">
+            <a:off x="7943850" y="3181350"/>
+            <a:ext cx="6191250" cy="533400"/>
+          </a:xfrm>
+          <a:prstGeom xmlns:a="http://schemas.openxmlformats.org/drawingml/2006/main" prst="rect">
+            <a:avLst/>
+          </a:prstGeom>
+        </p:spPr>
+        <p:txBody>
+          <a:bodyPr xmlns:a="http://schemas.openxmlformats.org/drawingml/2006/main" wrap="square" lIns="0" tIns="0" rIns="0" bIns="0"/>
+          <a:lstStyle xmlns:a="http://schemas.openxmlformats.org/drawingml/2006/main"/>
+          <a:p xmlns:a="http://schemas.openxmlformats.org/drawingml/2006/main">
+            <a:pPr>
+              <a:defRPr sz="1800" b="1">
+                <a:solidFill>
+                  <a:srgbClr val="F4F5F6"/>
+                </a:solidFill>
+                <a:latin typeface="Avenir Next"/>
+                <a:ea typeface="Avenir Next"/>
+                <a:cs typeface="Avenir Next"/>
+              </a:defRPr>
+            </a:pPr>
+            <a:r>
+              <a:t>Personalized daily sessions from ranked weaknesses.</a:t>
+            </a:r>
+          </a:p>
+        </p:txBody>
+      </p:sp>
+      <p:sp>
+        <p:nvSpPr>
+          <p:cNvPr id="13" name="">
+            <a:extLst xmlns:a="http://schemas.openxmlformats.org/drawingml/2006/main">
+              <a:ext uri="{FF2B5EF4-FFF2-40B4-BE49-F238E27FC236}">
+                <a16:creationId xmlns:a16="http://schemas.microsoft.com/office/drawing/2014/main" id="{C279867C-CFBC-45DF-B5C3-E13ED599C5C8}"/>
+              </a:ext>
+            </a:extLst>
+          </p:cNvPr>
+          <p:cNvSpPr>
+            <a:spLocks xmlns:a="http://schemas.openxmlformats.org/drawingml/2006/main" noGrp="1"/>
+          </p:cNvSpPr>
+          <p:nvPr/>
+        </p:nvSpPr>
+        <p:spPr>
+          <a:xfrm xmlns:a="http://schemas.openxmlformats.org/drawingml/2006/main">
+            <a:off x="7639050" y="3829050"/>
+            <a:ext cx="190500" cy="323850"/>
+          </a:xfrm>
+          <a:prstGeom xmlns:a="http://schemas.openxmlformats.org/drawingml/2006/main" prst="rect">
+            <a:avLst/>
+          </a:prstGeom>
+        </p:spPr>
+        <p:txBody>
+          <a:bodyPr xmlns:a="http://schemas.openxmlformats.org/drawingml/2006/main" wrap="square" lIns="0" tIns="0" rIns="0" bIns="0"/>
+          <a:lstStyle xmlns:a="http://schemas.openxmlformats.org/drawingml/2006/main"/>
+          <a:p xmlns:a="http://schemas.openxmlformats.org/drawingml/2006/main">
+            <a:pPr>
+              <a:defRPr sz="1875" b="1">
+                <a:solidFill>
+                  <a:srgbClr val="39FF73"/>
+                </a:solidFill>
+                <a:latin typeface="Avenir Next"/>
+                <a:ea typeface="Avenir Next"/>
+                <a:cs typeface="Avenir Next"/>
+              </a:defRPr>
+            </a:pPr>
+            <a:r>
+              <a:t>-</a:t>
+            </a:r>
+          </a:p>
+        </p:txBody>
+      </p:sp>
+      <p:sp>
+        <p:nvSpPr>
+          <p:cNvPr id="14" name="">
+            <a:extLst xmlns:a="http://schemas.openxmlformats.org/drawingml/2006/main">
+              <a:ext uri="{FF2B5EF4-FFF2-40B4-BE49-F238E27FC236}">
+                <a16:creationId xmlns:a16="http://schemas.microsoft.com/office/drawing/2014/main" id="{5989B9DB-28F6-4CD6-9101-B26B7E776671}"/>
+              </a:ext>
+            </a:extLst>
+          </p:cNvPr>
+          <p:cNvSpPr>
+            <a:spLocks xmlns:a="http://schemas.openxmlformats.org/drawingml/2006/main" noGrp="1"/>
+          </p:cNvSpPr>
+          <p:nvPr/>
+        </p:nvSpPr>
+        <p:spPr>
+          <a:xfrm xmlns:a="http://schemas.openxmlformats.org/drawingml/2006/main">
+            <a:off x="7943850" y="3829050"/>
+            <a:ext cx="6191250" cy="533400"/>
+          </a:xfrm>
+          <a:prstGeom xmlns:a="http://schemas.openxmlformats.org/drawingml/2006/main" prst="rect">
+            <a:avLst/>
+          </a:prstGeom>
+        </p:spPr>
+        <p:txBody>
+          <a:bodyPr xmlns:a="http://schemas.openxmlformats.org/drawingml/2006/main" wrap="square" lIns="0" tIns="0" rIns="0" bIns="0"/>
+          <a:lstStyle xmlns:a="http://schemas.openxmlformats.org/drawingml/2006/main"/>
+          <a:p xmlns:a="http://schemas.openxmlformats.org/drawingml/2006/main">
+            <a:pPr>
+              <a:defRPr sz="1800" b="1">
+                <a:solidFill>
+                  <a:srgbClr val="F4F5F6"/>
+                </a:solidFill>
+                <a:latin typeface="Avenir Next"/>
+                <a:ea typeface="Avenir Next"/>
+                <a:cs typeface="Avenir Next"/>
+              </a:defRPr>
+            </a:pPr>
+            <a:r>
+              <a:t>Progress tracked against the tryout date.</a:t>
+            </a:r>
+          </a:p>
+        </p:txBody>
+      </p:sp>
+      <p:sp>
+        <p:nvSpPr>
+          <p:cNvPr id="15" name="">
+            <a:extLst xmlns:a="http://schemas.openxmlformats.org/drawingml/2006/main">
+              <a:ext uri="{FF2B5EF4-FFF2-40B4-BE49-F238E27FC236}">
+                <a16:creationId xmlns:a16="http://schemas.microsoft.com/office/drawing/2014/main" id="{153FAFA0-66CE-444C-8926-077CE49A896D}"/>
+              </a:ext>
+            </a:extLst>
+          </p:cNvPr>
+          <p:cNvSpPr>
+            <a:spLocks xmlns:a="http://schemas.openxmlformats.org/drawingml/2006/main" noGrp="1"/>
+          </p:cNvSpPr>
+          <p:nvPr/>
+        </p:nvSpPr>
+        <p:spPr>
+          <a:xfrm xmlns:a="http://schemas.openxmlformats.org/drawingml/2006/main">
+            <a:off x="7639050" y="4476750"/>
+            <a:ext cx="190500" cy="323850"/>
+          </a:xfrm>
+          <a:prstGeom xmlns:a="http://schemas.openxmlformats.org/drawingml/2006/main" prst="rect">
+            <a:avLst/>
+          </a:prstGeom>
+        </p:spPr>
+        <p:txBody>
+          <a:bodyPr xmlns:a="http://schemas.openxmlformats.org/drawingml/2006/main" wrap="square" lIns="0" tIns="0" rIns="0" bIns="0"/>
+          <a:lstStyle xmlns:a="http://schemas.openxmlformats.org/drawingml/2006/main"/>
+          <a:p xmlns:a="http://schemas.openxmlformats.org/drawingml/2006/main">
+            <a:pPr>
+              <a:defRPr sz="1875" b="1">
+                <a:solidFill>
+                  <a:srgbClr val="39FF73"/>
+                </a:solidFill>
+                <a:latin typeface="Avenir Next"/>
+                <a:ea typeface="Avenir Next"/>
+                <a:cs typeface="Avenir Next"/>
+              </a:defRPr>
+            </a:pPr>
+            <a:r>
+              <a:t>-</a:t>
+            </a:r>
+          </a:p>
+        </p:txBody>
+      </p:sp>
+      <p:sp>
+        <p:nvSpPr>
+          <p:cNvPr id="16" name="">
+            <a:extLst xmlns:a="http://schemas.openxmlformats.org/drawingml/2006/main">
+              <a:ext uri="{FF2B5EF4-FFF2-40B4-BE49-F238E27FC236}">
+                <a16:creationId xmlns:a16="http://schemas.microsoft.com/office/drawing/2014/main" id="{F94E3B5C-2C6E-4552-98A8-F1951CB0CA3D}"/>
+              </a:ext>
+            </a:extLst>
+          </p:cNvPr>
+          <p:cNvSpPr>
+            <a:spLocks xmlns:a="http://schemas.openxmlformats.org/drawingml/2006/main" noGrp="1"/>
+          </p:cNvSpPr>
+          <p:nvPr/>
+        </p:nvSpPr>
+        <p:spPr>
+          <a:xfrm xmlns:a="http://schemas.openxmlformats.org/drawingml/2006/main">
+            <a:off x="7943850" y="4476750"/>
+            <a:ext cx="6191250" cy="533400"/>
+          </a:xfrm>
+          <a:prstGeom xmlns:a="http://schemas.openxmlformats.org/drawingml/2006/main" prst="rect">
+            <a:avLst/>
+          </a:prstGeom>
+        </p:spPr>
+        <p:txBody>
+          <a:bodyPr xmlns:a="http://schemas.openxmlformats.org/drawingml/2006/main" wrap="square" lIns="0" tIns="0" rIns="0" bIns="0"/>
+          <a:lstStyle xmlns:a="http://schemas.openxmlformats.org/drawingml/2006/main"/>
+          <a:p xmlns:a="http://schemas.openxmlformats.org/drawingml/2006/main">
+            <a:pPr>
+              <a:defRPr sz="1800" b="1">
+                <a:solidFill>
+                  <a:srgbClr val="F4F5F6"/>
+                </a:solidFill>
+                <a:latin typeface="Avenir Next"/>
+                <a:ea typeface="Avenir Next"/>
+                <a:cs typeface="Avenir Next"/>
+              </a:defRPr>
+            </a:pPr>
+            <a:r>
+              <a:t>A coach-like assistant that always knows the next step.</a:t>
+            </a:r>
+          </a:p>
+        </p:txBody>
+      </p:sp>
     </p:spTree>
     <p:extLst>
       <p:ext uri="{BB962C8B-B14F-4D97-AF65-F5344CB8AC3E}">
-        <p14:creationId xmlns:p14="http://schemas.microsoft.com/office/powerpoint/2010/main" val="2086108414"/>
+        <p14:creationId xmlns:p14="http://schemas.microsoft.com/office/powerpoint/2010/main" val="1904547659"/>
       </p:ext>
     </p:extLst>
   </p:cSld>
